--- a/results/final_presentation/K-Privacy-Filter-final-presentation-20260529.pptx
+++ b/results/final_presentation/K-Privacy-Filter-final-presentation-20260529.pptx
@@ -2,24 +2,24 @@
 <file path=ppt/presentation.xml><?xml version="1.0" encoding="utf-8"?>
 <p:presentation xmlns:p="http://schemas.openxmlformats.org/presentationml/2006/main">
   <p:sldMasterIdLst>
-    <p:sldMasterId xmlns:r="http://schemas.openxmlformats.org/officeDocument/2006/relationships" id="2147483648" r:id="R0c38abebc197485f"/>
+    <p:sldMasterId xmlns:r="http://schemas.openxmlformats.org/officeDocument/2006/relationships" id="2147483648" r:id="R3aa4209f4f544d09"/>
   </p:sldMasterIdLst>
   <p:notesMasterIdLst>
-    <p:notesMasterId xmlns:r="http://schemas.openxmlformats.org/officeDocument/2006/relationships" r:id="R5e60e106f9b0413d"/>
+    <p:notesMasterId xmlns:r="http://schemas.openxmlformats.org/officeDocument/2006/relationships" r:id="R3f9c527d84194a66"/>
   </p:notesMasterIdLst>
   <p:sldIdLst>
-    <p:sldId xmlns:r="http://schemas.openxmlformats.org/officeDocument/2006/relationships" id="256" r:id="R2790797848de4a44"/>
-    <p:sldId xmlns:r="http://schemas.openxmlformats.org/officeDocument/2006/relationships" id="257" r:id="R3a6b7b22dca04c9e"/>
-    <p:sldId xmlns:r="http://schemas.openxmlformats.org/officeDocument/2006/relationships" id="258" r:id="R8ecd20c0958249c6"/>
-    <p:sldId xmlns:r="http://schemas.openxmlformats.org/officeDocument/2006/relationships" id="259" r:id="Rfd062d48d1554316"/>
-    <p:sldId xmlns:r="http://schemas.openxmlformats.org/officeDocument/2006/relationships" id="260" r:id="R0d9546ec8fa44ee1"/>
-    <p:sldId xmlns:r="http://schemas.openxmlformats.org/officeDocument/2006/relationships" id="261" r:id="Rb79615b1265c454d"/>
-    <p:sldId xmlns:r="http://schemas.openxmlformats.org/officeDocument/2006/relationships" id="262" r:id="R1ccb41ca3c6d4564"/>
-    <p:sldId xmlns:r="http://schemas.openxmlformats.org/officeDocument/2006/relationships" id="263" r:id="Rbc7007d75cfa43c3"/>
-    <p:sldId xmlns:r="http://schemas.openxmlformats.org/officeDocument/2006/relationships" id="264" r:id="Rc8e2afcf052b4868"/>
-    <p:sldId xmlns:r="http://schemas.openxmlformats.org/officeDocument/2006/relationships" id="265" r:id="Rac00246cd80944af"/>
-    <p:sldId xmlns:r="http://schemas.openxmlformats.org/officeDocument/2006/relationships" id="266" r:id="R4f79303a019c4a07"/>
-    <p:sldId xmlns:r="http://schemas.openxmlformats.org/officeDocument/2006/relationships" id="267" r:id="R2c15fe4f3e7c45db"/>
+    <p:sldId xmlns:r="http://schemas.openxmlformats.org/officeDocument/2006/relationships" id="256" r:id="R2b096060293b44ab"/>
+    <p:sldId xmlns:r="http://schemas.openxmlformats.org/officeDocument/2006/relationships" id="257" r:id="Rb524ae9a4dbe4729"/>
+    <p:sldId xmlns:r="http://schemas.openxmlformats.org/officeDocument/2006/relationships" id="258" r:id="Re4ca580b71124256"/>
+    <p:sldId xmlns:r="http://schemas.openxmlformats.org/officeDocument/2006/relationships" id="259" r:id="Rb9a43d7862b0448b"/>
+    <p:sldId xmlns:r="http://schemas.openxmlformats.org/officeDocument/2006/relationships" id="260" r:id="R07f4b8183b7347bd"/>
+    <p:sldId xmlns:r="http://schemas.openxmlformats.org/officeDocument/2006/relationships" id="261" r:id="R63c76c0eed674523"/>
+    <p:sldId xmlns:r="http://schemas.openxmlformats.org/officeDocument/2006/relationships" id="262" r:id="R9231f08b56ed4e5b"/>
+    <p:sldId xmlns:r="http://schemas.openxmlformats.org/officeDocument/2006/relationships" id="263" r:id="Rd96459d3d9a14442"/>
+    <p:sldId xmlns:r="http://schemas.openxmlformats.org/officeDocument/2006/relationships" id="264" r:id="Rb5ce14f624c54fbb"/>
+    <p:sldId xmlns:r="http://schemas.openxmlformats.org/officeDocument/2006/relationships" id="265" r:id="Rf6ff782f9505417c"/>
+    <p:sldId xmlns:r="http://schemas.openxmlformats.org/officeDocument/2006/relationships" id="266" r:id="R04a19af0884e4a87"/>
+    <p:sldId xmlns:r="http://schemas.openxmlformats.org/officeDocument/2006/relationships" id="267" r:id="R432fb3eaf0704206"/>
   </p:sldIdLst>
   <p:sldSz cx="12192000" cy="6858000"/>
   <p:notesSz cx="6858000" cy="9144000"/>
@@ -1292,7 +1292,7 @@
   </p:cSld>
   <p:clrMap bg1="lt1" tx1="dk1" bg2="lt2" tx2="dk2" accent1="accent1" accent2="accent2" accent3="accent3" accent4="accent4" accent5="accent5" accent6="accent6" hlink="hlink" folHlink="folHlink"/>
   <p:sldLayoutIdLst>
-    <p:sldLayoutId xmlns:r="http://schemas.openxmlformats.org/officeDocument/2006/relationships" id="2147483649" r:id="R57506a0c1de34830"/>
+    <p:sldLayoutId xmlns:r="http://schemas.openxmlformats.org/officeDocument/2006/relationships" id="2147483649" r:id="Rc71e0d13581e4fd9"/>
   </p:sldLayoutIdLst>
   <p:txStyles>
     <p:titleStyle>
@@ -1591,7 +1591,7 @@
           <p:cNvPr id="1" name="">
             <a:extLst xmlns:a="http://schemas.openxmlformats.org/drawingml/2006/main">
               <a:ext uri="{FF2B5EF4-FFF2-40B4-BE49-F238E27FC236}">
-                <a16:creationId xmlns:a16="http://schemas.microsoft.com/office/drawing/2014/main" id="{9A62A8F6-CFC2-4E73-BBE3-3E3A2D2FDB94}"/>
+                <a16:creationId xmlns:a16="http://schemas.microsoft.com/office/drawing/2014/main" id="{F06B003B-AF6E-4BF6-818B-84C73A5E9037}"/>
               </a:ext>
             </a:extLst>
           </p:cNvPr>
@@ -1630,7 +1630,7 @@
           <p:nvPr/>
         </p:nvPicPr>
         <p:blipFill>
-          <a:blip xmlns:r="http://schemas.openxmlformats.org/officeDocument/2006/relationships" xmlns:a="http://schemas.openxmlformats.org/drawingml/2006/main" r:embed="R62a1783fb74e4923"/>
+          <a:blip xmlns:r="http://schemas.openxmlformats.org/officeDocument/2006/relationships" xmlns:a="http://schemas.openxmlformats.org/drawingml/2006/main" r:embed="Ra17e870beed244a1"/>
           <a:srcRect xmlns:a="http://schemas.openxmlformats.org/drawingml/2006/main" l="30068" t="0" r="30068" b="0"/>
           <a:stretch xmlns:a="http://schemas.openxmlformats.org/drawingml/2006/main">
             <a:fillRect l="0" t="0" r="0" b="0"/>
@@ -1651,7 +1651,7 @@
           <p:cNvPr id="3" name="">
             <a:extLst xmlns:a="http://schemas.openxmlformats.org/drawingml/2006/main">
               <a:ext uri="{FF2B5EF4-FFF2-40B4-BE49-F238E27FC236}">
-                <a16:creationId xmlns:a16="http://schemas.microsoft.com/office/drawing/2014/main" id="{4DFA1AF8-C1BC-41EA-A645-9BCBA6D7C1EE}"/>
+                <a16:creationId xmlns:a16="http://schemas.microsoft.com/office/drawing/2014/main" id="{92BBEB22-CA06-4F88-9B86-5E6642D6A84C}"/>
               </a:ext>
             </a:extLst>
           </p:cNvPr>
@@ -1686,7 +1686,7 @@
           <p:cNvPr id="4" name="">
             <a:extLst xmlns:a="http://schemas.openxmlformats.org/drawingml/2006/main">
               <a:ext uri="{FF2B5EF4-FFF2-40B4-BE49-F238E27FC236}">
-                <a16:creationId xmlns:a16="http://schemas.microsoft.com/office/drawing/2014/main" id="{278CDBE7-CA88-4170-ACE1-A63F74E238AE}"/>
+                <a16:creationId xmlns:a16="http://schemas.microsoft.com/office/drawing/2014/main" id="{5350BAC7-ED6C-4D51-BAAF-69D59F5780BA}"/>
               </a:ext>
             </a:extLst>
           </p:cNvPr>
@@ -1723,7 +1723,7 @@
           <p:cNvPr id="5" name="">
             <a:extLst xmlns:a="http://schemas.openxmlformats.org/drawingml/2006/main">
               <a:ext uri="{FF2B5EF4-FFF2-40B4-BE49-F238E27FC236}">
-                <a16:creationId xmlns:a16="http://schemas.microsoft.com/office/drawing/2014/main" id="{A3A44C26-A20E-46E6-BEB7-32FF11C4829A}"/>
+                <a16:creationId xmlns:a16="http://schemas.microsoft.com/office/drawing/2014/main" id="{0E0B0354-EB0E-43C9-BE83-876D7C1004E0}"/>
               </a:ext>
             </a:extLst>
           </p:cNvPr>
@@ -1787,7 +1787,7 @@
           <p:cNvPr id="6" name="">
             <a:extLst xmlns:a="http://schemas.openxmlformats.org/drawingml/2006/main">
               <a:ext uri="{FF2B5EF4-FFF2-40B4-BE49-F238E27FC236}">
-                <a16:creationId xmlns:a16="http://schemas.microsoft.com/office/drawing/2014/main" id="{CA0B19BE-EEDE-428E-83E4-EC1DDE821101}"/>
+                <a16:creationId xmlns:a16="http://schemas.microsoft.com/office/drawing/2014/main" id="{0BB5EF04-B177-43C6-80A7-AF3F23CCA5EE}"/>
               </a:ext>
             </a:extLst>
           </p:cNvPr>
@@ -1851,7 +1851,7 @@
           <p:cNvPr id="7" name="">
             <a:extLst xmlns:a="http://schemas.openxmlformats.org/drawingml/2006/main">
               <a:ext uri="{FF2B5EF4-FFF2-40B4-BE49-F238E27FC236}">
-                <a16:creationId xmlns:a16="http://schemas.microsoft.com/office/drawing/2014/main" id="{C57084F4-2907-4A28-A833-FF4F993CE6E2}"/>
+                <a16:creationId xmlns:a16="http://schemas.microsoft.com/office/drawing/2014/main" id="{7F800D20-9FEE-4A5F-9FCA-0CA182095498}"/>
               </a:ext>
             </a:extLst>
           </p:cNvPr>
@@ -1915,7 +1915,7 @@
           <p:cNvPr id="8" name="">
             <a:extLst xmlns:a="http://schemas.openxmlformats.org/drawingml/2006/main">
               <a:ext uri="{FF2B5EF4-FFF2-40B4-BE49-F238E27FC236}">
-                <a16:creationId xmlns:a16="http://schemas.microsoft.com/office/drawing/2014/main" id="{0A746D86-52E1-4164-AFE0-A4D03EDA9F22}"/>
+                <a16:creationId xmlns:a16="http://schemas.microsoft.com/office/drawing/2014/main" id="{6E3A975A-0351-4418-9A91-9D64886DA5CC}"/>
               </a:ext>
             </a:extLst>
           </p:cNvPr>
@@ -1969,7 +1969,7 @@
                 <a:ea typeface="Malgun Gothic"/>
                 <a:cs typeface="Malgun Gothic"/>
               </a:rPr>
-              <a:t>OPF의 범용 탐지력에 한국형 Regex Safety Net과 문맥 기반 오탐 억제를 결합해, 라이브 데모가 가능한 개인정보 마스킹 시스템을 완성했습니다.</a:t>
+              <a:t>OPF의 범용 탐지력에 한국형 Privacy Rule Pack과 문맥 기반 오탐 억제를 결합해, 라이브 데모가 가능한 개인정보 마스킹 시스템을 완성했습니다.</a:t>
             </a:r>
           </a:p>
         </p:txBody>
@@ -1979,7 +1979,7 @@
           <p:cNvPr id="9" name="">
             <a:extLst xmlns:a="http://schemas.openxmlformats.org/drawingml/2006/main">
               <a:ext uri="{FF2B5EF4-FFF2-40B4-BE49-F238E27FC236}">
-                <a16:creationId xmlns:a16="http://schemas.microsoft.com/office/drawing/2014/main" id="{59CC5177-7D7A-431F-9428-ADE42B114ECD}"/>
+                <a16:creationId xmlns:a16="http://schemas.microsoft.com/office/drawing/2014/main" id="{BA1F71F1-C120-4E68-A6EB-1463D61B5CED}"/>
               </a:ext>
             </a:extLst>
           </p:cNvPr>
@@ -2012,7 +2012,7 @@
           <p:cNvPr id="10" name="">
             <a:extLst xmlns:a="http://schemas.openxmlformats.org/drawingml/2006/main">
               <a:ext uri="{FF2B5EF4-FFF2-40B4-BE49-F238E27FC236}">
-                <a16:creationId xmlns:a16="http://schemas.microsoft.com/office/drawing/2014/main" id="{4E45C5FE-7EE0-4F62-A4A2-0F60A317C6E3}"/>
+                <a16:creationId xmlns:a16="http://schemas.microsoft.com/office/drawing/2014/main" id="{28D47122-2AD5-484B-833E-CFCA8FFC447B}"/>
               </a:ext>
             </a:extLst>
           </p:cNvPr>
@@ -2066,7 +2066,7 @@
                 <a:ea typeface="Aptos Display"/>
                 <a:cs typeface="Aptos Display"/>
               </a:rPr>
-              <a:t>0.6919</a:t>
+              <a:t>0.7294</a:t>
             </a:r>
           </a:p>
         </p:txBody>
@@ -2076,7 +2076,7 @@
           <p:cNvPr id="11" name="">
             <a:extLst xmlns:a="http://schemas.openxmlformats.org/drawingml/2006/main">
               <a:ext uri="{FF2B5EF4-FFF2-40B4-BE49-F238E27FC236}">
-                <a16:creationId xmlns:a16="http://schemas.microsoft.com/office/drawing/2014/main" id="{E2C77DC6-76E4-4626-9BC9-01DE8A1D3662}"/>
+                <a16:creationId xmlns:a16="http://schemas.microsoft.com/office/drawing/2014/main" id="{CF2A249E-672A-4DD0-8463-5F94AD999A00}"/>
               </a:ext>
             </a:extLst>
           </p:cNvPr>
@@ -2140,7 +2140,7 @@
           <p:cNvPr id="12" name="">
             <a:extLst xmlns:a="http://schemas.openxmlformats.org/drawingml/2006/main">
               <a:ext uri="{FF2B5EF4-FFF2-40B4-BE49-F238E27FC236}">
-                <a16:creationId xmlns:a16="http://schemas.microsoft.com/office/drawing/2014/main" id="{FE6F0241-7400-4414-BAB6-609918C37760}"/>
+                <a16:creationId xmlns:a16="http://schemas.microsoft.com/office/drawing/2014/main" id="{E1FA5C0B-EB30-4FBF-BAC5-70C3BA8CF9CC}"/>
               </a:ext>
             </a:extLst>
           </p:cNvPr>
@@ -2194,7 +2194,7 @@
                 <a:ea typeface="Malgun Gothic"/>
                 <a:cs typeface="Malgun Gothic"/>
               </a:rPr>
-              <a:t>보수적 최종 replay 기준</a:t>
+              <a:t>rule-pack 확장 후 replay</a:t>
             </a:r>
           </a:p>
         </p:txBody>
@@ -2204,7 +2204,7 @@
           <p:cNvPr id="13" name="">
             <a:extLst xmlns:a="http://schemas.openxmlformats.org/drawingml/2006/main">
               <a:ext uri="{FF2B5EF4-FFF2-40B4-BE49-F238E27FC236}">
-                <a16:creationId xmlns:a16="http://schemas.microsoft.com/office/drawing/2014/main" id="{B7B1D52C-12C7-4E04-AAA9-72458FA75A3D}"/>
+                <a16:creationId xmlns:a16="http://schemas.microsoft.com/office/drawing/2014/main" id="{154B1F0B-FD5C-4FA4-B50B-F45D50825382}"/>
               </a:ext>
             </a:extLst>
           </p:cNvPr>
@@ -2268,7 +2268,7 @@
           <p:cNvPr id="14" name="">
             <a:extLst xmlns:a="http://schemas.openxmlformats.org/drawingml/2006/main">
               <a:ext uri="{FF2B5EF4-FFF2-40B4-BE49-F238E27FC236}">
-                <a16:creationId xmlns:a16="http://schemas.microsoft.com/office/drawing/2014/main" id="{9DE2143C-7C9C-4927-B247-EAB691FF4155}"/>
+                <a16:creationId xmlns:a16="http://schemas.microsoft.com/office/drawing/2014/main" id="{09333894-526B-4355-BCEE-44B4953781CA}"/>
               </a:ext>
             </a:extLst>
           </p:cNvPr>
@@ -2332,7 +2332,7 @@
           <p:cNvPr id="15" name="">
             <a:extLst xmlns:a="http://schemas.openxmlformats.org/drawingml/2006/main">
               <a:ext uri="{FF2B5EF4-FFF2-40B4-BE49-F238E27FC236}">
-                <a16:creationId xmlns:a16="http://schemas.microsoft.com/office/drawing/2014/main" id="{E65D31B8-4FBD-4EF0-8199-E3AB930163B3}"/>
+                <a16:creationId xmlns:a16="http://schemas.microsoft.com/office/drawing/2014/main" id="{A67D567B-0891-47A0-BC67-1EC5A72E00DE}"/>
               </a:ext>
             </a:extLst>
           </p:cNvPr>
@@ -2419,7 +2419,7 @@
           <p:cNvPr id="16" name="">
             <a:extLst xmlns:a="http://schemas.openxmlformats.org/drawingml/2006/main">
               <a:ext uri="{FF2B5EF4-FFF2-40B4-BE49-F238E27FC236}">
-                <a16:creationId xmlns:a16="http://schemas.microsoft.com/office/drawing/2014/main" id="{4F999D86-1E14-4FE3-827E-0638D20C7D6E}"/>
+                <a16:creationId xmlns:a16="http://schemas.microsoft.com/office/drawing/2014/main" id="{1703D510-38CE-4C82-8E88-B4035597C21A}"/>
               </a:ext>
             </a:extLst>
           </p:cNvPr>
@@ -2483,7 +2483,7 @@
           <p:cNvPr id="17" name="">
             <a:extLst xmlns:a="http://schemas.openxmlformats.org/drawingml/2006/main">
               <a:ext uri="{FF2B5EF4-FFF2-40B4-BE49-F238E27FC236}">
-                <a16:creationId xmlns:a16="http://schemas.microsoft.com/office/drawing/2014/main" id="{EC0832FE-5079-4FC8-9CE4-5AC503AEC9E5}"/>
+                <a16:creationId xmlns:a16="http://schemas.microsoft.com/office/drawing/2014/main" id="{88C5FEEF-7284-4262-BBC0-BA80941474C1}"/>
               </a:ext>
             </a:extLst>
           </p:cNvPr>
@@ -2547,7 +2547,7 @@
           <p:cNvPr id="18" name="">
             <a:extLst xmlns:a="http://schemas.openxmlformats.org/drawingml/2006/main">
               <a:ext uri="{FF2B5EF4-FFF2-40B4-BE49-F238E27FC236}">
-                <a16:creationId xmlns:a16="http://schemas.microsoft.com/office/drawing/2014/main" id="{E2AA9169-47F6-4154-8BAB-F624979B7F9A}"/>
+                <a16:creationId xmlns:a16="http://schemas.microsoft.com/office/drawing/2014/main" id="{D911F2D7-1235-4617-8744-A8EDCC7630D2}"/>
               </a:ext>
             </a:extLst>
           </p:cNvPr>
@@ -2611,7 +2611,7 @@
           <p:cNvPr id="19" name="">
             <a:extLst xmlns:a="http://schemas.openxmlformats.org/drawingml/2006/main">
               <a:ext uri="{FF2B5EF4-FFF2-40B4-BE49-F238E27FC236}">
-                <a16:creationId xmlns:a16="http://schemas.microsoft.com/office/drawing/2014/main" id="{B6602C36-CBD0-4E65-A846-6BC7B4A2E5B2}"/>
+                <a16:creationId xmlns:a16="http://schemas.microsoft.com/office/drawing/2014/main" id="{298F8DCF-6B25-47D9-8E26-0D2C7C378615}"/>
               </a:ext>
             </a:extLst>
           </p:cNvPr>
@@ -2673,7 +2673,7 @@
     </p:spTree>
     <p:extLst>
       <p:ext uri="{BB962C8B-B14F-4D97-AF65-F5344CB8AC3E}">
-        <p14:creationId xmlns:p14="http://schemas.microsoft.com/office/powerpoint/2010/main" val="620640922"/>
+        <p14:creationId xmlns:p14="http://schemas.microsoft.com/office/powerpoint/2010/main" val="504904669"/>
       </p:ext>
     </p:extLst>
   </p:cSld>
@@ -2697,7 +2697,7 @@
           <p:cNvPr id="1" name="">
             <a:extLst xmlns:a="http://schemas.openxmlformats.org/drawingml/2006/main">
               <a:ext uri="{FF2B5EF4-FFF2-40B4-BE49-F238E27FC236}">
-                <a16:creationId xmlns:a16="http://schemas.microsoft.com/office/drawing/2014/main" id="{6A45B264-3D02-4859-94F6-59ABA0CEA09E}"/>
+                <a16:creationId xmlns:a16="http://schemas.microsoft.com/office/drawing/2014/main" id="{5D408160-E434-4E35-8C26-793CF11671B4}"/>
               </a:ext>
             </a:extLst>
           </p:cNvPr>
@@ -2732,7 +2732,7 @@
           <p:cNvPr id="2" name="">
             <a:extLst xmlns:a="http://schemas.openxmlformats.org/drawingml/2006/main">
               <a:ext uri="{FF2B5EF4-FFF2-40B4-BE49-F238E27FC236}">
-                <a16:creationId xmlns:a16="http://schemas.microsoft.com/office/drawing/2014/main" id="{73465509-2F53-4615-9EE3-6B562E5E8220}"/>
+                <a16:creationId xmlns:a16="http://schemas.microsoft.com/office/drawing/2014/main" id="{A78F3CB6-48F6-4B91-993B-226E98363ABC}"/>
               </a:ext>
             </a:extLst>
           </p:cNvPr>
@@ -2796,7 +2796,7 @@
           <p:cNvPr id="3" name="">
             <a:extLst xmlns:a="http://schemas.openxmlformats.org/drawingml/2006/main">
               <a:ext uri="{FF2B5EF4-FFF2-40B4-BE49-F238E27FC236}">
-                <a16:creationId xmlns:a16="http://schemas.microsoft.com/office/drawing/2014/main" id="{F9B5A8C5-4353-42BC-8C27-1E1BDD88A03A}"/>
+                <a16:creationId xmlns:a16="http://schemas.microsoft.com/office/drawing/2014/main" id="{C2FDE145-D32E-4F83-8BA4-F5367CD61C69}"/>
               </a:ext>
             </a:extLst>
           </p:cNvPr>
@@ -2860,7 +2860,7 @@
           <p:cNvPr id="4" name="">
             <a:extLst xmlns:a="http://schemas.openxmlformats.org/drawingml/2006/main">
               <a:ext uri="{FF2B5EF4-FFF2-40B4-BE49-F238E27FC236}">
-                <a16:creationId xmlns:a16="http://schemas.microsoft.com/office/drawing/2014/main" id="{9CE55603-425F-4471-B2CD-DE2D07CB867E}"/>
+                <a16:creationId xmlns:a16="http://schemas.microsoft.com/office/drawing/2014/main" id="{F1212BBF-C8D9-43F4-ADC0-ABAA0483D679}"/>
               </a:ext>
             </a:extLst>
           </p:cNvPr>
@@ -2924,7 +2924,7 @@
           <p:cNvPr id="5" name="">
             <a:extLst xmlns:a="http://schemas.openxmlformats.org/drawingml/2006/main">
               <a:ext uri="{FF2B5EF4-FFF2-40B4-BE49-F238E27FC236}">
-                <a16:creationId xmlns:a16="http://schemas.microsoft.com/office/drawing/2014/main" id="{0041B40A-6880-4142-9406-39CFBD3E8070}"/>
+                <a16:creationId xmlns:a16="http://schemas.microsoft.com/office/drawing/2014/main" id="{D9C5E6BA-F7A8-479A-9861-16B2B910F13F}"/>
               </a:ext>
             </a:extLst>
           </p:cNvPr>
@@ -2957,7 +2957,7 @@
           <p:cNvPr id="6" name="">
             <a:extLst xmlns:a="http://schemas.openxmlformats.org/drawingml/2006/main">
               <a:ext uri="{FF2B5EF4-FFF2-40B4-BE49-F238E27FC236}">
-                <a16:creationId xmlns:a16="http://schemas.microsoft.com/office/drawing/2014/main" id="{1172111E-941A-41E7-8FF5-25F4BA42DDDA}"/>
+                <a16:creationId xmlns:a16="http://schemas.microsoft.com/office/drawing/2014/main" id="{4BA9ECE9-5C7C-42D9-9BB5-B088CA410D03}"/>
               </a:ext>
             </a:extLst>
           </p:cNvPr>
@@ -2990,7 +2990,7 @@
           <p:cNvPr id="7" name="">
             <a:extLst xmlns:a="http://schemas.openxmlformats.org/drawingml/2006/main">
               <a:ext uri="{FF2B5EF4-FFF2-40B4-BE49-F238E27FC236}">
-                <a16:creationId xmlns:a16="http://schemas.microsoft.com/office/drawing/2014/main" id="{CC13BE1A-7D2A-4715-B78E-6B9BBB6601B9}"/>
+                <a16:creationId xmlns:a16="http://schemas.microsoft.com/office/drawing/2014/main" id="{2BB7C7A9-7957-4EAF-A623-0D845D6BB1BC}"/>
               </a:ext>
             </a:extLst>
           </p:cNvPr>
@@ -3054,7 +3054,7 @@
           <p:cNvPr id="8" name="">
             <a:extLst xmlns:a="http://schemas.openxmlformats.org/drawingml/2006/main">
               <a:ext uri="{FF2B5EF4-FFF2-40B4-BE49-F238E27FC236}">
-                <a16:creationId xmlns:a16="http://schemas.microsoft.com/office/drawing/2014/main" id="{023211FD-2A79-4C2C-A059-09FB776D858C}"/>
+                <a16:creationId xmlns:a16="http://schemas.microsoft.com/office/drawing/2014/main" id="{DD40AF84-5A2C-4FAD-BE59-5E75E5DCE134}"/>
               </a:ext>
             </a:extLst>
           </p:cNvPr>
@@ -3089,7 +3089,7 @@
           <p:cNvPr id="9" name="">
             <a:extLst xmlns:a="http://schemas.openxmlformats.org/drawingml/2006/main">
               <a:ext uri="{FF2B5EF4-FFF2-40B4-BE49-F238E27FC236}">
-                <a16:creationId xmlns:a16="http://schemas.microsoft.com/office/drawing/2014/main" id="{250F66F0-DD02-423A-BE6F-BB2F6E50A3AA}"/>
+                <a16:creationId xmlns:a16="http://schemas.microsoft.com/office/drawing/2014/main" id="{329FE8C8-217B-4412-A391-3A47C3CDD54C}"/>
               </a:ext>
             </a:extLst>
           </p:cNvPr>
@@ -3153,7 +3153,7 @@
           <p:cNvPr id="10" name="">
             <a:extLst xmlns:a="http://schemas.openxmlformats.org/drawingml/2006/main">
               <a:ext uri="{FF2B5EF4-FFF2-40B4-BE49-F238E27FC236}">
-                <a16:creationId xmlns:a16="http://schemas.microsoft.com/office/drawing/2014/main" id="{7409EE27-ED41-41B1-8205-1524D128DBAF}"/>
+                <a16:creationId xmlns:a16="http://schemas.microsoft.com/office/drawing/2014/main" id="{5DE72F1D-8F0F-4DDC-98D3-B20EF7AD4299}"/>
               </a:ext>
             </a:extLst>
           </p:cNvPr>
@@ -3188,7 +3188,7 @@
           <p:cNvPr id="11" name="">
             <a:extLst xmlns:a="http://schemas.openxmlformats.org/drawingml/2006/main">
               <a:ext uri="{FF2B5EF4-FFF2-40B4-BE49-F238E27FC236}">
-                <a16:creationId xmlns:a16="http://schemas.microsoft.com/office/drawing/2014/main" id="{D55CB545-7A28-4B78-B985-C59F3233BC67}"/>
+                <a16:creationId xmlns:a16="http://schemas.microsoft.com/office/drawing/2014/main" id="{50F4803C-CE34-4FB7-A0AA-7D1684129AFA}"/>
               </a:ext>
             </a:extLst>
           </p:cNvPr>
@@ -3252,7 +3252,7 @@
           <p:cNvPr id="12" name="">
             <a:extLst xmlns:a="http://schemas.openxmlformats.org/drawingml/2006/main">
               <a:ext uri="{FF2B5EF4-FFF2-40B4-BE49-F238E27FC236}">
-                <a16:creationId xmlns:a16="http://schemas.microsoft.com/office/drawing/2014/main" id="{FB0D0556-3957-4FEB-A356-F5BEF15B3CCB}"/>
+                <a16:creationId xmlns:a16="http://schemas.microsoft.com/office/drawing/2014/main" id="{6F4EA123-FB1C-4C2A-AD84-AC6EF6F95EEF}"/>
               </a:ext>
             </a:extLst>
           </p:cNvPr>
@@ -3287,7 +3287,7 @@
           <p:cNvPr id="13" name="">
             <a:extLst xmlns:a="http://schemas.openxmlformats.org/drawingml/2006/main">
               <a:ext uri="{FF2B5EF4-FFF2-40B4-BE49-F238E27FC236}">
-                <a16:creationId xmlns:a16="http://schemas.microsoft.com/office/drawing/2014/main" id="{5D16664B-2ECC-4181-A81D-4414B7FACE52}"/>
+                <a16:creationId xmlns:a16="http://schemas.microsoft.com/office/drawing/2014/main" id="{7E865D17-B69F-4C03-A095-CE5C357B6EC2}"/>
               </a:ext>
             </a:extLst>
           </p:cNvPr>
@@ -3351,7 +3351,7 @@
           <p:cNvPr id="14" name="">
             <a:extLst xmlns:a="http://schemas.openxmlformats.org/drawingml/2006/main">
               <a:ext uri="{FF2B5EF4-FFF2-40B4-BE49-F238E27FC236}">
-                <a16:creationId xmlns:a16="http://schemas.microsoft.com/office/drawing/2014/main" id="{9F70592B-A494-465F-AA0A-83C549C8239D}"/>
+                <a16:creationId xmlns:a16="http://schemas.microsoft.com/office/drawing/2014/main" id="{A08CD1EC-FE86-42A8-A465-B750E393A0B5}"/>
               </a:ext>
             </a:extLst>
           </p:cNvPr>
@@ -3386,7 +3386,7 @@
           <p:cNvPr id="15" name="">
             <a:extLst xmlns:a="http://schemas.openxmlformats.org/drawingml/2006/main">
               <a:ext uri="{FF2B5EF4-FFF2-40B4-BE49-F238E27FC236}">
-                <a16:creationId xmlns:a16="http://schemas.microsoft.com/office/drawing/2014/main" id="{5912CE76-18B3-4458-9E7F-140EF35B9C31}"/>
+                <a16:creationId xmlns:a16="http://schemas.microsoft.com/office/drawing/2014/main" id="{3E5C364B-21D5-4E82-9572-AF5260333ADC}"/>
               </a:ext>
             </a:extLst>
           </p:cNvPr>
@@ -3450,7 +3450,7 @@
           <p:cNvPr id="16" name="">
             <a:extLst xmlns:a="http://schemas.openxmlformats.org/drawingml/2006/main">
               <a:ext uri="{FF2B5EF4-FFF2-40B4-BE49-F238E27FC236}">
-                <a16:creationId xmlns:a16="http://schemas.microsoft.com/office/drawing/2014/main" id="{D3C44B8D-06C9-498A-977B-DDF0EF836922}"/>
+                <a16:creationId xmlns:a16="http://schemas.microsoft.com/office/drawing/2014/main" id="{A2906D67-F24E-47FD-8D99-9535B5C16ABD}"/>
               </a:ext>
             </a:extLst>
           </p:cNvPr>
@@ -3483,7 +3483,7 @@
           <p:cNvPr id="17" name="">
             <a:extLst xmlns:a="http://schemas.openxmlformats.org/drawingml/2006/main">
               <a:ext uri="{FF2B5EF4-FFF2-40B4-BE49-F238E27FC236}">
-                <a16:creationId xmlns:a16="http://schemas.microsoft.com/office/drawing/2014/main" id="{365194BB-30BA-40CD-B47B-743684FC8ECF}"/>
+                <a16:creationId xmlns:a16="http://schemas.microsoft.com/office/drawing/2014/main" id="{63AE531D-D159-44B3-B692-D9F80053EBC0}"/>
               </a:ext>
             </a:extLst>
           </p:cNvPr>
@@ -3547,7 +3547,7 @@
           <p:cNvPr id="18" name="">
             <a:extLst xmlns:a="http://schemas.openxmlformats.org/drawingml/2006/main">
               <a:ext uri="{FF2B5EF4-FFF2-40B4-BE49-F238E27FC236}">
-                <a16:creationId xmlns:a16="http://schemas.microsoft.com/office/drawing/2014/main" id="{FAC5F055-AAA9-4F8A-8E00-CAAAEF03D0C9}"/>
+                <a16:creationId xmlns:a16="http://schemas.microsoft.com/office/drawing/2014/main" id="{9DB50DDA-988C-4FD9-B0F2-655BF3C0230C}"/>
               </a:ext>
             </a:extLst>
           </p:cNvPr>
@@ -3580,7 +3580,7 @@
           <p:cNvPr id="19" name="">
             <a:extLst xmlns:a="http://schemas.openxmlformats.org/drawingml/2006/main">
               <a:ext uri="{FF2B5EF4-FFF2-40B4-BE49-F238E27FC236}">
-                <a16:creationId xmlns:a16="http://schemas.microsoft.com/office/drawing/2014/main" id="{B692E79A-5239-4E4C-9F9B-867602789E67}"/>
+                <a16:creationId xmlns:a16="http://schemas.microsoft.com/office/drawing/2014/main" id="{6E82B94E-03F1-415F-AD2D-A31A7B3CFEED}"/>
               </a:ext>
             </a:extLst>
           </p:cNvPr>
@@ -3644,7 +3644,7 @@
           <p:cNvPr id="20" name="">
             <a:extLst xmlns:a="http://schemas.openxmlformats.org/drawingml/2006/main">
               <a:ext uri="{FF2B5EF4-FFF2-40B4-BE49-F238E27FC236}">
-                <a16:creationId xmlns:a16="http://schemas.microsoft.com/office/drawing/2014/main" id="{8929BF19-F27D-4BDC-8282-116786E3A859}"/>
+                <a16:creationId xmlns:a16="http://schemas.microsoft.com/office/drawing/2014/main" id="{32B0336A-630B-4F5E-865E-3765A63E63DF}"/>
               </a:ext>
             </a:extLst>
           </p:cNvPr>
@@ -3677,7 +3677,7 @@
           <p:cNvPr id="21" name="">
             <a:extLst xmlns:a="http://schemas.openxmlformats.org/drawingml/2006/main">
               <a:ext uri="{FF2B5EF4-FFF2-40B4-BE49-F238E27FC236}">
-                <a16:creationId xmlns:a16="http://schemas.microsoft.com/office/drawing/2014/main" id="{7779BF2C-006F-41D1-A016-1E70FB2CC4A7}"/>
+                <a16:creationId xmlns:a16="http://schemas.microsoft.com/office/drawing/2014/main" id="{D4D472B5-6DB6-4934-9F6C-71DA3871BBEA}"/>
               </a:ext>
             </a:extLst>
           </p:cNvPr>
@@ -3741,7 +3741,7 @@
           <p:cNvPr id="22" name="">
             <a:extLst xmlns:a="http://schemas.openxmlformats.org/drawingml/2006/main">
               <a:ext uri="{FF2B5EF4-FFF2-40B4-BE49-F238E27FC236}">
-                <a16:creationId xmlns:a16="http://schemas.microsoft.com/office/drawing/2014/main" id="{9E93714C-35A2-4670-A4FB-C47B31B93995}"/>
+                <a16:creationId xmlns:a16="http://schemas.microsoft.com/office/drawing/2014/main" id="{61841EE0-3610-4D83-834A-9ACAF3F74A9C}"/>
               </a:ext>
             </a:extLst>
           </p:cNvPr>
@@ -3774,7 +3774,7 @@
           <p:cNvPr id="23" name="">
             <a:extLst xmlns:a="http://schemas.openxmlformats.org/drawingml/2006/main">
               <a:ext uri="{FF2B5EF4-FFF2-40B4-BE49-F238E27FC236}">
-                <a16:creationId xmlns:a16="http://schemas.microsoft.com/office/drawing/2014/main" id="{A0D5FCC2-D692-477A-BBF8-51FFC1052A7F}"/>
+                <a16:creationId xmlns:a16="http://schemas.microsoft.com/office/drawing/2014/main" id="{28CF2357-1895-4BFD-B3A5-5AA32B67239E}"/>
               </a:ext>
             </a:extLst>
           </p:cNvPr>
@@ -3838,7 +3838,7 @@
           <p:cNvPr id="24" name="">
             <a:extLst xmlns:a="http://schemas.openxmlformats.org/drawingml/2006/main">
               <a:ext uri="{FF2B5EF4-FFF2-40B4-BE49-F238E27FC236}">
-                <a16:creationId xmlns:a16="http://schemas.microsoft.com/office/drawing/2014/main" id="{E07BB433-74AE-4E19-A1F5-8A25BA02354A}"/>
+                <a16:creationId xmlns:a16="http://schemas.microsoft.com/office/drawing/2014/main" id="{33EE05D8-F1DB-4AD4-90C6-708E0D6CAE74}"/>
               </a:ext>
             </a:extLst>
           </p:cNvPr>
@@ -3871,7 +3871,7 @@
           <p:cNvPr id="25" name="">
             <a:extLst xmlns:a="http://schemas.openxmlformats.org/drawingml/2006/main">
               <a:ext uri="{FF2B5EF4-FFF2-40B4-BE49-F238E27FC236}">
-                <a16:creationId xmlns:a16="http://schemas.microsoft.com/office/drawing/2014/main" id="{BBA56591-49E9-43E7-9836-FA5F64413242}"/>
+                <a16:creationId xmlns:a16="http://schemas.microsoft.com/office/drawing/2014/main" id="{0ADFC321-4FAA-4AC9-BFD0-9388E4DAEF3E}"/>
               </a:ext>
             </a:extLst>
           </p:cNvPr>
@@ -3935,7 +3935,7 @@
           <p:cNvPr id="26" name="">
             <a:extLst xmlns:a="http://schemas.openxmlformats.org/drawingml/2006/main">
               <a:ext uri="{FF2B5EF4-FFF2-40B4-BE49-F238E27FC236}">
-                <a16:creationId xmlns:a16="http://schemas.microsoft.com/office/drawing/2014/main" id="{3C075172-B55C-412B-9739-0C1C00607CD2}"/>
+                <a16:creationId xmlns:a16="http://schemas.microsoft.com/office/drawing/2014/main" id="{0D584269-368A-49EE-A3DC-A22F321F2F6E}"/>
               </a:ext>
             </a:extLst>
           </p:cNvPr>
@@ -3968,7 +3968,7 @@
           <p:cNvPr id="27" name="">
             <a:extLst xmlns:a="http://schemas.openxmlformats.org/drawingml/2006/main">
               <a:ext uri="{FF2B5EF4-FFF2-40B4-BE49-F238E27FC236}">
-                <a16:creationId xmlns:a16="http://schemas.microsoft.com/office/drawing/2014/main" id="{20E24802-D71E-40B2-B01B-D37815DDCB79}"/>
+                <a16:creationId xmlns:a16="http://schemas.microsoft.com/office/drawing/2014/main" id="{F4FC994F-C712-43CD-90A5-5DDCE0AB875F}"/>
               </a:ext>
             </a:extLst>
           </p:cNvPr>
@@ -4032,7 +4032,7 @@
           <p:cNvPr id="28" name="">
             <a:extLst xmlns:a="http://schemas.openxmlformats.org/drawingml/2006/main">
               <a:ext uri="{FF2B5EF4-FFF2-40B4-BE49-F238E27FC236}">
-                <a16:creationId xmlns:a16="http://schemas.microsoft.com/office/drawing/2014/main" id="{1E6DE302-DBF0-4D12-A212-CD36B06CD3BA}"/>
+                <a16:creationId xmlns:a16="http://schemas.microsoft.com/office/drawing/2014/main" id="{E475758F-BFD2-463D-85AF-366FFC10C91B}"/>
               </a:ext>
             </a:extLst>
           </p:cNvPr>
@@ -4065,7 +4065,7 @@
           <p:cNvPr id="29" name="">
             <a:extLst xmlns:a="http://schemas.openxmlformats.org/drawingml/2006/main">
               <a:ext uri="{FF2B5EF4-FFF2-40B4-BE49-F238E27FC236}">
-                <a16:creationId xmlns:a16="http://schemas.microsoft.com/office/drawing/2014/main" id="{9D0B530C-33C1-4ADB-95A9-34EDF58AA2CF}"/>
+                <a16:creationId xmlns:a16="http://schemas.microsoft.com/office/drawing/2014/main" id="{509A44C2-A1D6-4842-88F7-5BC3E56BF179}"/>
               </a:ext>
             </a:extLst>
           </p:cNvPr>
@@ -4129,7 +4129,7 @@
           <p:cNvPr id="30" name="">
             <a:extLst xmlns:a="http://schemas.openxmlformats.org/drawingml/2006/main">
               <a:ext uri="{FF2B5EF4-FFF2-40B4-BE49-F238E27FC236}">
-                <a16:creationId xmlns:a16="http://schemas.microsoft.com/office/drawing/2014/main" id="{9BF88F72-24EC-43CF-B8ED-3B5793C8EE3D}"/>
+                <a16:creationId xmlns:a16="http://schemas.microsoft.com/office/drawing/2014/main" id="{8C40FA3B-F999-4E77-91CE-30F94A9AB7CC}"/>
               </a:ext>
             </a:extLst>
           </p:cNvPr>
@@ -4162,7 +4162,7 @@
           <p:cNvPr id="31" name="">
             <a:extLst xmlns:a="http://schemas.openxmlformats.org/drawingml/2006/main">
               <a:ext uri="{FF2B5EF4-FFF2-40B4-BE49-F238E27FC236}">
-                <a16:creationId xmlns:a16="http://schemas.microsoft.com/office/drawing/2014/main" id="{BCBBD2FF-F538-4217-8E62-712109BDACAF}"/>
+                <a16:creationId xmlns:a16="http://schemas.microsoft.com/office/drawing/2014/main" id="{2099E3C7-8281-4723-9D85-F76A0B025FF2}"/>
               </a:ext>
             </a:extLst>
           </p:cNvPr>
@@ -4226,7 +4226,7 @@
           <p:cNvPr id="32" name="">
             <a:extLst xmlns:a="http://schemas.openxmlformats.org/drawingml/2006/main">
               <a:ext uri="{FF2B5EF4-FFF2-40B4-BE49-F238E27FC236}">
-                <a16:creationId xmlns:a16="http://schemas.microsoft.com/office/drawing/2014/main" id="{A4BEF3FC-5FE6-46CE-A355-DF8F12466350}"/>
+                <a16:creationId xmlns:a16="http://schemas.microsoft.com/office/drawing/2014/main" id="{45320BEA-F947-4D3C-A812-A02C3E48F0FB}"/>
               </a:ext>
             </a:extLst>
           </p:cNvPr>
@@ -4259,7 +4259,7 @@
           <p:cNvPr id="33" name="">
             <a:extLst xmlns:a="http://schemas.openxmlformats.org/drawingml/2006/main">
               <a:ext uri="{FF2B5EF4-FFF2-40B4-BE49-F238E27FC236}">
-                <a16:creationId xmlns:a16="http://schemas.microsoft.com/office/drawing/2014/main" id="{24FA95AD-FED6-4F43-AA3C-20C015592959}"/>
+                <a16:creationId xmlns:a16="http://schemas.microsoft.com/office/drawing/2014/main" id="{B463935C-59E5-4D64-812A-DC03266484EA}"/>
               </a:ext>
             </a:extLst>
           </p:cNvPr>
@@ -4323,7 +4323,7 @@
           <p:cNvPr id="34" name="">
             <a:extLst xmlns:a="http://schemas.openxmlformats.org/drawingml/2006/main">
               <a:ext uri="{FF2B5EF4-FFF2-40B4-BE49-F238E27FC236}">
-                <a16:creationId xmlns:a16="http://schemas.microsoft.com/office/drawing/2014/main" id="{57CB161D-820C-4A80-9F28-CFEEBED8CD32}"/>
+                <a16:creationId xmlns:a16="http://schemas.microsoft.com/office/drawing/2014/main" id="{D711CE7A-2963-4E1C-82DB-9FF410B6C70C}"/>
               </a:ext>
             </a:extLst>
           </p:cNvPr>
@@ -4356,7 +4356,7 @@
           <p:cNvPr id="35" name="">
             <a:extLst xmlns:a="http://schemas.openxmlformats.org/drawingml/2006/main">
               <a:ext uri="{FF2B5EF4-FFF2-40B4-BE49-F238E27FC236}">
-                <a16:creationId xmlns:a16="http://schemas.microsoft.com/office/drawing/2014/main" id="{D173A4FD-6F50-4E58-B9FD-97AE2EB28E76}"/>
+                <a16:creationId xmlns:a16="http://schemas.microsoft.com/office/drawing/2014/main" id="{CE758470-B3E1-401A-8D15-E684D9D3F76A}"/>
               </a:ext>
             </a:extLst>
           </p:cNvPr>
@@ -4420,7 +4420,7 @@
           <p:cNvPr id="36" name="">
             <a:extLst xmlns:a="http://schemas.openxmlformats.org/drawingml/2006/main">
               <a:ext uri="{FF2B5EF4-FFF2-40B4-BE49-F238E27FC236}">
-                <a16:creationId xmlns:a16="http://schemas.microsoft.com/office/drawing/2014/main" id="{C546DB63-D5BD-4E95-A0E6-A3737CB7E9D5}"/>
+                <a16:creationId xmlns:a16="http://schemas.microsoft.com/office/drawing/2014/main" id="{1341C559-203C-4EBB-8F04-FBE13EE99386}"/>
               </a:ext>
             </a:extLst>
           </p:cNvPr>
@@ -4453,7 +4453,7 @@
           <p:cNvPr id="37" name="">
             <a:extLst xmlns:a="http://schemas.openxmlformats.org/drawingml/2006/main">
               <a:ext uri="{FF2B5EF4-FFF2-40B4-BE49-F238E27FC236}">
-                <a16:creationId xmlns:a16="http://schemas.microsoft.com/office/drawing/2014/main" id="{33C68463-B3D5-4B66-8E77-0550843CF2ED}"/>
+                <a16:creationId xmlns:a16="http://schemas.microsoft.com/office/drawing/2014/main" id="{AFE98DD1-EDBB-4C67-A5E7-68D992693602}"/>
               </a:ext>
             </a:extLst>
           </p:cNvPr>
@@ -4517,7 +4517,7 @@
           <p:cNvPr id="38" name="">
             <a:extLst xmlns:a="http://schemas.openxmlformats.org/drawingml/2006/main">
               <a:ext uri="{FF2B5EF4-FFF2-40B4-BE49-F238E27FC236}">
-                <a16:creationId xmlns:a16="http://schemas.microsoft.com/office/drawing/2014/main" id="{B78600CD-CF73-4C91-8A5D-F8BC3A3B16B9}"/>
+                <a16:creationId xmlns:a16="http://schemas.microsoft.com/office/drawing/2014/main" id="{303D3518-8807-4851-A7AE-D0D90307D95C}"/>
               </a:ext>
             </a:extLst>
           </p:cNvPr>
@@ -4550,7 +4550,7 @@
           <p:cNvPr id="39" name="">
             <a:extLst xmlns:a="http://schemas.openxmlformats.org/drawingml/2006/main">
               <a:ext uri="{FF2B5EF4-FFF2-40B4-BE49-F238E27FC236}">
-                <a16:creationId xmlns:a16="http://schemas.microsoft.com/office/drawing/2014/main" id="{DFB3D71C-8F92-413F-B715-91D21FA231BA}"/>
+                <a16:creationId xmlns:a16="http://schemas.microsoft.com/office/drawing/2014/main" id="{4B659E4B-6FA4-4BA7-B1A3-AA7E4184A6FC}"/>
               </a:ext>
             </a:extLst>
           </p:cNvPr>
@@ -4614,7 +4614,7 @@
           <p:cNvPr id="40" name="">
             <a:extLst xmlns:a="http://schemas.openxmlformats.org/drawingml/2006/main">
               <a:ext uri="{FF2B5EF4-FFF2-40B4-BE49-F238E27FC236}">
-                <a16:creationId xmlns:a16="http://schemas.microsoft.com/office/drawing/2014/main" id="{F8BFE694-C5B8-4A70-8FF8-A42303DC944D}"/>
+                <a16:creationId xmlns:a16="http://schemas.microsoft.com/office/drawing/2014/main" id="{00976470-A529-45E3-9DCD-7F20E7B9ED48}"/>
               </a:ext>
             </a:extLst>
           </p:cNvPr>
@@ -4647,7 +4647,7 @@
           <p:cNvPr id="41" name="">
             <a:extLst xmlns:a="http://schemas.openxmlformats.org/drawingml/2006/main">
               <a:ext uri="{FF2B5EF4-FFF2-40B4-BE49-F238E27FC236}">
-                <a16:creationId xmlns:a16="http://schemas.microsoft.com/office/drawing/2014/main" id="{E44A5BFC-D917-45F7-A325-5645FA07E69B}"/>
+                <a16:creationId xmlns:a16="http://schemas.microsoft.com/office/drawing/2014/main" id="{6855826F-FA2D-4BB7-BCC3-162364285C38}"/>
               </a:ext>
             </a:extLst>
           </p:cNvPr>
@@ -4711,7 +4711,7 @@
           <p:cNvPr id="42" name="">
             <a:extLst xmlns:a="http://schemas.openxmlformats.org/drawingml/2006/main">
               <a:ext uri="{FF2B5EF4-FFF2-40B4-BE49-F238E27FC236}">
-                <a16:creationId xmlns:a16="http://schemas.microsoft.com/office/drawing/2014/main" id="{86A1BB4A-36C0-4765-97FB-78A430A0A3DA}"/>
+                <a16:creationId xmlns:a16="http://schemas.microsoft.com/office/drawing/2014/main" id="{68E6EF7D-A4F5-4305-8FD9-8D8270EA3FC1}"/>
               </a:ext>
             </a:extLst>
           </p:cNvPr>
@@ -4744,7 +4744,7 @@
           <p:cNvPr id="43" name="">
             <a:extLst xmlns:a="http://schemas.openxmlformats.org/drawingml/2006/main">
               <a:ext uri="{FF2B5EF4-FFF2-40B4-BE49-F238E27FC236}">
-                <a16:creationId xmlns:a16="http://schemas.microsoft.com/office/drawing/2014/main" id="{5453AC57-95C6-42C0-9BF0-2392CF278DD3}"/>
+                <a16:creationId xmlns:a16="http://schemas.microsoft.com/office/drawing/2014/main" id="{136B3024-3041-485A-9C9B-A88230673134}"/>
               </a:ext>
             </a:extLst>
           </p:cNvPr>
@@ -4808,7 +4808,7 @@
           <p:cNvPr id="44" name="">
             <a:extLst xmlns:a="http://schemas.openxmlformats.org/drawingml/2006/main">
               <a:ext uri="{FF2B5EF4-FFF2-40B4-BE49-F238E27FC236}">
-                <a16:creationId xmlns:a16="http://schemas.microsoft.com/office/drawing/2014/main" id="{0CD4D0BE-3A23-42DA-B8DF-7E8DD7328D78}"/>
+                <a16:creationId xmlns:a16="http://schemas.microsoft.com/office/drawing/2014/main" id="{7710A91F-08D3-4E58-B637-54CE34C22515}"/>
               </a:ext>
             </a:extLst>
           </p:cNvPr>
@@ -4841,7 +4841,7 @@
           <p:cNvPr id="45" name="">
             <a:extLst xmlns:a="http://schemas.openxmlformats.org/drawingml/2006/main">
               <a:ext uri="{FF2B5EF4-FFF2-40B4-BE49-F238E27FC236}">
-                <a16:creationId xmlns:a16="http://schemas.microsoft.com/office/drawing/2014/main" id="{C6CD7E55-C4F0-406F-83EE-99F2727EA4E3}"/>
+                <a16:creationId xmlns:a16="http://schemas.microsoft.com/office/drawing/2014/main" id="{C793A4D3-67F9-4DF6-BE0F-EE7DC2F9E437}"/>
               </a:ext>
             </a:extLst>
           </p:cNvPr>
@@ -4905,7 +4905,7 @@
           <p:cNvPr id="46" name="">
             <a:extLst xmlns:a="http://schemas.openxmlformats.org/drawingml/2006/main">
               <a:ext uri="{FF2B5EF4-FFF2-40B4-BE49-F238E27FC236}">
-                <a16:creationId xmlns:a16="http://schemas.microsoft.com/office/drawing/2014/main" id="{46BD9595-0FF0-450A-B67E-15D6ABCF17FF}"/>
+                <a16:creationId xmlns:a16="http://schemas.microsoft.com/office/drawing/2014/main" id="{289BF203-CD02-4B45-82B5-90BFE2292155}"/>
               </a:ext>
             </a:extLst>
           </p:cNvPr>
@@ -4938,7 +4938,7 @@
           <p:cNvPr id="47" name="">
             <a:extLst xmlns:a="http://schemas.openxmlformats.org/drawingml/2006/main">
               <a:ext uri="{FF2B5EF4-FFF2-40B4-BE49-F238E27FC236}">
-                <a16:creationId xmlns:a16="http://schemas.microsoft.com/office/drawing/2014/main" id="{B8CE9D75-A67F-4DA5-97B5-600A9F63A6DA}"/>
+                <a16:creationId xmlns:a16="http://schemas.microsoft.com/office/drawing/2014/main" id="{2BF2CFB6-AE0F-4AB4-BC9E-32A84E4647C2}"/>
               </a:ext>
             </a:extLst>
           </p:cNvPr>
@@ -5002,7 +5002,7 @@
           <p:cNvPr id="48" name="">
             <a:extLst xmlns:a="http://schemas.openxmlformats.org/drawingml/2006/main">
               <a:ext uri="{FF2B5EF4-FFF2-40B4-BE49-F238E27FC236}">
-                <a16:creationId xmlns:a16="http://schemas.microsoft.com/office/drawing/2014/main" id="{EDFB03CF-F2DC-4C65-8441-35E971073350}"/>
+                <a16:creationId xmlns:a16="http://schemas.microsoft.com/office/drawing/2014/main" id="{43DE6B62-BBC3-48C9-A8C5-FA6BF5896825}"/>
               </a:ext>
             </a:extLst>
           </p:cNvPr>
@@ -5035,7 +5035,7 @@
           <p:cNvPr id="49" name="">
             <a:extLst xmlns:a="http://schemas.openxmlformats.org/drawingml/2006/main">
               <a:ext uri="{FF2B5EF4-FFF2-40B4-BE49-F238E27FC236}">
-                <a16:creationId xmlns:a16="http://schemas.microsoft.com/office/drawing/2014/main" id="{9D6E7BA0-BF3D-4D6B-9B4C-774E5BCF8229}"/>
+                <a16:creationId xmlns:a16="http://schemas.microsoft.com/office/drawing/2014/main" id="{5C136857-C1AB-42DF-84DD-4F56455D594E}"/>
               </a:ext>
             </a:extLst>
           </p:cNvPr>
@@ -5099,7 +5099,7 @@
           <p:cNvPr id="50" name="">
             <a:extLst xmlns:a="http://schemas.openxmlformats.org/drawingml/2006/main">
               <a:ext uri="{FF2B5EF4-FFF2-40B4-BE49-F238E27FC236}">
-                <a16:creationId xmlns:a16="http://schemas.microsoft.com/office/drawing/2014/main" id="{F26A2400-0B5C-4886-B738-E5E11CEA05A3}"/>
+                <a16:creationId xmlns:a16="http://schemas.microsoft.com/office/drawing/2014/main" id="{43BB779C-84D1-4586-8665-8F7449FA28C3}"/>
               </a:ext>
             </a:extLst>
           </p:cNvPr>
@@ -5132,7 +5132,7 @@
           <p:cNvPr id="51" name="">
             <a:extLst xmlns:a="http://schemas.openxmlformats.org/drawingml/2006/main">
               <a:ext uri="{FF2B5EF4-FFF2-40B4-BE49-F238E27FC236}">
-                <a16:creationId xmlns:a16="http://schemas.microsoft.com/office/drawing/2014/main" id="{4A6C0FFC-22E8-46F9-986F-36DAE6935426}"/>
+                <a16:creationId xmlns:a16="http://schemas.microsoft.com/office/drawing/2014/main" id="{CD2C8D44-3183-4211-B1F0-3F95FDFDB7CB}"/>
               </a:ext>
             </a:extLst>
           </p:cNvPr>
@@ -5196,7 +5196,7 @@
           <p:cNvPr id="52" name="">
             <a:extLst xmlns:a="http://schemas.openxmlformats.org/drawingml/2006/main">
               <a:ext uri="{FF2B5EF4-FFF2-40B4-BE49-F238E27FC236}">
-                <a16:creationId xmlns:a16="http://schemas.microsoft.com/office/drawing/2014/main" id="{3F0DFB19-D000-41D7-BD15-756BBDE38D53}"/>
+                <a16:creationId xmlns:a16="http://schemas.microsoft.com/office/drawing/2014/main" id="{95E9FC0C-6B97-4CF9-B657-83E6242F1670}"/>
               </a:ext>
             </a:extLst>
           </p:cNvPr>
@@ -5229,7 +5229,7 @@
           <p:cNvPr id="53" name="">
             <a:extLst xmlns:a="http://schemas.openxmlformats.org/drawingml/2006/main">
               <a:ext uri="{FF2B5EF4-FFF2-40B4-BE49-F238E27FC236}">
-                <a16:creationId xmlns:a16="http://schemas.microsoft.com/office/drawing/2014/main" id="{F9BCF10A-BDCC-4749-8C8D-BB64C453AE73}"/>
+                <a16:creationId xmlns:a16="http://schemas.microsoft.com/office/drawing/2014/main" id="{1032E8A9-20AD-4AD2-B8B7-9BC6506D0577}"/>
               </a:ext>
             </a:extLst>
           </p:cNvPr>
@@ -5293,7 +5293,7 @@
           <p:cNvPr id="54" name="">
             <a:extLst xmlns:a="http://schemas.openxmlformats.org/drawingml/2006/main">
               <a:ext uri="{FF2B5EF4-FFF2-40B4-BE49-F238E27FC236}">
-                <a16:creationId xmlns:a16="http://schemas.microsoft.com/office/drawing/2014/main" id="{CF3DE66C-2E75-4354-8293-8C96FC5544A7}"/>
+                <a16:creationId xmlns:a16="http://schemas.microsoft.com/office/drawing/2014/main" id="{DD9910A6-CDFB-4D04-BA4C-E1BD9A55D544}"/>
               </a:ext>
             </a:extLst>
           </p:cNvPr>
@@ -5357,7 +5357,7 @@
           <p:cNvPr id="55" name="">
             <a:extLst xmlns:a="http://schemas.openxmlformats.org/drawingml/2006/main">
               <a:ext uri="{FF2B5EF4-FFF2-40B4-BE49-F238E27FC236}">
-                <a16:creationId xmlns:a16="http://schemas.microsoft.com/office/drawing/2014/main" id="{32E3F595-748F-48BC-8D9E-1BAD6FE22AF4}"/>
+                <a16:creationId xmlns:a16="http://schemas.microsoft.com/office/drawing/2014/main" id="{8DB0271D-3A4B-42A0-9765-5C0266D2ED6A}"/>
               </a:ext>
             </a:extLst>
           </p:cNvPr>
@@ -5419,7 +5419,7 @@
     </p:spTree>
     <p:extLst>
       <p:ext uri="{BB962C8B-B14F-4D97-AF65-F5344CB8AC3E}">
-        <p14:creationId xmlns:p14="http://schemas.microsoft.com/office/powerpoint/2010/main" val="1506436944"/>
+        <p14:creationId xmlns:p14="http://schemas.microsoft.com/office/powerpoint/2010/main" val="1827145126"/>
       </p:ext>
     </p:extLst>
   </p:cSld>
@@ -5443,7 +5443,7 @@
           <p:cNvPr id="1" name="">
             <a:extLst xmlns:a="http://schemas.openxmlformats.org/drawingml/2006/main">
               <a:ext uri="{FF2B5EF4-FFF2-40B4-BE49-F238E27FC236}">
-                <a16:creationId xmlns:a16="http://schemas.microsoft.com/office/drawing/2014/main" id="{239612BB-1EAE-45E8-A7A4-D9590B8F6921}"/>
+                <a16:creationId xmlns:a16="http://schemas.microsoft.com/office/drawing/2014/main" id="{AB62C5E1-6DF8-4FE8-AA71-451A55DF5507}"/>
               </a:ext>
             </a:extLst>
           </p:cNvPr>
@@ -5478,7 +5478,7 @@
           <p:cNvPr id="2" name="">
             <a:extLst xmlns:a="http://schemas.openxmlformats.org/drawingml/2006/main">
               <a:ext uri="{FF2B5EF4-FFF2-40B4-BE49-F238E27FC236}">
-                <a16:creationId xmlns:a16="http://schemas.microsoft.com/office/drawing/2014/main" id="{02654C94-AB4F-48ED-B886-E9DE3F641A45}"/>
+                <a16:creationId xmlns:a16="http://schemas.microsoft.com/office/drawing/2014/main" id="{3858799F-70BE-4D91-BAAF-1751D2825989}"/>
               </a:ext>
             </a:extLst>
           </p:cNvPr>
@@ -5542,7 +5542,7 @@
           <p:cNvPr id="3" name="">
             <a:extLst xmlns:a="http://schemas.openxmlformats.org/drawingml/2006/main">
               <a:ext uri="{FF2B5EF4-FFF2-40B4-BE49-F238E27FC236}">
-                <a16:creationId xmlns:a16="http://schemas.microsoft.com/office/drawing/2014/main" id="{F373F45F-30CF-455A-B30E-CB1BBAE392F2}"/>
+                <a16:creationId xmlns:a16="http://schemas.microsoft.com/office/drawing/2014/main" id="{AEF0AC74-6883-47E7-B4DD-4EF8C77EE48D}"/>
               </a:ext>
             </a:extLst>
           </p:cNvPr>
@@ -5606,7 +5606,7 @@
           <p:cNvPr id="4" name="">
             <a:extLst xmlns:a="http://schemas.openxmlformats.org/drawingml/2006/main">
               <a:ext uri="{FF2B5EF4-FFF2-40B4-BE49-F238E27FC236}">
-                <a16:creationId xmlns:a16="http://schemas.microsoft.com/office/drawing/2014/main" id="{5FB30116-C137-4F7D-A5DB-C71954DDEDF5}"/>
+                <a16:creationId xmlns:a16="http://schemas.microsoft.com/office/drawing/2014/main" id="{0BD4DC75-E132-4C6E-B19D-8B54423E8162}"/>
               </a:ext>
             </a:extLst>
           </p:cNvPr>
@@ -5670,7 +5670,7 @@
           <p:cNvPr id="5" name="">
             <a:extLst xmlns:a="http://schemas.openxmlformats.org/drawingml/2006/main">
               <a:ext uri="{FF2B5EF4-FFF2-40B4-BE49-F238E27FC236}">
-                <a16:creationId xmlns:a16="http://schemas.microsoft.com/office/drawing/2014/main" id="{23A189D1-33C7-4F6A-B3FC-121E69621B1D}"/>
+                <a16:creationId xmlns:a16="http://schemas.microsoft.com/office/drawing/2014/main" id="{E15A3466-F30B-483A-8A20-C66EC730260F}"/>
               </a:ext>
             </a:extLst>
           </p:cNvPr>
@@ -5703,7 +5703,7 @@
           <p:cNvPr id="6" name="">
             <a:extLst xmlns:a="http://schemas.openxmlformats.org/drawingml/2006/main">
               <a:ext uri="{FF2B5EF4-FFF2-40B4-BE49-F238E27FC236}">
-                <a16:creationId xmlns:a16="http://schemas.microsoft.com/office/drawing/2014/main" id="{A7FBEA0E-5A6B-491B-B083-C4F281B09D36}"/>
+                <a16:creationId xmlns:a16="http://schemas.microsoft.com/office/drawing/2014/main" id="{E3774615-8EBA-435B-A1C4-8BDB69BDA9BE}"/>
               </a:ext>
             </a:extLst>
           </p:cNvPr>
@@ -5736,7 +5736,7 @@
           <p:cNvPr id="7" name="">
             <a:extLst xmlns:a="http://schemas.openxmlformats.org/drawingml/2006/main">
               <a:ext uri="{FF2B5EF4-FFF2-40B4-BE49-F238E27FC236}">
-                <a16:creationId xmlns:a16="http://schemas.microsoft.com/office/drawing/2014/main" id="{65F8F2EF-1C8C-4D3E-BB79-26B55CF75A82}"/>
+                <a16:creationId xmlns:a16="http://schemas.microsoft.com/office/drawing/2014/main" id="{4F6009C7-D0F2-4BD1-9AEB-775BDF319B37}"/>
               </a:ext>
             </a:extLst>
           </p:cNvPr>
@@ -5800,7 +5800,7 @@
           <p:cNvPr id="8" name="">
             <a:extLst xmlns:a="http://schemas.openxmlformats.org/drawingml/2006/main">
               <a:ext uri="{FF2B5EF4-FFF2-40B4-BE49-F238E27FC236}">
-                <a16:creationId xmlns:a16="http://schemas.microsoft.com/office/drawing/2014/main" id="{07D3265D-867B-403E-91F7-65D758F2902E}"/>
+                <a16:creationId xmlns:a16="http://schemas.microsoft.com/office/drawing/2014/main" id="{DA3E5BF7-4BD0-4D7C-B295-DBF533900A9E}"/>
               </a:ext>
             </a:extLst>
           </p:cNvPr>
@@ -5835,7 +5835,7 @@
           <p:cNvPr id="9" name="">
             <a:extLst xmlns:a="http://schemas.openxmlformats.org/drawingml/2006/main">
               <a:ext uri="{FF2B5EF4-FFF2-40B4-BE49-F238E27FC236}">
-                <a16:creationId xmlns:a16="http://schemas.microsoft.com/office/drawing/2014/main" id="{9E70F63D-C5B4-4E5D-9DEC-C02C27432440}"/>
+                <a16:creationId xmlns:a16="http://schemas.microsoft.com/office/drawing/2014/main" id="{3BAD9858-8418-49B6-8183-8490D8DDC299}"/>
               </a:ext>
             </a:extLst>
           </p:cNvPr>
@@ -5899,7 +5899,7 @@
           <p:cNvPr id="10" name="">
             <a:extLst xmlns:a="http://schemas.openxmlformats.org/drawingml/2006/main">
               <a:ext uri="{FF2B5EF4-FFF2-40B4-BE49-F238E27FC236}">
-                <a16:creationId xmlns:a16="http://schemas.microsoft.com/office/drawing/2014/main" id="{5AD188FD-7A11-42E8-AB2E-775B586F3579}"/>
+                <a16:creationId xmlns:a16="http://schemas.microsoft.com/office/drawing/2014/main" id="{CA13C6FB-0A7C-4897-901D-D1A0C939E1F8}"/>
               </a:ext>
             </a:extLst>
           </p:cNvPr>
@@ -5934,7 +5934,7 @@
           <p:cNvPr id="11" name="">
             <a:extLst xmlns:a="http://schemas.openxmlformats.org/drawingml/2006/main">
               <a:ext uri="{FF2B5EF4-FFF2-40B4-BE49-F238E27FC236}">
-                <a16:creationId xmlns:a16="http://schemas.microsoft.com/office/drawing/2014/main" id="{A375E2F4-2B27-426C-8571-BEC73EB1BCCF}"/>
+                <a16:creationId xmlns:a16="http://schemas.microsoft.com/office/drawing/2014/main" id="{1489F7DA-1923-4E94-9D58-1B79827FB4FA}"/>
               </a:ext>
             </a:extLst>
           </p:cNvPr>
@@ -5988,7 +5988,7 @@
                 <a:ea typeface="Malgun Gothic"/>
                 <a:cs typeface="Malgun Gothic"/>
               </a:rPr>
-              <a:t>fine-tuned 단독 모델의 label confusion과 hard-negative 오탐</a:t>
+              <a:t>규칙형 탐지는 새로운 표현이 나오면 계속 확장 필요</a:t>
             </a:r>
           </a:p>
         </p:txBody>
@@ -5998,7 +5998,7 @@
           <p:cNvPr id="12" name="">
             <a:extLst xmlns:a="http://schemas.openxmlformats.org/drawingml/2006/main">
               <a:ext uri="{FF2B5EF4-FFF2-40B4-BE49-F238E27FC236}">
-                <a16:creationId xmlns:a16="http://schemas.microsoft.com/office/drawing/2014/main" id="{EA04889A-04AB-4090-8960-4D2B292208B5}"/>
+                <a16:creationId xmlns:a16="http://schemas.microsoft.com/office/drawing/2014/main" id="{430A64D5-0C5C-43A0-B1B0-62826419588A}"/>
               </a:ext>
             </a:extLst>
           </p:cNvPr>
@@ -6033,7 +6033,7 @@
           <p:cNvPr id="13" name="">
             <a:extLst xmlns:a="http://schemas.openxmlformats.org/drawingml/2006/main">
               <a:ext uri="{FF2B5EF4-FFF2-40B4-BE49-F238E27FC236}">
-                <a16:creationId xmlns:a16="http://schemas.microsoft.com/office/drawing/2014/main" id="{4E3C8A3A-1ADF-4DEE-928A-EAB3A9B3374E}"/>
+                <a16:creationId xmlns:a16="http://schemas.microsoft.com/office/drawing/2014/main" id="{B53C16AD-596C-4DE6-8CF2-DA60F7660C16}"/>
               </a:ext>
             </a:extLst>
           </p:cNvPr>
@@ -6087,7 +6087,7 @@
                 <a:ea typeface="Malgun Gothic"/>
                 <a:cs typeface="Malgun Gothic"/>
               </a:rPr>
-              <a:t>소규모 adversarial set으로는 모든 우회 공격을 대표할 수 없음</a:t>
+              <a:t>hard-negative 0은 고정 100개 샘플 기준</a:t>
             </a:r>
           </a:p>
         </p:txBody>
@@ -6097,7 +6097,7 @@
           <p:cNvPr id="14" name="">
             <a:extLst xmlns:a="http://schemas.openxmlformats.org/drawingml/2006/main">
               <a:ext uri="{FF2B5EF4-FFF2-40B4-BE49-F238E27FC236}">
-                <a16:creationId xmlns:a16="http://schemas.microsoft.com/office/drawing/2014/main" id="{4F332E4F-3E65-403D-9748-9F214B42D877}"/>
+                <a16:creationId xmlns:a16="http://schemas.microsoft.com/office/drawing/2014/main" id="{7B37E88B-0F90-4FC6-A2E7-9255ADB39B73}"/>
               </a:ext>
             </a:extLst>
           </p:cNvPr>
@@ -6132,7 +6132,7 @@
           <p:cNvPr id="15" name="">
             <a:extLst xmlns:a="http://schemas.openxmlformats.org/drawingml/2006/main">
               <a:ext uri="{FF2B5EF4-FFF2-40B4-BE49-F238E27FC236}">
-                <a16:creationId xmlns:a16="http://schemas.microsoft.com/office/drawing/2014/main" id="{A5007876-D0B2-444D-95E0-53D0783C1391}"/>
+                <a16:creationId xmlns:a16="http://schemas.microsoft.com/office/drawing/2014/main" id="{0BFB65F0-705F-4F5C-8045-4F168BC24A13}"/>
               </a:ext>
             </a:extLst>
           </p:cNvPr>
@@ -6196,7 +6196,7 @@
           <p:cNvPr id="16" name="">
             <a:extLst xmlns:a="http://schemas.openxmlformats.org/drawingml/2006/main">
               <a:ext uri="{FF2B5EF4-FFF2-40B4-BE49-F238E27FC236}">
-                <a16:creationId xmlns:a16="http://schemas.microsoft.com/office/drawing/2014/main" id="{F981808D-57D0-4838-BBD9-142AF486ED0D}"/>
+                <a16:creationId xmlns:a16="http://schemas.microsoft.com/office/drawing/2014/main" id="{994F9106-4079-440D-BD87-79CBDFA33B86}"/>
               </a:ext>
             </a:extLst>
           </p:cNvPr>
@@ -6229,7 +6229,7 @@
           <p:cNvPr id="17" name="">
             <a:extLst xmlns:a="http://schemas.openxmlformats.org/drawingml/2006/main">
               <a:ext uri="{FF2B5EF4-FFF2-40B4-BE49-F238E27FC236}">
-                <a16:creationId xmlns:a16="http://schemas.microsoft.com/office/drawing/2014/main" id="{AEF872CF-9B02-4C94-9171-95B9CEE08F21}"/>
+                <a16:creationId xmlns:a16="http://schemas.microsoft.com/office/drawing/2014/main" id="{970762AE-3556-4018-A0D0-06285B068DAD}"/>
               </a:ext>
             </a:extLst>
           </p:cNvPr>
@@ -6262,7 +6262,7 @@
           <p:cNvPr id="18" name="">
             <a:extLst xmlns:a="http://schemas.openxmlformats.org/drawingml/2006/main">
               <a:ext uri="{FF2B5EF4-FFF2-40B4-BE49-F238E27FC236}">
-                <a16:creationId xmlns:a16="http://schemas.microsoft.com/office/drawing/2014/main" id="{FBA86B37-8B9F-421C-B30D-734F774DE623}"/>
+                <a16:creationId xmlns:a16="http://schemas.microsoft.com/office/drawing/2014/main" id="{3CB9A4F9-7D95-4E5E-92F5-B745D50462E3}"/>
               </a:ext>
             </a:extLst>
           </p:cNvPr>
@@ -6326,7 +6326,7 @@
           <p:cNvPr id="19" name="">
             <a:extLst xmlns:a="http://schemas.openxmlformats.org/drawingml/2006/main">
               <a:ext uri="{FF2B5EF4-FFF2-40B4-BE49-F238E27FC236}">
-                <a16:creationId xmlns:a16="http://schemas.microsoft.com/office/drawing/2014/main" id="{7EA36D87-90A4-478D-9138-7F48FFC4D411}"/>
+                <a16:creationId xmlns:a16="http://schemas.microsoft.com/office/drawing/2014/main" id="{77B66F3B-AA90-4B3B-BCF4-80B51D3A773F}"/>
               </a:ext>
             </a:extLst>
           </p:cNvPr>
@@ -6361,7 +6361,7 @@
           <p:cNvPr id="20" name="">
             <a:extLst xmlns:a="http://schemas.openxmlformats.org/drawingml/2006/main">
               <a:ext uri="{FF2B5EF4-FFF2-40B4-BE49-F238E27FC236}">
-                <a16:creationId xmlns:a16="http://schemas.microsoft.com/office/drawing/2014/main" id="{D77C5746-DD8A-472A-94F2-2EB3E67B24CD}"/>
+                <a16:creationId xmlns:a16="http://schemas.microsoft.com/office/drawing/2014/main" id="{06E7D89C-023E-447F-A930-CAFE2CE2074F}"/>
               </a:ext>
             </a:extLst>
           </p:cNvPr>
@@ -6415,7 +6415,7 @@
                 <a:ea typeface="Malgun Gothic"/>
                 <a:cs typeface="Malgun Gothic"/>
               </a:rPr>
-              <a:t>실제 문서/로그 스타일을 반영한 한국형 데이터셋 확장</a:t>
+              <a:t>공식 범주 기반 rule-pack을 지속 확장</a:t>
             </a:r>
           </a:p>
         </p:txBody>
@@ -6425,7 +6425,7 @@
           <p:cNvPr id="21" name="">
             <a:extLst xmlns:a="http://schemas.openxmlformats.org/drawingml/2006/main">
               <a:ext uri="{FF2B5EF4-FFF2-40B4-BE49-F238E27FC236}">
-                <a16:creationId xmlns:a16="http://schemas.microsoft.com/office/drawing/2014/main" id="{63AD3F89-C758-4F4C-AFCE-AED8D21267D4}"/>
+                <a16:creationId xmlns:a16="http://schemas.microsoft.com/office/drawing/2014/main" id="{3E096809-EBCD-46E0-915D-7E509F25E9AC}"/>
               </a:ext>
             </a:extLst>
           </p:cNvPr>
@@ -6460,7 +6460,7 @@
           <p:cNvPr id="22" name="">
             <a:extLst xmlns:a="http://schemas.openxmlformats.org/drawingml/2006/main">
               <a:ext uri="{FF2B5EF4-FFF2-40B4-BE49-F238E27FC236}">
-                <a16:creationId xmlns:a16="http://schemas.microsoft.com/office/drawing/2014/main" id="{706B9BBF-B54E-4083-B8ED-2F5104FC2B9D}"/>
+                <a16:creationId xmlns:a16="http://schemas.microsoft.com/office/drawing/2014/main" id="{77BEE781-6FBE-4A1F-80F4-42C97C78247E}"/>
               </a:ext>
             </a:extLst>
           </p:cNvPr>
@@ -6524,7 +6524,7 @@
           <p:cNvPr id="23" name="">
             <a:extLst xmlns:a="http://schemas.openxmlformats.org/drawingml/2006/main">
               <a:ext uri="{FF2B5EF4-FFF2-40B4-BE49-F238E27FC236}">
-                <a16:creationId xmlns:a16="http://schemas.microsoft.com/office/drawing/2014/main" id="{0491CCB8-2621-4262-962C-B5705147FC1B}"/>
+                <a16:creationId xmlns:a16="http://schemas.microsoft.com/office/drawing/2014/main" id="{16142221-8503-461A-B7AB-E83DF08877B6}"/>
               </a:ext>
             </a:extLst>
           </p:cNvPr>
@@ -6559,7 +6559,7 @@
           <p:cNvPr id="24" name="">
             <a:extLst xmlns:a="http://schemas.openxmlformats.org/drawingml/2006/main">
               <a:ext uri="{FF2B5EF4-FFF2-40B4-BE49-F238E27FC236}">
-                <a16:creationId xmlns:a16="http://schemas.microsoft.com/office/drawing/2014/main" id="{536636A9-5218-4967-BD77-3CAE233300D9}"/>
+                <a16:creationId xmlns:a16="http://schemas.microsoft.com/office/drawing/2014/main" id="{4B92E12E-D20D-421F-9779-ED9A759A6D42}"/>
               </a:ext>
             </a:extLst>
           </p:cNvPr>
@@ -6623,7 +6623,7 @@
           <p:cNvPr id="25" name="">
             <a:extLst xmlns:a="http://schemas.openxmlformats.org/drawingml/2006/main">
               <a:ext uri="{FF2B5EF4-FFF2-40B4-BE49-F238E27FC236}">
-                <a16:creationId xmlns:a16="http://schemas.microsoft.com/office/drawing/2014/main" id="{4C07431D-7DE5-4107-B04F-66C387828E80}"/>
+                <a16:creationId xmlns:a16="http://schemas.microsoft.com/office/drawing/2014/main" id="{EEB1E708-7C06-4452-B182-52EFCBA6D15E}"/>
               </a:ext>
             </a:extLst>
           </p:cNvPr>
@@ -6658,7 +6658,7 @@
           <p:cNvPr id="26" name="">
             <a:extLst xmlns:a="http://schemas.openxmlformats.org/drawingml/2006/main">
               <a:ext uri="{FF2B5EF4-FFF2-40B4-BE49-F238E27FC236}">
-                <a16:creationId xmlns:a16="http://schemas.microsoft.com/office/drawing/2014/main" id="{DBD7FCCB-A4C8-442A-90AC-38087E501C9D}"/>
+                <a16:creationId xmlns:a16="http://schemas.microsoft.com/office/drawing/2014/main" id="{66522EAD-B406-4A1F-80DD-917027D9C5F7}"/>
               </a:ext>
             </a:extLst>
           </p:cNvPr>
@@ -6722,7 +6722,7 @@
           <p:cNvPr id="27" name="">
             <a:extLst xmlns:a="http://schemas.openxmlformats.org/drawingml/2006/main">
               <a:ext uri="{FF2B5EF4-FFF2-40B4-BE49-F238E27FC236}">
-                <a16:creationId xmlns:a16="http://schemas.microsoft.com/office/drawing/2014/main" id="{126085D4-EE17-44C8-A678-EA4C349FFF84}"/>
+                <a16:creationId xmlns:a16="http://schemas.microsoft.com/office/drawing/2014/main" id="{83650BA5-A788-4604-A0F9-FD6D4507B5DE}"/>
               </a:ext>
             </a:extLst>
           </p:cNvPr>
@@ -6755,7 +6755,7 @@
           <p:cNvPr id="28" name="">
             <a:extLst xmlns:a="http://schemas.openxmlformats.org/drawingml/2006/main">
               <a:ext uri="{FF2B5EF4-FFF2-40B4-BE49-F238E27FC236}">
-                <a16:creationId xmlns:a16="http://schemas.microsoft.com/office/drawing/2014/main" id="{35AD2A47-1CA0-4EAA-8D68-2D87FB8414CD}"/>
+                <a16:creationId xmlns:a16="http://schemas.microsoft.com/office/drawing/2014/main" id="{656BAA64-64AA-4558-A1DA-78906D0C8F8C}"/>
               </a:ext>
             </a:extLst>
           </p:cNvPr>
@@ -6788,7 +6788,7 @@
           <p:cNvPr id="29" name="">
             <a:extLst xmlns:a="http://schemas.openxmlformats.org/drawingml/2006/main">
               <a:ext uri="{FF2B5EF4-FFF2-40B4-BE49-F238E27FC236}">
-                <a16:creationId xmlns:a16="http://schemas.microsoft.com/office/drawing/2014/main" id="{5A4C9248-AB01-48BD-8CF2-DAC2659878F6}"/>
+                <a16:creationId xmlns:a16="http://schemas.microsoft.com/office/drawing/2014/main" id="{136CF198-A611-4F34-945C-EA5D50463C71}"/>
               </a:ext>
             </a:extLst>
           </p:cNvPr>
@@ -6852,7 +6852,7 @@
           <p:cNvPr id="30" name="">
             <a:extLst xmlns:a="http://schemas.openxmlformats.org/drawingml/2006/main">
               <a:ext uri="{FF2B5EF4-FFF2-40B4-BE49-F238E27FC236}">
-                <a16:creationId xmlns:a16="http://schemas.microsoft.com/office/drawing/2014/main" id="{FF08BCC2-37E3-4A5F-A7FF-78D45ACA7C43}"/>
+                <a16:creationId xmlns:a16="http://schemas.microsoft.com/office/drawing/2014/main" id="{25BE1725-27E1-4012-B52B-2D11A5E72846}"/>
               </a:ext>
             </a:extLst>
           </p:cNvPr>
@@ -6887,7 +6887,7 @@
           <p:cNvPr id="31" name="">
             <a:extLst xmlns:a="http://schemas.openxmlformats.org/drawingml/2006/main">
               <a:ext uri="{FF2B5EF4-FFF2-40B4-BE49-F238E27FC236}">
-                <a16:creationId xmlns:a16="http://schemas.microsoft.com/office/drawing/2014/main" id="{E614FE3B-B4AB-4BF6-A583-BC87372F6AA7}"/>
+                <a16:creationId xmlns:a16="http://schemas.microsoft.com/office/drawing/2014/main" id="{1C7E7E9C-0842-41B5-BEBC-D0453F358595}"/>
               </a:ext>
             </a:extLst>
           </p:cNvPr>
@@ -6951,7 +6951,7 @@
           <p:cNvPr id="32" name="">
             <a:extLst xmlns:a="http://schemas.openxmlformats.org/drawingml/2006/main">
               <a:ext uri="{FF2B5EF4-FFF2-40B4-BE49-F238E27FC236}">
-                <a16:creationId xmlns:a16="http://schemas.microsoft.com/office/drawing/2014/main" id="{35FFD094-883E-4145-B644-AE672657A0F0}"/>
+                <a16:creationId xmlns:a16="http://schemas.microsoft.com/office/drawing/2014/main" id="{17D540A0-C112-4ECF-989C-7CBF2C218A56}"/>
               </a:ext>
             </a:extLst>
           </p:cNvPr>
@@ -6986,7 +6986,7 @@
           <p:cNvPr id="33" name="">
             <a:extLst xmlns:a="http://schemas.openxmlformats.org/drawingml/2006/main">
               <a:ext uri="{FF2B5EF4-FFF2-40B4-BE49-F238E27FC236}">
-                <a16:creationId xmlns:a16="http://schemas.microsoft.com/office/drawing/2014/main" id="{CE226D9A-7070-4BFC-B47E-8B0EFF67F633}"/>
+                <a16:creationId xmlns:a16="http://schemas.microsoft.com/office/drawing/2014/main" id="{184AF9C1-1A40-4A41-AAF8-3C2F5DFB1A5D}"/>
               </a:ext>
             </a:extLst>
           </p:cNvPr>
@@ -7050,7 +7050,7 @@
           <p:cNvPr id="34" name="">
             <a:extLst xmlns:a="http://schemas.openxmlformats.org/drawingml/2006/main">
               <a:ext uri="{FF2B5EF4-FFF2-40B4-BE49-F238E27FC236}">
-                <a16:creationId xmlns:a16="http://schemas.microsoft.com/office/drawing/2014/main" id="{C3755AB4-3E39-4977-B8BD-076BF2E7B9DB}"/>
+                <a16:creationId xmlns:a16="http://schemas.microsoft.com/office/drawing/2014/main" id="{B664866E-75B8-4602-AFE9-B01D98D481E8}"/>
               </a:ext>
             </a:extLst>
           </p:cNvPr>
@@ -7085,7 +7085,7 @@
           <p:cNvPr id="35" name="">
             <a:extLst xmlns:a="http://schemas.openxmlformats.org/drawingml/2006/main">
               <a:ext uri="{FF2B5EF4-FFF2-40B4-BE49-F238E27FC236}">
-                <a16:creationId xmlns:a16="http://schemas.microsoft.com/office/drawing/2014/main" id="{3BE2A7E6-C173-4A82-9647-F769DCABEAD5}"/>
+                <a16:creationId xmlns:a16="http://schemas.microsoft.com/office/drawing/2014/main" id="{031792E1-78A1-4CA0-A645-51E51672FC10}"/>
               </a:ext>
             </a:extLst>
           </p:cNvPr>
@@ -7139,7 +7139,7 @@
                 <a:ea typeface="Malgun Gothic"/>
                 <a:cs typeface="Malgun Gothic"/>
               </a:rPr>
-              <a:t>한국형 PII는 주민번호뿐 아니라 주소, 계좌, secret까지 봐야 함</a:t>
+              <a:t>한국형 PII는 고유식별정보뿐 아니라 계정·인증·네트워크 정보까지 봐야 함</a:t>
             </a:r>
           </a:p>
         </p:txBody>
@@ -7149,7 +7149,7 @@
           <p:cNvPr id="36" name="">
             <a:extLst xmlns:a="http://schemas.openxmlformats.org/drawingml/2006/main">
               <a:ext uri="{FF2B5EF4-FFF2-40B4-BE49-F238E27FC236}">
-                <a16:creationId xmlns:a16="http://schemas.microsoft.com/office/drawing/2014/main" id="{40485695-0630-425F-8A70-4D2588B5B4E9}"/>
+                <a16:creationId xmlns:a16="http://schemas.microsoft.com/office/drawing/2014/main" id="{D8C53F00-F9F3-4BA2-804F-937D5B9DB5EF}"/>
               </a:ext>
             </a:extLst>
           </p:cNvPr>
@@ -7184,7 +7184,7 @@
           <p:cNvPr id="37" name="">
             <a:extLst xmlns:a="http://schemas.openxmlformats.org/drawingml/2006/main">
               <a:ext uri="{FF2B5EF4-FFF2-40B4-BE49-F238E27FC236}">
-                <a16:creationId xmlns:a16="http://schemas.microsoft.com/office/drawing/2014/main" id="{4E9FF5D5-20E9-4F10-8553-80789D2ADF39}"/>
+                <a16:creationId xmlns:a16="http://schemas.microsoft.com/office/drawing/2014/main" id="{FE605ACD-9633-4B90-A686-6F18C207E4CA}"/>
               </a:ext>
             </a:extLst>
           </p:cNvPr>
@@ -7248,7 +7248,7 @@
           <p:cNvPr id="38" name="">
             <a:extLst xmlns:a="http://schemas.openxmlformats.org/drawingml/2006/main">
               <a:ext uri="{FF2B5EF4-FFF2-40B4-BE49-F238E27FC236}">
-                <a16:creationId xmlns:a16="http://schemas.microsoft.com/office/drawing/2014/main" id="{D383579B-60DF-49F0-B1A1-C5DF8A140703}"/>
+                <a16:creationId xmlns:a16="http://schemas.microsoft.com/office/drawing/2014/main" id="{C3DADBC9-D574-4999-9498-0DA18581A935}"/>
               </a:ext>
             </a:extLst>
           </p:cNvPr>
@@ -7283,7 +7283,7 @@
           <p:cNvPr id="39" name="">
             <a:extLst xmlns:a="http://schemas.openxmlformats.org/drawingml/2006/main">
               <a:ext uri="{FF2B5EF4-FFF2-40B4-BE49-F238E27FC236}">
-                <a16:creationId xmlns:a16="http://schemas.microsoft.com/office/drawing/2014/main" id="{F5FC5365-832B-425F-968D-B925EF101B42}"/>
+                <a16:creationId xmlns:a16="http://schemas.microsoft.com/office/drawing/2014/main" id="{535442E5-0955-4C04-829A-067C17DB7168}"/>
               </a:ext>
             </a:extLst>
           </p:cNvPr>
@@ -7347,7 +7347,7 @@
           <p:cNvPr id="40" name="">
             <a:extLst xmlns:a="http://schemas.openxmlformats.org/drawingml/2006/main">
               <a:ext uri="{FF2B5EF4-FFF2-40B4-BE49-F238E27FC236}">
-                <a16:creationId xmlns:a16="http://schemas.microsoft.com/office/drawing/2014/main" id="{8E235A6F-6AF6-491E-8AA0-91F6024CC4B9}"/>
+                <a16:creationId xmlns:a16="http://schemas.microsoft.com/office/drawing/2014/main" id="{40B1EBB8-99AB-41B9-80AB-E1C17E064004}"/>
               </a:ext>
             </a:extLst>
           </p:cNvPr>
@@ -7411,7 +7411,7 @@
           <p:cNvPr id="41" name="">
             <a:extLst xmlns:a="http://schemas.openxmlformats.org/drawingml/2006/main">
               <a:ext uri="{FF2B5EF4-FFF2-40B4-BE49-F238E27FC236}">
-                <a16:creationId xmlns:a16="http://schemas.microsoft.com/office/drawing/2014/main" id="{98A82E6F-4CE3-474B-BB53-E8118397CF75}"/>
+                <a16:creationId xmlns:a16="http://schemas.microsoft.com/office/drawing/2014/main" id="{02C59268-020D-40E0-AE3D-D5A75CABF4A4}"/>
               </a:ext>
             </a:extLst>
           </p:cNvPr>
@@ -7473,7 +7473,7 @@
     </p:spTree>
     <p:extLst>
       <p:ext uri="{BB962C8B-B14F-4D97-AF65-F5344CB8AC3E}">
-        <p14:creationId xmlns:p14="http://schemas.microsoft.com/office/powerpoint/2010/main" val="629754942"/>
+        <p14:creationId xmlns:p14="http://schemas.microsoft.com/office/powerpoint/2010/main" val="350165324"/>
       </p:ext>
     </p:extLst>
   </p:cSld>
@@ -7497,7 +7497,7 @@
           <p:cNvPr id="1" name="">
             <a:extLst xmlns:a="http://schemas.openxmlformats.org/drawingml/2006/main">
               <a:ext uri="{FF2B5EF4-FFF2-40B4-BE49-F238E27FC236}">
-                <a16:creationId xmlns:a16="http://schemas.microsoft.com/office/drawing/2014/main" id="{7DC3DE3B-3841-4294-BAE6-49F30613C1B3}"/>
+                <a16:creationId xmlns:a16="http://schemas.microsoft.com/office/drawing/2014/main" id="{329B703B-7E45-41EB-AA84-224EB7C7FCA6}"/>
               </a:ext>
             </a:extLst>
           </p:cNvPr>
@@ -7532,7 +7532,7 @@
           <p:cNvPr id="2" name="">
             <a:extLst xmlns:a="http://schemas.openxmlformats.org/drawingml/2006/main">
               <a:ext uri="{FF2B5EF4-FFF2-40B4-BE49-F238E27FC236}">
-                <a16:creationId xmlns:a16="http://schemas.microsoft.com/office/drawing/2014/main" id="{3075E194-6334-4C95-92CB-F52614E2B137}"/>
+                <a16:creationId xmlns:a16="http://schemas.microsoft.com/office/drawing/2014/main" id="{432C0550-58D0-4CC8-BDD0-0F756CF0E042}"/>
               </a:ext>
             </a:extLst>
           </p:cNvPr>
@@ -7596,7 +7596,7 @@
           <p:cNvPr id="3" name="">
             <a:extLst xmlns:a="http://schemas.openxmlformats.org/drawingml/2006/main">
               <a:ext uri="{FF2B5EF4-FFF2-40B4-BE49-F238E27FC236}">
-                <a16:creationId xmlns:a16="http://schemas.microsoft.com/office/drawing/2014/main" id="{5AAA6A56-1ACA-4E58-A5B0-226EC6212035}"/>
+                <a16:creationId xmlns:a16="http://schemas.microsoft.com/office/drawing/2014/main" id="{3A0E050B-220A-45FD-ACE3-0E8D1F6C949D}"/>
               </a:ext>
             </a:extLst>
           </p:cNvPr>
@@ -7660,7 +7660,7 @@
           <p:cNvPr id="4" name="">
             <a:extLst xmlns:a="http://schemas.openxmlformats.org/drawingml/2006/main">
               <a:ext uri="{FF2B5EF4-FFF2-40B4-BE49-F238E27FC236}">
-                <a16:creationId xmlns:a16="http://schemas.microsoft.com/office/drawing/2014/main" id="{42EFE8CE-E37B-43A9-890E-A6C55255C425}"/>
+                <a16:creationId xmlns:a16="http://schemas.microsoft.com/office/drawing/2014/main" id="{1D83D5BC-66C7-4C36-AFD3-584377E9587A}"/>
               </a:ext>
             </a:extLst>
           </p:cNvPr>
@@ -7714,7 +7714,7 @@
                 <a:ea typeface="Malgun Gothic"/>
                 <a:cs typeface="Malgun Gothic"/>
               </a:rPr>
-              <a:t>결론: 최종 구현체는 OPF의 범용 탐지력, 한국형 Regex Safety Net, 문맥 오탐 억제를 결합한 데모 가능한 시스템입니다. Fine-tuning은 저장까지 성공했지만, 현재는 연구 트랙으로 분리했습니다.</a:t>
+              <a:t>결론: 최종 구현체는 OPF의 범용 탐지력, 한국형 Privacy Rule Pack, 문맥 오탐 억제를 결합한 데모 가능한 시스템입니다. Fine-tuning은 저장까지 성공했지만, 현재는 연구 트랙으로 분리했습니다.</a:t>
             </a:r>
           </a:p>
         </p:txBody>
@@ -7724,7 +7724,7 @@
           <p:cNvPr id="5" name="">
             <a:extLst xmlns:a="http://schemas.openxmlformats.org/drawingml/2006/main">
               <a:ext uri="{FF2B5EF4-FFF2-40B4-BE49-F238E27FC236}">
-                <a16:creationId xmlns:a16="http://schemas.microsoft.com/office/drawing/2014/main" id="{F850B738-158C-410A-BFF8-D938D26F0866}"/>
+                <a16:creationId xmlns:a16="http://schemas.microsoft.com/office/drawing/2014/main" id="{18B12047-9B43-459E-8114-668CDB788357}"/>
               </a:ext>
             </a:extLst>
           </p:cNvPr>
@@ -7757,7 +7757,7 @@
           <p:cNvPr id="6" name="">
             <a:extLst xmlns:a="http://schemas.openxmlformats.org/drawingml/2006/main">
               <a:ext uri="{FF2B5EF4-FFF2-40B4-BE49-F238E27FC236}">
-                <a16:creationId xmlns:a16="http://schemas.microsoft.com/office/drawing/2014/main" id="{25C880CA-A4AB-406C-B939-D8AC282D86E3}"/>
+                <a16:creationId xmlns:a16="http://schemas.microsoft.com/office/drawing/2014/main" id="{D1FD1478-1CB0-44C5-9C1D-C5936D06F1F3}"/>
               </a:ext>
             </a:extLst>
           </p:cNvPr>
@@ -7811,7 +7811,7 @@
                 <a:ea typeface="Aptos Display"/>
                 <a:cs typeface="Aptos Display"/>
               </a:rPr>
-              <a:t>0.6919</a:t>
+              <a:t>0.7294</a:t>
             </a:r>
           </a:p>
         </p:txBody>
@@ -7821,7 +7821,7 @@
           <p:cNvPr id="7" name="">
             <a:extLst xmlns:a="http://schemas.openxmlformats.org/drawingml/2006/main">
               <a:ext uri="{FF2B5EF4-FFF2-40B4-BE49-F238E27FC236}">
-                <a16:creationId xmlns:a16="http://schemas.microsoft.com/office/drawing/2014/main" id="{C9C9F453-0E64-47B2-9C7B-095A5E37A52E}"/>
+                <a16:creationId xmlns:a16="http://schemas.microsoft.com/office/drawing/2014/main" id="{F581D7D6-3DD1-48F5-87D6-916B5146EF67}"/>
               </a:ext>
             </a:extLst>
           </p:cNvPr>
@@ -7885,7 +7885,7 @@
           <p:cNvPr id="8" name="">
             <a:extLst xmlns:a="http://schemas.openxmlformats.org/drawingml/2006/main">
               <a:ext uri="{FF2B5EF4-FFF2-40B4-BE49-F238E27FC236}">
-                <a16:creationId xmlns:a16="http://schemas.microsoft.com/office/drawing/2014/main" id="{9A1A451B-868C-4EB8-9AA3-991DA57043B8}"/>
+                <a16:creationId xmlns:a16="http://schemas.microsoft.com/office/drawing/2014/main" id="{A1738195-6D0F-4C24-B963-CB47241915B5}"/>
               </a:ext>
             </a:extLst>
           </p:cNvPr>
@@ -7939,7 +7939,7 @@
                 <a:ea typeface="Malgun Gothic"/>
                 <a:cs typeface="Malgun Gothic"/>
               </a:rPr>
-              <a:t>최종 KPF offline replay</a:t>
+              <a:t>rule-pack 확장 후 replay</a:t>
             </a:r>
           </a:p>
         </p:txBody>
@@ -7949,7 +7949,7 @@
           <p:cNvPr id="9" name="">
             <a:extLst xmlns:a="http://schemas.openxmlformats.org/drawingml/2006/main">
               <a:ext uri="{FF2B5EF4-FFF2-40B4-BE49-F238E27FC236}">
-                <a16:creationId xmlns:a16="http://schemas.microsoft.com/office/drawing/2014/main" id="{7D0D3988-5C73-4A11-ADDE-E607856D636C}"/>
+                <a16:creationId xmlns:a16="http://schemas.microsoft.com/office/drawing/2014/main" id="{720E1EFD-E324-49A2-8054-D85F9BE2411E}"/>
               </a:ext>
             </a:extLst>
           </p:cNvPr>
@@ -7982,7 +7982,7 @@
           <p:cNvPr id="10" name="">
             <a:extLst xmlns:a="http://schemas.openxmlformats.org/drawingml/2006/main">
               <a:ext uri="{FF2B5EF4-FFF2-40B4-BE49-F238E27FC236}">
-                <a16:creationId xmlns:a16="http://schemas.microsoft.com/office/drawing/2014/main" id="{5E2A1461-0C0D-4B37-A3A8-BD9050F85FCC}"/>
+                <a16:creationId xmlns:a16="http://schemas.microsoft.com/office/drawing/2014/main" id="{0D0BD9CA-23D6-4891-86C0-2CB34982611B}"/>
               </a:ext>
             </a:extLst>
           </p:cNvPr>
@@ -8046,7 +8046,7 @@
           <p:cNvPr id="11" name="">
             <a:extLst xmlns:a="http://schemas.openxmlformats.org/drawingml/2006/main">
               <a:ext uri="{FF2B5EF4-FFF2-40B4-BE49-F238E27FC236}">
-                <a16:creationId xmlns:a16="http://schemas.microsoft.com/office/drawing/2014/main" id="{4BBBD133-173C-42C9-AC76-012F7F89EF8A}"/>
+                <a16:creationId xmlns:a16="http://schemas.microsoft.com/office/drawing/2014/main" id="{A139AD2F-0413-49D7-B1F4-663AC6F8E5D4}"/>
               </a:ext>
             </a:extLst>
           </p:cNvPr>
@@ -8110,7 +8110,7 @@
           <p:cNvPr id="12" name="">
             <a:extLst xmlns:a="http://schemas.openxmlformats.org/drawingml/2006/main">
               <a:ext uri="{FF2B5EF4-FFF2-40B4-BE49-F238E27FC236}">
-                <a16:creationId xmlns:a16="http://schemas.microsoft.com/office/drawing/2014/main" id="{E3F1802C-2ECF-451C-8086-9A1A21F02928}"/>
+                <a16:creationId xmlns:a16="http://schemas.microsoft.com/office/drawing/2014/main" id="{0ED086F7-0860-4C2C-AF82-10A10476AD29}"/>
               </a:ext>
             </a:extLst>
           </p:cNvPr>
@@ -8174,7 +8174,7 @@
           <p:cNvPr id="13" name="">
             <a:extLst xmlns:a="http://schemas.openxmlformats.org/drawingml/2006/main">
               <a:ext uri="{FF2B5EF4-FFF2-40B4-BE49-F238E27FC236}">
-                <a16:creationId xmlns:a16="http://schemas.microsoft.com/office/drawing/2014/main" id="{B22BC8EC-2919-410B-965E-5E8C131503B7}"/>
+                <a16:creationId xmlns:a16="http://schemas.microsoft.com/office/drawing/2014/main" id="{4D431D68-33E4-4755-A0FE-DF4B1BAE46CB}"/>
               </a:ext>
             </a:extLst>
           </p:cNvPr>
@@ -8207,7 +8207,7 @@
           <p:cNvPr id="14" name="">
             <a:extLst xmlns:a="http://schemas.openxmlformats.org/drawingml/2006/main">
               <a:ext uri="{FF2B5EF4-FFF2-40B4-BE49-F238E27FC236}">
-                <a16:creationId xmlns:a16="http://schemas.microsoft.com/office/drawing/2014/main" id="{00B08F30-8AA2-47EB-9844-AC2FF72255F4}"/>
+                <a16:creationId xmlns:a16="http://schemas.microsoft.com/office/drawing/2014/main" id="{893AC50F-0B5E-49EA-AF86-80CBC82079EC}"/>
               </a:ext>
             </a:extLst>
           </p:cNvPr>
@@ -8271,7 +8271,7 @@
           <p:cNvPr id="15" name="">
             <a:extLst xmlns:a="http://schemas.openxmlformats.org/drawingml/2006/main">
               <a:ext uri="{FF2B5EF4-FFF2-40B4-BE49-F238E27FC236}">
-                <a16:creationId xmlns:a16="http://schemas.microsoft.com/office/drawing/2014/main" id="{9AC0A2B1-54EB-4943-BC24-5592CBC1B17B}"/>
+                <a16:creationId xmlns:a16="http://schemas.microsoft.com/office/drawing/2014/main" id="{7A55E8FD-BFAF-400B-B2D8-1667C10507D3}"/>
               </a:ext>
             </a:extLst>
           </p:cNvPr>
@@ -8335,7 +8335,7 @@
           <p:cNvPr id="16" name="">
             <a:extLst xmlns:a="http://schemas.openxmlformats.org/drawingml/2006/main">
               <a:ext uri="{FF2B5EF4-FFF2-40B4-BE49-F238E27FC236}">
-                <a16:creationId xmlns:a16="http://schemas.microsoft.com/office/drawing/2014/main" id="{C04AA938-FADF-4C9D-8A6D-38EF9FA8773F}"/>
+                <a16:creationId xmlns:a16="http://schemas.microsoft.com/office/drawing/2014/main" id="{F75561AC-D2E6-487C-BD2F-0FB592BA9955}"/>
               </a:ext>
             </a:extLst>
           </p:cNvPr>
@@ -8399,7 +8399,7 @@
           <p:cNvPr id="17" name="">
             <a:extLst xmlns:a="http://schemas.openxmlformats.org/drawingml/2006/main">
               <a:ext uri="{FF2B5EF4-FFF2-40B4-BE49-F238E27FC236}">
-                <a16:creationId xmlns:a16="http://schemas.microsoft.com/office/drawing/2014/main" id="{902C311A-DCC3-4B7E-8E0A-1632C1941D6E}"/>
+                <a16:creationId xmlns:a16="http://schemas.microsoft.com/office/drawing/2014/main" id="{F69991F2-184D-411C-99CF-17B73DECDB21}"/>
               </a:ext>
             </a:extLst>
           </p:cNvPr>
@@ -8432,7 +8432,7 @@
           <p:cNvPr id="18" name="">
             <a:extLst xmlns:a="http://schemas.openxmlformats.org/drawingml/2006/main">
               <a:ext uri="{FF2B5EF4-FFF2-40B4-BE49-F238E27FC236}">
-                <a16:creationId xmlns:a16="http://schemas.microsoft.com/office/drawing/2014/main" id="{4D2B75E8-E984-4F9F-AE98-4B979265A758}"/>
+                <a16:creationId xmlns:a16="http://schemas.microsoft.com/office/drawing/2014/main" id="{835CF08B-FBEE-4D27-99AA-66A125EB7237}"/>
               </a:ext>
             </a:extLst>
           </p:cNvPr>
@@ -8496,7 +8496,7 @@
           <p:cNvPr id="19" name="">
             <a:extLst xmlns:a="http://schemas.openxmlformats.org/drawingml/2006/main">
               <a:ext uri="{FF2B5EF4-FFF2-40B4-BE49-F238E27FC236}">
-                <a16:creationId xmlns:a16="http://schemas.microsoft.com/office/drawing/2014/main" id="{F6051F7A-262A-4583-9662-2B4DCD65DB0A}"/>
+                <a16:creationId xmlns:a16="http://schemas.microsoft.com/office/drawing/2014/main" id="{142C68E4-95A4-4277-AE54-EF11C7905618}"/>
               </a:ext>
             </a:extLst>
           </p:cNvPr>
@@ -8550,7 +8550,7 @@
                 <a:ea typeface="Malgun Gothic"/>
                 <a:cs typeface="Malgun Gothic"/>
               </a:rPr>
-              <a:t>예상 질문 답변 방향: hard-negative 0은 샘플 기준, fine-tuning은 보류, 최종 시연은 hybrid KPF, 다음 과제는 실제 데이터와 자동 평가 게이트입니다.</a:t>
+              <a:t>예상 질문 답변 방향: hard-negative 0은 샘플 기준, 모델명·문서 버전은 의도적 제외, 최종 시연은 hybrid KPF입니다.</a:t>
             </a:r>
           </a:p>
         </p:txBody>
@@ -8560,7 +8560,7 @@
           <p:cNvPr id="20" name="">
             <a:extLst xmlns:a="http://schemas.openxmlformats.org/drawingml/2006/main">
               <a:ext uri="{FF2B5EF4-FFF2-40B4-BE49-F238E27FC236}">
-                <a16:creationId xmlns:a16="http://schemas.microsoft.com/office/drawing/2014/main" id="{09DFAF06-3974-4F9F-BFCC-2F2B0DBC664D}"/>
+                <a16:creationId xmlns:a16="http://schemas.microsoft.com/office/drawing/2014/main" id="{2D8BA1CF-1FB5-4F20-A988-F23D53DEE1CA}"/>
               </a:ext>
             </a:extLst>
           </p:cNvPr>
@@ -8624,7 +8624,7 @@
           <p:cNvPr id="21" name="">
             <a:extLst xmlns:a="http://schemas.openxmlformats.org/drawingml/2006/main">
               <a:ext uri="{FF2B5EF4-FFF2-40B4-BE49-F238E27FC236}">
-                <a16:creationId xmlns:a16="http://schemas.microsoft.com/office/drawing/2014/main" id="{E5999084-B987-45FB-B0F8-B97E1264E38E}"/>
+                <a16:creationId xmlns:a16="http://schemas.microsoft.com/office/drawing/2014/main" id="{CD36DB4F-5527-401D-B0B9-F70559B14894}"/>
               </a:ext>
             </a:extLst>
           </p:cNvPr>
@@ -8686,7 +8686,7 @@
     </p:spTree>
     <p:extLst>
       <p:ext uri="{BB962C8B-B14F-4D97-AF65-F5344CB8AC3E}">
-        <p14:creationId xmlns:p14="http://schemas.microsoft.com/office/powerpoint/2010/main" val="1922474524"/>
+        <p14:creationId xmlns:p14="http://schemas.microsoft.com/office/powerpoint/2010/main" val="2063922949"/>
       </p:ext>
     </p:extLst>
   </p:cSld>
@@ -8710,7 +8710,7 @@
           <p:cNvPr id="1" name="">
             <a:extLst xmlns:a="http://schemas.openxmlformats.org/drawingml/2006/main">
               <a:ext uri="{FF2B5EF4-FFF2-40B4-BE49-F238E27FC236}">
-                <a16:creationId xmlns:a16="http://schemas.microsoft.com/office/drawing/2014/main" id="{3DDB9D21-2097-4C3D-9BE3-8579DF349A06}"/>
+                <a16:creationId xmlns:a16="http://schemas.microsoft.com/office/drawing/2014/main" id="{6A1B747E-783B-43E5-8261-4B1C4E4E20DE}"/>
               </a:ext>
             </a:extLst>
           </p:cNvPr>
@@ -8745,7 +8745,7 @@
           <p:cNvPr id="2" name="">
             <a:extLst xmlns:a="http://schemas.openxmlformats.org/drawingml/2006/main">
               <a:ext uri="{FF2B5EF4-FFF2-40B4-BE49-F238E27FC236}">
-                <a16:creationId xmlns:a16="http://schemas.microsoft.com/office/drawing/2014/main" id="{20A3E447-C34F-4D01-B737-BA3BC31DBD8C}"/>
+                <a16:creationId xmlns:a16="http://schemas.microsoft.com/office/drawing/2014/main" id="{30B5C8BD-7DCB-470D-A296-B1436C203249}"/>
               </a:ext>
             </a:extLst>
           </p:cNvPr>
@@ -8809,7 +8809,7 @@
           <p:cNvPr id="3" name="">
             <a:extLst xmlns:a="http://schemas.openxmlformats.org/drawingml/2006/main">
               <a:ext uri="{FF2B5EF4-FFF2-40B4-BE49-F238E27FC236}">
-                <a16:creationId xmlns:a16="http://schemas.microsoft.com/office/drawing/2014/main" id="{9BF5613B-BC10-466D-8092-88CE7C4821FF}"/>
+                <a16:creationId xmlns:a16="http://schemas.microsoft.com/office/drawing/2014/main" id="{49AB475A-82C8-47EB-800A-3B70A13E6D23}"/>
               </a:ext>
             </a:extLst>
           </p:cNvPr>
@@ -8873,7 +8873,7 @@
           <p:cNvPr id="4" name="">
             <a:extLst xmlns:a="http://schemas.openxmlformats.org/drawingml/2006/main">
               <a:ext uri="{FF2B5EF4-FFF2-40B4-BE49-F238E27FC236}">
-                <a16:creationId xmlns:a16="http://schemas.microsoft.com/office/drawing/2014/main" id="{B7B46C5A-8415-449F-9855-F941CD7BFC4E}"/>
+                <a16:creationId xmlns:a16="http://schemas.microsoft.com/office/drawing/2014/main" id="{FBD3EF55-F1C3-45C9-B7F3-D7E00CF74CED}"/>
               </a:ext>
             </a:extLst>
           </p:cNvPr>
@@ -8937,7 +8937,7 @@
           <p:cNvPr id="5" name="">
             <a:extLst xmlns:a="http://schemas.openxmlformats.org/drawingml/2006/main">
               <a:ext uri="{FF2B5EF4-FFF2-40B4-BE49-F238E27FC236}">
-                <a16:creationId xmlns:a16="http://schemas.microsoft.com/office/drawing/2014/main" id="{D171945C-DA20-4311-AC3A-B18500F36075}"/>
+                <a16:creationId xmlns:a16="http://schemas.microsoft.com/office/drawing/2014/main" id="{A6E03D9C-93E4-4181-803E-687EF8F7035E}"/>
               </a:ext>
             </a:extLst>
           </p:cNvPr>
@@ -8970,7 +8970,7 @@
           <p:cNvPr id="6" name="">
             <a:extLst xmlns:a="http://schemas.openxmlformats.org/drawingml/2006/main">
               <a:ext uri="{FF2B5EF4-FFF2-40B4-BE49-F238E27FC236}">
-                <a16:creationId xmlns:a16="http://schemas.microsoft.com/office/drawing/2014/main" id="{D6AA8E9C-5443-496E-B6BA-F503E5D3B68A}"/>
+                <a16:creationId xmlns:a16="http://schemas.microsoft.com/office/drawing/2014/main" id="{4B9F4A87-A724-45B1-B1BA-207B20A91A19}"/>
               </a:ext>
             </a:extLst>
           </p:cNvPr>
@@ -9003,7 +9003,7 @@
           <p:cNvPr id="7" name="">
             <a:extLst xmlns:a="http://schemas.openxmlformats.org/drawingml/2006/main">
               <a:ext uri="{FF2B5EF4-FFF2-40B4-BE49-F238E27FC236}">
-                <a16:creationId xmlns:a16="http://schemas.microsoft.com/office/drawing/2014/main" id="{9D9D2031-5A74-4ECF-8E0B-A1E8B4E43A84}"/>
+                <a16:creationId xmlns:a16="http://schemas.microsoft.com/office/drawing/2014/main" id="{6210FA2D-BDAC-4691-9D81-6ED9EF566F72}"/>
               </a:ext>
             </a:extLst>
           </p:cNvPr>
@@ -9067,7 +9067,7 @@
           <p:cNvPr id="8" name="">
             <a:extLst xmlns:a="http://schemas.openxmlformats.org/drawingml/2006/main">
               <a:ext uri="{FF2B5EF4-FFF2-40B4-BE49-F238E27FC236}">
-                <a16:creationId xmlns:a16="http://schemas.microsoft.com/office/drawing/2014/main" id="{5359E576-AA10-4602-BD86-35171D5F7802}"/>
+                <a16:creationId xmlns:a16="http://schemas.microsoft.com/office/drawing/2014/main" id="{89A3774B-0309-4D24-B2B5-653D1B6DECF1}"/>
               </a:ext>
             </a:extLst>
           </p:cNvPr>
@@ -9102,7 +9102,7 @@
           <p:cNvPr id="9" name="">
             <a:extLst xmlns:a="http://schemas.openxmlformats.org/drawingml/2006/main">
               <a:ext uri="{FF2B5EF4-FFF2-40B4-BE49-F238E27FC236}">
-                <a16:creationId xmlns:a16="http://schemas.microsoft.com/office/drawing/2014/main" id="{4230D756-BE30-44D4-A58D-6549AD466DA0}"/>
+                <a16:creationId xmlns:a16="http://schemas.microsoft.com/office/drawing/2014/main" id="{8A6AF0B2-938A-485E-BF20-FE0F9BE43A60}"/>
               </a:ext>
             </a:extLst>
           </p:cNvPr>
@@ -9166,7 +9166,7 @@
           <p:cNvPr id="10" name="">
             <a:extLst xmlns:a="http://schemas.openxmlformats.org/drawingml/2006/main">
               <a:ext uri="{FF2B5EF4-FFF2-40B4-BE49-F238E27FC236}">
-                <a16:creationId xmlns:a16="http://schemas.microsoft.com/office/drawing/2014/main" id="{C1D61DCD-08E3-4016-87A8-C85A4849898F}"/>
+                <a16:creationId xmlns:a16="http://schemas.microsoft.com/office/drawing/2014/main" id="{447F4E5B-6A8D-431B-92DF-9F72D97DD562}"/>
               </a:ext>
             </a:extLst>
           </p:cNvPr>
@@ -9201,7 +9201,7 @@
           <p:cNvPr id="11" name="">
             <a:extLst xmlns:a="http://schemas.openxmlformats.org/drawingml/2006/main">
               <a:ext uri="{FF2B5EF4-FFF2-40B4-BE49-F238E27FC236}">
-                <a16:creationId xmlns:a16="http://schemas.microsoft.com/office/drawing/2014/main" id="{09D2DC34-2913-41E3-BC6A-D890A15BD9E0}"/>
+                <a16:creationId xmlns:a16="http://schemas.microsoft.com/office/drawing/2014/main" id="{F0E863FA-5CA4-4DB4-AB5D-91F051EB815C}"/>
               </a:ext>
             </a:extLst>
           </p:cNvPr>
@@ -9265,7 +9265,7 @@
           <p:cNvPr id="12" name="">
             <a:extLst xmlns:a="http://schemas.openxmlformats.org/drawingml/2006/main">
               <a:ext uri="{FF2B5EF4-FFF2-40B4-BE49-F238E27FC236}">
-                <a16:creationId xmlns:a16="http://schemas.microsoft.com/office/drawing/2014/main" id="{66512AAE-7EED-480B-A5FF-3BEC24E1E6AA}"/>
+                <a16:creationId xmlns:a16="http://schemas.microsoft.com/office/drawing/2014/main" id="{C2316BF7-B3D5-4A0A-8D1F-96178483690C}"/>
               </a:ext>
             </a:extLst>
           </p:cNvPr>
@@ -9298,7 +9298,7 @@
           <p:cNvPr id="13" name="">
             <a:extLst xmlns:a="http://schemas.openxmlformats.org/drawingml/2006/main">
               <a:ext uri="{FF2B5EF4-FFF2-40B4-BE49-F238E27FC236}">
-                <a16:creationId xmlns:a16="http://schemas.microsoft.com/office/drawing/2014/main" id="{2F26518E-7661-484D-A89B-3C0B760E4D31}"/>
+                <a16:creationId xmlns:a16="http://schemas.microsoft.com/office/drawing/2014/main" id="{E7E6C775-F392-4F94-A7ED-68155D44E68B}"/>
               </a:ext>
             </a:extLst>
           </p:cNvPr>
@@ -9331,7 +9331,7 @@
           <p:cNvPr id="14" name="">
             <a:extLst xmlns:a="http://schemas.openxmlformats.org/drawingml/2006/main">
               <a:ext uri="{FF2B5EF4-FFF2-40B4-BE49-F238E27FC236}">
-                <a16:creationId xmlns:a16="http://schemas.microsoft.com/office/drawing/2014/main" id="{2DDF839F-1E08-4040-82C7-CB0C1DA1A270}"/>
+                <a16:creationId xmlns:a16="http://schemas.microsoft.com/office/drawing/2014/main" id="{E76B7512-BB58-4C08-8012-5F8C91879F58}"/>
               </a:ext>
             </a:extLst>
           </p:cNvPr>
@@ -9395,7 +9395,7 @@
           <p:cNvPr id="15" name="">
             <a:extLst xmlns:a="http://schemas.openxmlformats.org/drawingml/2006/main">
               <a:ext uri="{FF2B5EF4-FFF2-40B4-BE49-F238E27FC236}">
-                <a16:creationId xmlns:a16="http://schemas.microsoft.com/office/drawing/2014/main" id="{5DA60C27-AC9F-4B85-BA2A-EA26707E8A25}"/>
+                <a16:creationId xmlns:a16="http://schemas.microsoft.com/office/drawing/2014/main" id="{BCBF2B7E-7050-489D-8A4A-52A8548F098F}"/>
               </a:ext>
             </a:extLst>
           </p:cNvPr>
@@ -9430,7 +9430,7 @@
           <p:cNvPr id="16" name="">
             <a:extLst xmlns:a="http://schemas.openxmlformats.org/drawingml/2006/main">
               <a:ext uri="{FF2B5EF4-FFF2-40B4-BE49-F238E27FC236}">
-                <a16:creationId xmlns:a16="http://schemas.microsoft.com/office/drawing/2014/main" id="{2850FA0D-2D5D-46D2-96BE-0898BF405673}"/>
+                <a16:creationId xmlns:a16="http://schemas.microsoft.com/office/drawing/2014/main" id="{20877D93-C7CD-46C3-879D-8C9628530327}"/>
               </a:ext>
             </a:extLst>
           </p:cNvPr>
@@ -9494,7 +9494,7 @@
           <p:cNvPr id="17" name="">
             <a:extLst xmlns:a="http://schemas.openxmlformats.org/drawingml/2006/main">
               <a:ext uri="{FF2B5EF4-FFF2-40B4-BE49-F238E27FC236}">
-                <a16:creationId xmlns:a16="http://schemas.microsoft.com/office/drawing/2014/main" id="{CEA254B7-DE68-40C8-A603-7E6947C4E7EF}"/>
+                <a16:creationId xmlns:a16="http://schemas.microsoft.com/office/drawing/2014/main" id="{9ED3D9CA-9680-4AF6-8A5B-99351ACCDCBD}"/>
               </a:ext>
             </a:extLst>
           </p:cNvPr>
@@ -9529,7 +9529,7 @@
           <p:cNvPr id="18" name="">
             <a:extLst xmlns:a="http://schemas.openxmlformats.org/drawingml/2006/main">
               <a:ext uri="{FF2B5EF4-FFF2-40B4-BE49-F238E27FC236}">
-                <a16:creationId xmlns:a16="http://schemas.microsoft.com/office/drawing/2014/main" id="{75F98591-1BC0-465E-8A8B-9531F1ACA422}"/>
+                <a16:creationId xmlns:a16="http://schemas.microsoft.com/office/drawing/2014/main" id="{495F3CF4-6ACD-4FF5-B917-CBEB259B790E}"/>
               </a:ext>
             </a:extLst>
           </p:cNvPr>
@@ -9593,7 +9593,7 @@
           <p:cNvPr id="19" name="">
             <a:extLst xmlns:a="http://schemas.openxmlformats.org/drawingml/2006/main">
               <a:ext uri="{FF2B5EF4-FFF2-40B4-BE49-F238E27FC236}">
-                <a16:creationId xmlns:a16="http://schemas.microsoft.com/office/drawing/2014/main" id="{85A78349-0C75-4699-A3B3-64C728CA2567}"/>
+                <a16:creationId xmlns:a16="http://schemas.microsoft.com/office/drawing/2014/main" id="{502780C0-8548-4138-AF48-DBE7CBF4D606}"/>
               </a:ext>
             </a:extLst>
           </p:cNvPr>
@@ -9626,7 +9626,7 @@
           <p:cNvPr id="20" name="">
             <a:extLst xmlns:a="http://schemas.openxmlformats.org/drawingml/2006/main">
               <a:ext uri="{FF2B5EF4-FFF2-40B4-BE49-F238E27FC236}">
-                <a16:creationId xmlns:a16="http://schemas.microsoft.com/office/drawing/2014/main" id="{5C184661-7A0C-4310-BA1D-332084A7C968}"/>
+                <a16:creationId xmlns:a16="http://schemas.microsoft.com/office/drawing/2014/main" id="{02155F7D-4F49-426F-8543-ACA952322425}"/>
               </a:ext>
             </a:extLst>
           </p:cNvPr>
@@ -9659,7 +9659,7 @@
           <p:cNvPr id="21" name="">
             <a:extLst xmlns:a="http://schemas.openxmlformats.org/drawingml/2006/main">
               <a:ext uri="{FF2B5EF4-FFF2-40B4-BE49-F238E27FC236}">
-                <a16:creationId xmlns:a16="http://schemas.microsoft.com/office/drawing/2014/main" id="{A896CACC-82AB-4BEF-B0AD-607774F54ECC}"/>
+                <a16:creationId xmlns:a16="http://schemas.microsoft.com/office/drawing/2014/main" id="{B2C38E3A-F275-4E79-B22C-401DD8369AC4}"/>
               </a:ext>
             </a:extLst>
           </p:cNvPr>
@@ -9723,7 +9723,7 @@
           <p:cNvPr id="22" name="">
             <a:extLst xmlns:a="http://schemas.openxmlformats.org/drawingml/2006/main">
               <a:ext uri="{FF2B5EF4-FFF2-40B4-BE49-F238E27FC236}">
-                <a16:creationId xmlns:a16="http://schemas.microsoft.com/office/drawing/2014/main" id="{E273CEB7-1928-446E-97D0-B125963AFA34}"/>
+                <a16:creationId xmlns:a16="http://schemas.microsoft.com/office/drawing/2014/main" id="{20838B69-F88D-474C-A940-0CB0169F89CE}"/>
               </a:ext>
             </a:extLst>
           </p:cNvPr>
@@ -9758,7 +9758,7 @@
           <p:cNvPr id="23" name="">
             <a:extLst xmlns:a="http://schemas.openxmlformats.org/drawingml/2006/main">
               <a:ext uri="{FF2B5EF4-FFF2-40B4-BE49-F238E27FC236}">
-                <a16:creationId xmlns:a16="http://schemas.microsoft.com/office/drawing/2014/main" id="{095221E2-0A1F-4109-B27C-BDE55C693A8D}"/>
+                <a16:creationId xmlns:a16="http://schemas.microsoft.com/office/drawing/2014/main" id="{69A84B9C-2B6A-4F0F-8B37-FCEA243FFA3D}"/>
               </a:ext>
             </a:extLst>
           </p:cNvPr>
@@ -9822,7 +9822,7 @@
           <p:cNvPr id="24" name="">
             <a:extLst xmlns:a="http://schemas.openxmlformats.org/drawingml/2006/main">
               <a:ext uri="{FF2B5EF4-FFF2-40B4-BE49-F238E27FC236}">
-                <a16:creationId xmlns:a16="http://schemas.microsoft.com/office/drawing/2014/main" id="{51AE5452-236A-4754-8B79-69C96DE153B9}"/>
+                <a16:creationId xmlns:a16="http://schemas.microsoft.com/office/drawing/2014/main" id="{6EF347F9-D631-44EC-A88D-4162AB4782BB}"/>
               </a:ext>
             </a:extLst>
           </p:cNvPr>
@@ -9857,7 +9857,7 @@
           <p:cNvPr id="25" name="">
             <a:extLst xmlns:a="http://schemas.openxmlformats.org/drawingml/2006/main">
               <a:ext uri="{FF2B5EF4-FFF2-40B4-BE49-F238E27FC236}">
-                <a16:creationId xmlns:a16="http://schemas.microsoft.com/office/drawing/2014/main" id="{73700C6C-EF1A-4574-A934-8D1B8DEA721D}"/>
+                <a16:creationId xmlns:a16="http://schemas.microsoft.com/office/drawing/2014/main" id="{6CAA89B7-B933-426A-8233-6A6571469FBA}"/>
               </a:ext>
             </a:extLst>
           </p:cNvPr>
@@ -9921,7 +9921,7 @@
           <p:cNvPr id="26" name="">
             <a:extLst xmlns:a="http://schemas.openxmlformats.org/drawingml/2006/main">
               <a:ext uri="{FF2B5EF4-FFF2-40B4-BE49-F238E27FC236}">
-                <a16:creationId xmlns:a16="http://schemas.microsoft.com/office/drawing/2014/main" id="{5753F728-3B74-4363-AB0F-7CB1569B88BC}"/>
+                <a16:creationId xmlns:a16="http://schemas.microsoft.com/office/drawing/2014/main" id="{79EE5326-44DC-496D-8C48-169667AAA249}"/>
               </a:ext>
             </a:extLst>
           </p:cNvPr>
@@ -9954,7 +9954,7 @@
           <p:cNvPr id="27" name="">
             <a:extLst xmlns:a="http://schemas.openxmlformats.org/drawingml/2006/main">
               <a:ext uri="{FF2B5EF4-FFF2-40B4-BE49-F238E27FC236}">
-                <a16:creationId xmlns:a16="http://schemas.microsoft.com/office/drawing/2014/main" id="{A5E61CFD-59D1-4EF1-886C-ED2773B8EA79}"/>
+                <a16:creationId xmlns:a16="http://schemas.microsoft.com/office/drawing/2014/main" id="{B8D5DFB6-93DA-433D-8A79-738204CDACF3}"/>
               </a:ext>
             </a:extLst>
           </p:cNvPr>
@@ -9987,7 +9987,7 @@
           <p:cNvPr id="28" name="">
             <a:extLst xmlns:a="http://schemas.openxmlformats.org/drawingml/2006/main">
               <a:ext uri="{FF2B5EF4-FFF2-40B4-BE49-F238E27FC236}">
-                <a16:creationId xmlns:a16="http://schemas.microsoft.com/office/drawing/2014/main" id="{C35EBF13-BB96-49D8-81E2-7448B54F61C0}"/>
+                <a16:creationId xmlns:a16="http://schemas.microsoft.com/office/drawing/2014/main" id="{6532DA4C-0871-4339-BB8B-241EBC96A79D}"/>
               </a:ext>
             </a:extLst>
           </p:cNvPr>
@@ -10051,7 +10051,7 @@
           <p:cNvPr id="29" name="">
             <a:extLst xmlns:a="http://schemas.openxmlformats.org/drawingml/2006/main">
               <a:ext uri="{FF2B5EF4-FFF2-40B4-BE49-F238E27FC236}">
-                <a16:creationId xmlns:a16="http://schemas.microsoft.com/office/drawing/2014/main" id="{74DC3BFD-B894-4E44-9F6E-FAD22A0BB4E6}"/>
+                <a16:creationId xmlns:a16="http://schemas.microsoft.com/office/drawing/2014/main" id="{1F5C4428-DF80-4627-9D00-16E36EA040ED}"/>
               </a:ext>
             </a:extLst>
           </p:cNvPr>
@@ -10086,7 +10086,7 @@
           <p:cNvPr id="30" name="">
             <a:extLst xmlns:a="http://schemas.openxmlformats.org/drawingml/2006/main">
               <a:ext uri="{FF2B5EF4-FFF2-40B4-BE49-F238E27FC236}">
-                <a16:creationId xmlns:a16="http://schemas.microsoft.com/office/drawing/2014/main" id="{B5927B29-43CC-469E-AB38-93A6537490CA}"/>
+                <a16:creationId xmlns:a16="http://schemas.microsoft.com/office/drawing/2014/main" id="{218423D4-EB36-45C5-8529-1FD74E0F64B2}"/>
               </a:ext>
             </a:extLst>
           </p:cNvPr>
@@ -10150,7 +10150,7 @@
           <p:cNvPr id="31" name="">
             <a:extLst xmlns:a="http://schemas.openxmlformats.org/drawingml/2006/main">
               <a:ext uri="{FF2B5EF4-FFF2-40B4-BE49-F238E27FC236}">
-                <a16:creationId xmlns:a16="http://schemas.microsoft.com/office/drawing/2014/main" id="{B878F27D-529A-4DCF-982D-4CE0EEA069E5}"/>
+                <a16:creationId xmlns:a16="http://schemas.microsoft.com/office/drawing/2014/main" id="{4534C244-4C26-4D3B-BD68-E909D1F242FF}"/>
               </a:ext>
             </a:extLst>
           </p:cNvPr>
@@ -10185,7 +10185,7 @@
           <p:cNvPr id="32" name="">
             <a:extLst xmlns:a="http://schemas.openxmlformats.org/drawingml/2006/main">
               <a:ext uri="{FF2B5EF4-FFF2-40B4-BE49-F238E27FC236}">
-                <a16:creationId xmlns:a16="http://schemas.microsoft.com/office/drawing/2014/main" id="{F64350BC-0554-4AC4-A989-D80323626FB9}"/>
+                <a16:creationId xmlns:a16="http://schemas.microsoft.com/office/drawing/2014/main" id="{3FFCDBEB-E09B-40EF-9F79-9BD80C35E567}"/>
               </a:ext>
             </a:extLst>
           </p:cNvPr>
@@ -10249,7 +10249,7 @@
           <p:cNvPr id="33" name="">
             <a:extLst xmlns:a="http://schemas.openxmlformats.org/drawingml/2006/main">
               <a:ext uri="{FF2B5EF4-FFF2-40B4-BE49-F238E27FC236}">
-                <a16:creationId xmlns:a16="http://schemas.microsoft.com/office/drawing/2014/main" id="{899BE143-FFB1-4DD3-833C-AD7FEB876948}"/>
+                <a16:creationId xmlns:a16="http://schemas.microsoft.com/office/drawing/2014/main" id="{11C38CB1-7A28-4F50-9906-F0B696570A03}"/>
               </a:ext>
             </a:extLst>
           </p:cNvPr>
@@ -10284,7 +10284,7 @@
           <p:cNvPr id="34" name="">
             <a:extLst xmlns:a="http://schemas.openxmlformats.org/drawingml/2006/main">
               <a:ext uri="{FF2B5EF4-FFF2-40B4-BE49-F238E27FC236}">
-                <a16:creationId xmlns:a16="http://schemas.microsoft.com/office/drawing/2014/main" id="{8DECD7D6-A311-441F-8B3B-F806D9FCE920}"/>
+                <a16:creationId xmlns:a16="http://schemas.microsoft.com/office/drawing/2014/main" id="{DD3BEC21-F730-4C25-A39E-DEF1CA53B6C9}"/>
               </a:ext>
             </a:extLst>
           </p:cNvPr>
@@ -10348,7 +10348,7 @@
           <p:cNvPr id="35" name="">
             <a:extLst xmlns:a="http://schemas.openxmlformats.org/drawingml/2006/main">
               <a:ext uri="{FF2B5EF4-FFF2-40B4-BE49-F238E27FC236}">
-                <a16:creationId xmlns:a16="http://schemas.microsoft.com/office/drawing/2014/main" id="{5DD08A71-E492-41B6-B017-7FD2A49EC904}"/>
+                <a16:creationId xmlns:a16="http://schemas.microsoft.com/office/drawing/2014/main" id="{853DE43C-8953-4992-A67E-7C1D7D21F4ED}"/>
               </a:ext>
             </a:extLst>
           </p:cNvPr>
@@ -10412,7 +10412,7 @@
           <p:cNvPr id="36" name="">
             <a:extLst xmlns:a="http://schemas.openxmlformats.org/drawingml/2006/main">
               <a:ext uri="{FF2B5EF4-FFF2-40B4-BE49-F238E27FC236}">
-                <a16:creationId xmlns:a16="http://schemas.microsoft.com/office/drawing/2014/main" id="{958B7DA2-8F5A-450B-9A01-305E702AE35F}"/>
+                <a16:creationId xmlns:a16="http://schemas.microsoft.com/office/drawing/2014/main" id="{A0C10A3B-657C-4F75-B23F-2163B83D7D53}"/>
               </a:ext>
             </a:extLst>
           </p:cNvPr>
@@ -10474,7 +10474,7 @@
     </p:spTree>
     <p:extLst>
       <p:ext uri="{BB962C8B-B14F-4D97-AF65-F5344CB8AC3E}">
-        <p14:creationId xmlns:p14="http://schemas.microsoft.com/office/powerpoint/2010/main" val="458645726"/>
+        <p14:creationId xmlns:p14="http://schemas.microsoft.com/office/powerpoint/2010/main" val="2075137333"/>
       </p:ext>
     </p:extLst>
   </p:cSld>
@@ -10498,7 +10498,7 @@
           <p:cNvPr id="1" name="">
             <a:extLst xmlns:a="http://schemas.openxmlformats.org/drawingml/2006/main">
               <a:ext uri="{FF2B5EF4-FFF2-40B4-BE49-F238E27FC236}">
-                <a16:creationId xmlns:a16="http://schemas.microsoft.com/office/drawing/2014/main" id="{ABBC5136-CA55-4079-ADB0-9FAC8F2AD185}"/>
+                <a16:creationId xmlns:a16="http://schemas.microsoft.com/office/drawing/2014/main" id="{64C595D6-5BDE-4E41-953C-B217E8BBEB39}"/>
               </a:ext>
             </a:extLst>
           </p:cNvPr>
@@ -10533,7 +10533,7 @@
           <p:cNvPr id="2" name="">
             <a:extLst xmlns:a="http://schemas.openxmlformats.org/drawingml/2006/main">
               <a:ext uri="{FF2B5EF4-FFF2-40B4-BE49-F238E27FC236}">
-                <a16:creationId xmlns:a16="http://schemas.microsoft.com/office/drawing/2014/main" id="{CA3CB2D9-1557-48F6-AE9E-A47B4916FB5B}"/>
+                <a16:creationId xmlns:a16="http://schemas.microsoft.com/office/drawing/2014/main" id="{53767C09-D836-45CE-A22B-9E570C6E0497}"/>
               </a:ext>
             </a:extLst>
           </p:cNvPr>
@@ -10597,7 +10597,7 @@
           <p:cNvPr id="3" name="">
             <a:extLst xmlns:a="http://schemas.openxmlformats.org/drawingml/2006/main">
               <a:ext uri="{FF2B5EF4-FFF2-40B4-BE49-F238E27FC236}">
-                <a16:creationId xmlns:a16="http://schemas.microsoft.com/office/drawing/2014/main" id="{998C1947-04E6-417E-848B-D1E5C66C4BDD}"/>
+                <a16:creationId xmlns:a16="http://schemas.microsoft.com/office/drawing/2014/main" id="{21CFE56C-C8C1-43A3-9C55-2377A34F0540}"/>
               </a:ext>
             </a:extLst>
           </p:cNvPr>
@@ -10661,7 +10661,7 @@
           <p:cNvPr id="4" name="">
             <a:extLst xmlns:a="http://schemas.openxmlformats.org/drawingml/2006/main">
               <a:ext uri="{FF2B5EF4-FFF2-40B4-BE49-F238E27FC236}">
-                <a16:creationId xmlns:a16="http://schemas.microsoft.com/office/drawing/2014/main" id="{ECCE62BD-ADB8-45E6-8AD8-0A496DCFC20F}"/>
+                <a16:creationId xmlns:a16="http://schemas.microsoft.com/office/drawing/2014/main" id="{273367B6-B320-4A6A-BB5E-1D256DA0172D}"/>
               </a:ext>
             </a:extLst>
           </p:cNvPr>
@@ -10725,7 +10725,7 @@
           <p:cNvPr id="5" name="">
             <a:extLst xmlns:a="http://schemas.openxmlformats.org/drawingml/2006/main">
               <a:ext uri="{FF2B5EF4-FFF2-40B4-BE49-F238E27FC236}">
-                <a16:creationId xmlns:a16="http://schemas.microsoft.com/office/drawing/2014/main" id="{25124874-E3A1-4168-B0C6-87D2783118F7}"/>
+                <a16:creationId xmlns:a16="http://schemas.microsoft.com/office/drawing/2014/main" id="{C58A6A25-76E4-4985-93DA-99D9DFDE1A72}"/>
               </a:ext>
             </a:extLst>
           </p:cNvPr>
@@ -10758,7 +10758,7 @@
           <p:cNvPr id="6" name="">
             <a:extLst xmlns:a="http://schemas.openxmlformats.org/drawingml/2006/main">
               <a:ext uri="{FF2B5EF4-FFF2-40B4-BE49-F238E27FC236}">
-                <a16:creationId xmlns:a16="http://schemas.microsoft.com/office/drawing/2014/main" id="{8549E9BA-C4A2-45EA-9D29-F60EB458CB6C}"/>
+                <a16:creationId xmlns:a16="http://schemas.microsoft.com/office/drawing/2014/main" id="{E36CCD97-1046-4657-BF1E-887B0E2A9B37}"/>
               </a:ext>
             </a:extLst>
           </p:cNvPr>
@@ -10822,7 +10822,7 @@
           <p:cNvPr id="7" name="">
             <a:extLst xmlns:a="http://schemas.openxmlformats.org/drawingml/2006/main">
               <a:ext uri="{FF2B5EF4-FFF2-40B4-BE49-F238E27FC236}">
-                <a16:creationId xmlns:a16="http://schemas.microsoft.com/office/drawing/2014/main" id="{121E3D5B-A5A9-4688-A23F-9FEAF0CCA1AE}"/>
+                <a16:creationId xmlns:a16="http://schemas.microsoft.com/office/drawing/2014/main" id="{0FF47563-7FD3-49E9-BF7B-1FB35BFEF8C7}"/>
               </a:ext>
             </a:extLst>
           </p:cNvPr>
@@ -10932,7 +10932,7 @@
           <p:cNvPr id="8" name="">
             <a:extLst xmlns:a="http://schemas.openxmlformats.org/drawingml/2006/main">
               <a:ext uri="{FF2B5EF4-FFF2-40B4-BE49-F238E27FC236}">
-                <a16:creationId xmlns:a16="http://schemas.microsoft.com/office/drawing/2014/main" id="{BB105504-442E-4BFB-8551-6FB15BBBA561}"/>
+                <a16:creationId xmlns:a16="http://schemas.microsoft.com/office/drawing/2014/main" id="{ADAA4F5E-F17A-4AA1-A04C-653FF36A5F63}"/>
               </a:ext>
             </a:extLst>
           </p:cNvPr>
@@ -10967,7 +10967,7 @@
           <p:cNvPr id="9" name="">
             <a:extLst xmlns:a="http://schemas.openxmlformats.org/drawingml/2006/main">
               <a:ext uri="{FF2B5EF4-FFF2-40B4-BE49-F238E27FC236}">
-                <a16:creationId xmlns:a16="http://schemas.microsoft.com/office/drawing/2014/main" id="{858AF27A-4FB0-4C46-9D1F-E744ABE9637D}"/>
+                <a16:creationId xmlns:a16="http://schemas.microsoft.com/office/drawing/2014/main" id="{17E05712-5A99-4C37-A952-4A97D933E98A}"/>
               </a:ext>
             </a:extLst>
           </p:cNvPr>
@@ -11031,7 +11031,7 @@
           <p:cNvPr id="10" name="">
             <a:extLst xmlns:a="http://schemas.openxmlformats.org/drawingml/2006/main">
               <a:ext uri="{FF2B5EF4-FFF2-40B4-BE49-F238E27FC236}">
-                <a16:creationId xmlns:a16="http://schemas.microsoft.com/office/drawing/2014/main" id="{B8DB3EDC-A2E5-4B02-BE76-9DCCDB684857}"/>
+                <a16:creationId xmlns:a16="http://schemas.microsoft.com/office/drawing/2014/main" id="{A96CB742-A824-4948-A5AF-B29E1DC51661}"/>
               </a:ext>
             </a:extLst>
           </p:cNvPr>
@@ -11064,7 +11064,7 @@
           <p:cNvPr id="11" name="">
             <a:extLst xmlns:a="http://schemas.openxmlformats.org/drawingml/2006/main">
               <a:ext uri="{FF2B5EF4-FFF2-40B4-BE49-F238E27FC236}">
-                <a16:creationId xmlns:a16="http://schemas.microsoft.com/office/drawing/2014/main" id="{FAE1AF97-94B0-4889-AF27-048BF6A77CFA}"/>
+                <a16:creationId xmlns:a16="http://schemas.microsoft.com/office/drawing/2014/main" id="{C2043798-465E-4F95-BFE7-533FA75E8E82}"/>
               </a:ext>
             </a:extLst>
           </p:cNvPr>
@@ -11128,7 +11128,7 @@
           <p:cNvPr id="12" name="">
             <a:extLst xmlns:a="http://schemas.openxmlformats.org/drawingml/2006/main">
               <a:ext uri="{FF2B5EF4-FFF2-40B4-BE49-F238E27FC236}">
-                <a16:creationId xmlns:a16="http://schemas.microsoft.com/office/drawing/2014/main" id="{6DAEFF5D-3C57-4B1F-859F-115BF29F1C63}"/>
+                <a16:creationId xmlns:a16="http://schemas.microsoft.com/office/drawing/2014/main" id="{2CB9D650-CCC4-41E4-9626-C657AD124EC0}"/>
               </a:ext>
             </a:extLst>
           </p:cNvPr>
@@ -11163,7 +11163,7 @@
           <p:cNvPr id="13" name="">
             <a:extLst xmlns:a="http://schemas.openxmlformats.org/drawingml/2006/main">
               <a:ext uri="{FF2B5EF4-FFF2-40B4-BE49-F238E27FC236}">
-                <a16:creationId xmlns:a16="http://schemas.microsoft.com/office/drawing/2014/main" id="{44DCA11A-7DEC-4604-AB7A-3261958FBE6F}"/>
+                <a16:creationId xmlns:a16="http://schemas.microsoft.com/office/drawing/2014/main" id="{8E6769C7-7E6F-4A57-BA6A-746A2BCDF260}"/>
               </a:ext>
             </a:extLst>
           </p:cNvPr>
@@ -11227,7 +11227,7 @@
           <p:cNvPr id="14" name="">
             <a:extLst xmlns:a="http://schemas.openxmlformats.org/drawingml/2006/main">
               <a:ext uri="{FF2B5EF4-FFF2-40B4-BE49-F238E27FC236}">
-                <a16:creationId xmlns:a16="http://schemas.microsoft.com/office/drawing/2014/main" id="{9E685222-2A17-4816-BFD1-E822FB403E35}"/>
+                <a16:creationId xmlns:a16="http://schemas.microsoft.com/office/drawing/2014/main" id="{F40A8C1D-F19C-4119-BA85-71AC98705782}"/>
               </a:ext>
             </a:extLst>
           </p:cNvPr>
@@ -11262,7 +11262,7 @@
           <p:cNvPr id="15" name="">
             <a:extLst xmlns:a="http://schemas.openxmlformats.org/drawingml/2006/main">
               <a:ext uri="{FF2B5EF4-FFF2-40B4-BE49-F238E27FC236}">
-                <a16:creationId xmlns:a16="http://schemas.microsoft.com/office/drawing/2014/main" id="{6E76C77F-AD5D-4E20-9218-C3362EFEE203}"/>
+                <a16:creationId xmlns:a16="http://schemas.microsoft.com/office/drawing/2014/main" id="{F6C80714-BEAB-48A8-802E-397F868592DA}"/>
               </a:ext>
             </a:extLst>
           </p:cNvPr>
@@ -11326,7 +11326,7 @@
           <p:cNvPr id="16" name="">
             <a:extLst xmlns:a="http://schemas.openxmlformats.org/drawingml/2006/main">
               <a:ext uri="{FF2B5EF4-FFF2-40B4-BE49-F238E27FC236}">
-                <a16:creationId xmlns:a16="http://schemas.microsoft.com/office/drawing/2014/main" id="{0CED34CC-DBA2-42D7-852B-34E92FFDBB96}"/>
+                <a16:creationId xmlns:a16="http://schemas.microsoft.com/office/drawing/2014/main" id="{4C6A51E4-11E8-4F86-8A72-3B7E3C58EDB4}"/>
               </a:ext>
             </a:extLst>
           </p:cNvPr>
@@ -11361,7 +11361,7 @@
           <p:cNvPr id="17" name="">
             <a:extLst xmlns:a="http://schemas.openxmlformats.org/drawingml/2006/main">
               <a:ext uri="{FF2B5EF4-FFF2-40B4-BE49-F238E27FC236}">
-                <a16:creationId xmlns:a16="http://schemas.microsoft.com/office/drawing/2014/main" id="{C3CE5FD1-C884-47E5-A47D-354FD3B598BB}"/>
+                <a16:creationId xmlns:a16="http://schemas.microsoft.com/office/drawing/2014/main" id="{8C512BA7-A129-4E6A-B8FC-3ED09A4DAD40}"/>
               </a:ext>
             </a:extLst>
           </p:cNvPr>
@@ -11425,7 +11425,7 @@
           <p:cNvPr id="18" name="">
             <a:extLst xmlns:a="http://schemas.openxmlformats.org/drawingml/2006/main">
               <a:ext uri="{FF2B5EF4-FFF2-40B4-BE49-F238E27FC236}">
-                <a16:creationId xmlns:a16="http://schemas.microsoft.com/office/drawing/2014/main" id="{A5905CB3-9FA6-4B81-AD12-229D5011ECE2}"/>
+                <a16:creationId xmlns:a16="http://schemas.microsoft.com/office/drawing/2014/main" id="{44591845-E182-4FAC-A44E-9AD2EFD05284}"/>
               </a:ext>
             </a:extLst>
           </p:cNvPr>
@@ -11489,7 +11489,7 @@
           <p:cNvPr id="19" name="">
             <a:extLst xmlns:a="http://schemas.openxmlformats.org/drawingml/2006/main">
               <a:ext uri="{FF2B5EF4-FFF2-40B4-BE49-F238E27FC236}">
-                <a16:creationId xmlns:a16="http://schemas.microsoft.com/office/drawing/2014/main" id="{F42983CC-6A67-4451-AC68-A6D217436ADA}"/>
+                <a16:creationId xmlns:a16="http://schemas.microsoft.com/office/drawing/2014/main" id="{1F2DE114-B498-4A4F-B9A1-3645DA37ECE5}"/>
               </a:ext>
             </a:extLst>
           </p:cNvPr>
@@ -11551,7 +11551,7 @@
     </p:spTree>
     <p:extLst>
       <p:ext uri="{BB962C8B-B14F-4D97-AF65-F5344CB8AC3E}">
-        <p14:creationId xmlns:p14="http://schemas.microsoft.com/office/powerpoint/2010/main" val="937810448"/>
+        <p14:creationId xmlns:p14="http://schemas.microsoft.com/office/powerpoint/2010/main" val="1292107088"/>
       </p:ext>
     </p:extLst>
   </p:cSld>
@@ -11575,7 +11575,7 @@
           <p:cNvPr id="1" name="">
             <a:extLst xmlns:a="http://schemas.openxmlformats.org/drawingml/2006/main">
               <a:ext uri="{FF2B5EF4-FFF2-40B4-BE49-F238E27FC236}">
-                <a16:creationId xmlns:a16="http://schemas.microsoft.com/office/drawing/2014/main" id="{D3FD9E64-4A6E-4164-8B6C-024CC502253A}"/>
+                <a16:creationId xmlns:a16="http://schemas.microsoft.com/office/drawing/2014/main" id="{87F59CE1-4802-4687-B723-C1C6958A9A16}"/>
               </a:ext>
             </a:extLst>
           </p:cNvPr>
@@ -11610,7 +11610,7 @@
           <p:cNvPr id="2" name="">
             <a:extLst xmlns:a="http://schemas.openxmlformats.org/drawingml/2006/main">
               <a:ext uri="{FF2B5EF4-FFF2-40B4-BE49-F238E27FC236}">
-                <a16:creationId xmlns:a16="http://schemas.microsoft.com/office/drawing/2014/main" id="{9EE1CB14-6321-451D-B9AE-0BAB180DCBCB}"/>
+                <a16:creationId xmlns:a16="http://schemas.microsoft.com/office/drawing/2014/main" id="{B9BFF4B7-3D2A-4398-A5DA-BFF2509618B0}"/>
               </a:ext>
             </a:extLst>
           </p:cNvPr>
@@ -11674,7 +11674,7 @@
           <p:cNvPr id="3" name="">
             <a:extLst xmlns:a="http://schemas.openxmlformats.org/drawingml/2006/main">
               <a:ext uri="{FF2B5EF4-FFF2-40B4-BE49-F238E27FC236}">
-                <a16:creationId xmlns:a16="http://schemas.microsoft.com/office/drawing/2014/main" id="{363CA5C2-B80C-4CBA-8B02-609AE5157923}"/>
+                <a16:creationId xmlns:a16="http://schemas.microsoft.com/office/drawing/2014/main" id="{62C27356-E98B-48A7-BAD5-6BB95D9397B4}"/>
               </a:ext>
             </a:extLst>
           </p:cNvPr>
@@ -11728,7 +11728,7 @@
                 <a:ea typeface="Malgun Gothic"/>
                 <a:cs typeface="Malgun Gothic"/>
               </a:rPr>
-              <a:t>OPF + Korean Regex Safety Net + 문맥 오탐 억제</a:t>
+              <a:t>OPF + Korean Privacy Rule Pack + 문맥 오탐 억제</a:t>
             </a:r>
           </a:p>
         </p:txBody>
@@ -11738,7 +11738,7 @@
           <p:cNvPr id="4" name="">
             <a:extLst xmlns:a="http://schemas.openxmlformats.org/drawingml/2006/main">
               <a:ext uri="{FF2B5EF4-FFF2-40B4-BE49-F238E27FC236}">
-                <a16:creationId xmlns:a16="http://schemas.microsoft.com/office/drawing/2014/main" id="{5636D179-DEB3-42E5-A70B-853B0DEB2B3B}"/>
+                <a16:creationId xmlns:a16="http://schemas.microsoft.com/office/drawing/2014/main" id="{C4FB9BCD-13EF-4A6A-A24B-5371D50DD8CF}"/>
               </a:ext>
             </a:extLst>
           </p:cNvPr>
@@ -11802,7 +11802,7 @@
           <p:cNvPr id="5" name="">
             <a:extLst xmlns:a="http://schemas.openxmlformats.org/drawingml/2006/main">
               <a:ext uri="{FF2B5EF4-FFF2-40B4-BE49-F238E27FC236}">
-                <a16:creationId xmlns:a16="http://schemas.microsoft.com/office/drawing/2014/main" id="{1BC6F6F2-2B36-46A7-9785-0DF39ED6F5E1}"/>
+                <a16:creationId xmlns:a16="http://schemas.microsoft.com/office/drawing/2014/main" id="{7835437D-1DD6-4F3B-AD05-728B21592CEE}"/>
               </a:ext>
             </a:extLst>
           </p:cNvPr>
@@ -11835,7 +11835,7 @@
           <p:cNvPr id="6" name="">
             <a:extLst xmlns:a="http://schemas.openxmlformats.org/drawingml/2006/main">
               <a:ext uri="{FF2B5EF4-FFF2-40B4-BE49-F238E27FC236}">
-                <a16:creationId xmlns:a16="http://schemas.microsoft.com/office/drawing/2014/main" id="{83E95252-005A-4755-B2D8-9C619DDACE91}"/>
+                <a16:creationId xmlns:a16="http://schemas.microsoft.com/office/drawing/2014/main" id="{FA85B8B2-B820-407C-8564-ACA459AF6E96}"/>
               </a:ext>
             </a:extLst>
           </p:cNvPr>
@@ -11899,7 +11899,7 @@
           <p:cNvPr id="7" name="">
             <a:extLst xmlns:a="http://schemas.openxmlformats.org/drawingml/2006/main">
               <a:ext uri="{FF2B5EF4-FFF2-40B4-BE49-F238E27FC236}">
-                <a16:creationId xmlns:a16="http://schemas.microsoft.com/office/drawing/2014/main" id="{0C75B6A9-AED3-4A10-BEE9-7D714FEDE401}"/>
+                <a16:creationId xmlns:a16="http://schemas.microsoft.com/office/drawing/2014/main" id="{EDF424A6-67FA-489B-B00D-5C783640212A}"/>
               </a:ext>
             </a:extLst>
           </p:cNvPr>
@@ -11986,7 +11986,7 @@
           <p:cNvPr id="8" name="">
             <a:extLst xmlns:a="http://schemas.openxmlformats.org/drawingml/2006/main">
               <a:ext uri="{FF2B5EF4-FFF2-40B4-BE49-F238E27FC236}">
-                <a16:creationId xmlns:a16="http://schemas.microsoft.com/office/drawing/2014/main" id="{73A3F6AE-FF3A-4B57-AEBE-C7404DEC7DBC}"/>
+                <a16:creationId xmlns:a16="http://schemas.microsoft.com/office/drawing/2014/main" id="{306A23CC-094B-4FDA-86F4-0DEAE206088D}"/>
               </a:ext>
             </a:extLst>
           </p:cNvPr>
@@ -12019,7 +12019,7 @@
           <p:cNvPr id="9" name="">
             <a:extLst xmlns:a="http://schemas.openxmlformats.org/drawingml/2006/main">
               <a:ext uri="{FF2B5EF4-FFF2-40B4-BE49-F238E27FC236}">
-                <a16:creationId xmlns:a16="http://schemas.microsoft.com/office/drawing/2014/main" id="{ADFE7F18-CB7A-4946-ACD1-29BD491FB094}"/>
+                <a16:creationId xmlns:a16="http://schemas.microsoft.com/office/drawing/2014/main" id="{1211E310-9949-485B-81A6-C0DEFB101BA1}"/>
               </a:ext>
             </a:extLst>
           </p:cNvPr>
@@ -12083,7 +12083,7 @@
           <p:cNvPr id="10" name="">
             <a:extLst xmlns:a="http://schemas.openxmlformats.org/drawingml/2006/main">
               <a:ext uri="{FF2B5EF4-FFF2-40B4-BE49-F238E27FC236}">
-                <a16:creationId xmlns:a16="http://schemas.microsoft.com/office/drawing/2014/main" id="{BA1BFDC5-1BF0-4C51-8C7E-DFBC647C96E7}"/>
+                <a16:creationId xmlns:a16="http://schemas.microsoft.com/office/drawing/2014/main" id="{B2BDF966-9135-4986-A82E-C2BB309F6CC5}"/>
               </a:ext>
             </a:extLst>
           </p:cNvPr>
@@ -12170,7 +12170,7 @@
           <p:cNvPr id="11" name="">
             <a:extLst xmlns:a="http://schemas.openxmlformats.org/drawingml/2006/main">
               <a:ext uri="{FF2B5EF4-FFF2-40B4-BE49-F238E27FC236}">
-                <a16:creationId xmlns:a16="http://schemas.microsoft.com/office/drawing/2014/main" id="{6E91CCB9-D9A5-4E81-9FF6-05AD308034DD}"/>
+                <a16:creationId xmlns:a16="http://schemas.microsoft.com/office/drawing/2014/main" id="{DBF02BFB-6E2C-4E53-B7BB-FA977A1A2C06}"/>
               </a:ext>
             </a:extLst>
           </p:cNvPr>
@@ -12203,7 +12203,7 @@
           <p:cNvPr id="12" name="">
             <a:extLst xmlns:a="http://schemas.openxmlformats.org/drawingml/2006/main">
               <a:ext uri="{FF2B5EF4-FFF2-40B4-BE49-F238E27FC236}">
-                <a16:creationId xmlns:a16="http://schemas.microsoft.com/office/drawing/2014/main" id="{681C3241-9A27-4928-88EF-5D7615C79B63}"/>
+                <a16:creationId xmlns:a16="http://schemas.microsoft.com/office/drawing/2014/main" id="{61177545-2CBB-43C9-A944-D1A716593A8F}"/>
               </a:ext>
             </a:extLst>
           </p:cNvPr>
@@ -12257,7 +12257,7 @@
                 <a:ea typeface="Malgun Gothic"/>
                 <a:cs typeface="Malgun Gothic"/>
               </a:rPr>
-              <a:t>3. Regex Safety Net</a:t>
+              <a:t>3. Rule Pack</a:t>
             </a:r>
           </a:p>
         </p:txBody>
@@ -12267,7 +12267,7 @@
           <p:cNvPr id="13" name="">
             <a:extLst xmlns:a="http://schemas.openxmlformats.org/drawingml/2006/main">
               <a:ext uri="{FF2B5EF4-FFF2-40B4-BE49-F238E27FC236}">
-                <a16:creationId xmlns:a16="http://schemas.microsoft.com/office/drawing/2014/main" id="{27C8E2F3-4D1A-4992-86B6-23E7C5AD4E6D}"/>
+                <a16:creationId xmlns:a16="http://schemas.microsoft.com/office/drawing/2014/main" id="{7784B437-FA31-4F52-BED2-87A80A85CC34}"/>
               </a:ext>
             </a:extLst>
           </p:cNvPr>
@@ -12321,7 +12321,7 @@
                 <a:ea typeface="Malgun Gothic"/>
                 <a:cs typeface="Malgun Gothic"/>
               </a:rPr>
-              <a:t>주민번호, 주소, 전화번호,</a:t>
+              <a:t>고유식별정보, 주소, 인증,</a:t>
             </a:r>
           </a:p>
           <a:p xmlns:a="http://schemas.openxmlformats.org/drawingml/2006/main">
@@ -12344,7 +12344,7 @@
                 <a:ea typeface="Malgun Gothic"/>
                 <a:cs typeface="Malgun Gothic"/>
               </a:rPr>
-              <a:t>API key, 계좌, 여권 등 보강</a:t>
+              <a:t>금융, 네트워크 정보 보강</a:t>
             </a:r>
           </a:p>
         </p:txBody>
@@ -12354,7 +12354,7 @@
           <p:cNvPr id="14" name="">
             <a:extLst xmlns:a="http://schemas.openxmlformats.org/drawingml/2006/main">
               <a:ext uri="{FF2B5EF4-FFF2-40B4-BE49-F238E27FC236}">
-                <a16:creationId xmlns:a16="http://schemas.microsoft.com/office/drawing/2014/main" id="{F54C2C2B-DB0B-4CED-8FC8-CA1057A98304}"/>
+                <a16:creationId xmlns:a16="http://schemas.microsoft.com/office/drawing/2014/main" id="{DFC02387-EE9A-4440-BA4A-6E2BFB53BD35}"/>
               </a:ext>
             </a:extLst>
           </p:cNvPr>
@@ -12387,7 +12387,7 @@
           <p:cNvPr id="15" name="">
             <a:extLst xmlns:a="http://schemas.openxmlformats.org/drawingml/2006/main">
               <a:ext uri="{FF2B5EF4-FFF2-40B4-BE49-F238E27FC236}">
-                <a16:creationId xmlns:a16="http://schemas.microsoft.com/office/drawing/2014/main" id="{B0CBC3BF-55A3-431A-8315-1B1BAE310C8E}"/>
+                <a16:creationId xmlns:a16="http://schemas.microsoft.com/office/drawing/2014/main" id="{992B616C-E042-43E8-B809-6224F205B96A}"/>
               </a:ext>
             </a:extLst>
           </p:cNvPr>
@@ -12451,7 +12451,7 @@
           <p:cNvPr id="16" name="">
             <a:extLst xmlns:a="http://schemas.openxmlformats.org/drawingml/2006/main">
               <a:ext uri="{FF2B5EF4-FFF2-40B4-BE49-F238E27FC236}">
-                <a16:creationId xmlns:a16="http://schemas.microsoft.com/office/drawing/2014/main" id="{93899BE5-DDED-458E-AD87-38FBF764947F}"/>
+                <a16:creationId xmlns:a16="http://schemas.microsoft.com/office/drawing/2014/main" id="{35CEC869-7439-49E0-B98A-188AD8EB41EB}"/>
               </a:ext>
             </a:extLst>
           </p:cNvPr>
@@ -12538,7 +12538,7 @@
           <p:cNvPr id="17" name="">
             <a:extLst xmlns:a="http://schemas.openxmlformats.org/drawingml/2006/main">
               <a:ext uri="{FF2B5EF4-FFF2-40B4-BE49-F238E27FC236}">
-                <a16:creationId xmlns:a16="http://schemas.microsoft.com/office/drawing/2014/main" id="{80ACE685-DA0A-46BF-9BC6-74CB1CA48761}"/>
+                <a16:creationId xmlns:a16="http://schemas.microsoft.com/office/drawing/2014/main" id="{F98DFAB2-129B-4ACB-82D4-39D424BFF621}"/>
               </a:ext>
             </a:extLst>
           </p:cNvPr>
@@ -12571,7 +12571,7 @@
           <p:cNvPr id="18" name="">
             <a:extLst xmlns:a="http://schemas.openxmlformats.org/drawingml/2006/main">
               <a:ext uri="{FF2B5EF4-FFF2-40B4-BE49-F238E27FC236}">
-                <a16:creationId xmlns:a16="http://schemas.microsoft.com/office/drawing/2014/main" id="{C17F8F86-7D7B-4A26-A320-5C2D182B07BF}"/>
+                <a16:creationId xmlns:a16="http://schemas.microsoft.com/office/drawing/2014/main" id="{77374B8F-5802-4ACD-87AD-62E2535D6D13}"/>
               </a:ext>
             </a:extLst>
           </p:cNvPr>
@@ -12635,7 +12635,7 @@
           <p:cNvPr id="19" name="">
             <a:extLst xmlns:a="http://schemas.openxmlformats.org/drawingml/2006/main">
               <a:ext uri="{FF2B5EF4-FFF2-40B4-BE49-F238E27FC236}">
-                <a16:creationId xmlns:a16="http://schemas.microsoft.com/office/drawing/2014/main" id="{F53199E3-03DA-4842-9D7C-15B4E6DE1D59}"/>
+                <a16:creationId xmlns:a16="http://schemas.microsoft.com/office/drawing/2014/main" id="{A4BE77B0-7D80-4792-A410-381136B3D8AA}"/>
               </a:ext>
             </a:extLst>
           </p:cNvPr>
@@ -12722,7 +12722,7 @@
           <p:cNvPr id="20" name="">
             <a:extLst xmlns:a="http://schemas.openxmlformats.org/drawingml/2006/main">
               <a:ext uri="{FF2B5EF4-FFF2-40B4-BE49-F238E27FC236}">
-                <a16:creationId xmlns:a16="http://schemas.microsoft.com/office/drawing/2014/main" id="{170987A1-A738-4095-8BC8-2A2D6850B0BE}"/>
+                <a16:creationId xmlns:a16="http://schemas.microsoft.com/office/drawing/2014/main" id="{862B0AB6-D7AE-46A6-AFA4-590C730012D7}"/>
               </a:ext>
             </a:extLst>
           </p:cNvPr>
@@ -12757,7 +12757,7 @@
           <p:cNvPr id="21" name="">
             <a:extLst xmlns:a="http://schemas.openxmlformats.org/drawingml/2006/main">
               <a:ext uri="{FF2B5EF4-FFF2-40B4-BE49-F238E27FC236}">
-                <a16:creationId xmlns:a16="http://schemas.microsoft.com/office/drawing/2014/main" id="{BAD6356F-7CF5-4A3F-8DEE-12AC18DF2D4C}"/>
+                <a16:creationId xmlns:a16="http://schemas.microsoft.com/office/drawing/2014/main" id="{C42C7464-AA5E-4482-B795-478DCEF7758C}"/>
               </a:ext>
             </a:extLst>
           </p:cNvPr>
@@ -12792,7 +12792,7 @@
           <p:cNvPr id="22" name="">
             <a:extLst xmlns:a="http://schemas.openxmlformats.org/drawingml/2006/main">
               <a:ext uri="{FF2B5EF4-FFF2-40B4-BE49-F238E27FC236}">
-                <a16:creationId xmlns:a16="http://schemas.microsoft.com/office/drawing/2014/main" id="{2E7E5351-1154-4299-AE0D-6A7C84919B74}"/>
+                <a16:creationId xmlns:a16="http://schemas.microsoft.com/office/drawing/2014/main" id="{30EA9734-1B27-48C1-BD0F-71891A4D574C}"/>
               </a:ext>
             </a:extLst>
           </p:cNvPr>
@@ -12827,7 +12827,7 @@
           <p:cNvPr id="23" name="">
             <a:extLst xmlns:a="http://schemas.openxmlformats.org/drawingml/2006/main">
               <a:ext uri="{FF2B5EF4-FFF2-40B4-BE49-F238E27FC236}">
-                <a16:creationId xmlns:a16="http://schemas.microsoft.com/office/drawing/2014/main" id="{442ECAAC-7B5E-4A8E-A415-76C8560A5D63}"/>
+                <a16:creationId xmlns:a16="http://schemas.microsoft.com/office/drawing/2014/main" id="{498E95F6-B445-424F-9570-915C4B1F6E79}"/>
               </a:ext>
             </a:extLst>
           </p:cNvPr>
@@ -12862,7 +12862,7 @@
           <p:cNvPr id="24" name="">
             <a:extLst xmlns:a="http://schemas.openxmlformats.org/drawingml/2006/main">
               <a:ext uri="{FF2B5EF4-FFF2-40B4-BE49-F238E27FC236}">
-                <a16:creationId xmlns:a16="http://schemas.microsoft.com/office/drawing/2014/main" id="{B98932F1-8226-42F2-981F-51681388EED2}"/>
+                <a16:creationId xmlns:a16="http://schemas.microsoft.com/office/drawing/2014/main" id="{D4D39E49-F914-4774-8207-729F3493F40B}"/>
               </a:ext>
             </a:extLst>
           </p:cNvPr>
@@ -12895,7 +12895,7 @@
           <p:cNvPr id="25" name="">
             <a:extLst xmlns:a="http://schemas.openxmlformats.org/drawingml/2006/main">
               <a:ext uri="{FF2B5EF4-FFF2-40B4-BE49-F238E27FC236}">
-                <a16:creationId xmlns:a16="http://schemas.microsoft.com/office/drawing/2014/main" id="{E18193E7-22F2-40C0-AF82-F5E2F70B1A97}"/>
+                <a16:creationId xmlns:a16="http://schemas.microsoft.com/office/drawing/2014/main" id="{BC7688C8-E715-4B4F-8B4C-016D870D552F}"/>
               </a:ext>
             </a:extLst>
           </p:cNvPr>
@@ -12959,19 +12959,19 @@
           <p:cNvPr id="26" name="">
             <a:extLst xmlns:a="http://schemas.openxmlformats.org/drawingml/2006/main">
               <a:ext uri="{FF2B5EF4-FFF2-40B4-BE49-F238E27FC236}">
-                <a16:creationId xmlns:a16="http://schemas.microsoft.com/office/drawing/2014/main" id="{11F6DFE1-00E0-4EE2-86CC-354C4630389D}"/>
-              </a:ext>
-            </a:extLst>
-          </p:cNvPr>
-          <p:cNvSpPr>
-            <a:spLocks xmlns:a="http://schemas.openxmlformats.org/drawingml/2006/main" noGrp="1"/>
-          </p:cNvSpPr>
-          <p:nvPr/>
-        </p:nvSpPr>
-        <p:spPr>
-          <a:xfrm xmlns:a="http://schemas.openxmlformats.org/drawingml/2006/main">
-            <a:off x="1409700" y="4743450"/>
-            <a:ext cx="8572500" cy="457200"/>
+                <a16:creationId xmlns:a16="http://schemas.microsoft.com/office/drawing/2014/main" id="{6CA1FB42-E236-4E0B-9DCE-D488B2BEC4C7}"/>
+              </a:ext>
+            </a:extLst>
+          </p:cNvPr>
+          <p:cNvSpPr>
+            <a:spLocks xmlns:a="http://schemas.openxmlformats.org/drawingml/2006/main" noGrp="1"/>
+          </p:cNvSpPr>
+          <p:nvPr/>
+        </p:nvSpPr>
+        <p:spPr>
+          <a:xfrm xmlns:a="http://schemas.openxmlformats.org/drawingml/2006/main">
+            <a:off x="1409700" y="4705350"/>
+            <a:ext cx="8572500" cy="552450"/>
           </a:xfrm>
           <a:prstGeom xmlns:a="http://schemas.openxmlformats.org/drawingml/2006/main" prst="rect">
             <a:avLst/>
@@ -13013,7 +13013,7 @@
                 <a:ea typeface="Malgun Gothic"/>
                 <a:cs typeface="Malgun Gothic"/>
               </a:rPr>
-              <a:t>scripts/pipeline.py: OPF 결과와 regex 결과 병합</a:t>
+              <a:t>scripts/pipeline.py: OPF 결과와 rule-pack 결과 병합</a:t>
             </a:r>
           </a:p>
           <a:p xmlns:a="http://schemas.openxmlformats.org/drawingml/2006/main">
@@ -13059,7 +13059,7 @@
                 <a:ea typeface="Malgun Gothic"/>
                 <a:cs typeface="Malgun Gothic"/>
               </a:rPr>
-              <a:t>scripts/demo.py: Gradio live demo</a:t>
+              <a:t>scripts/check_regex_rule_cases.py: rule-pack 회귀 테스트</a:t>
             </a:r>
           </a:p>
           <a:p xmlns:a="http://schemas.openxmlformats.org/drawingml/2006/main">
@@ -13092,7 +13092,7 @@
           <p:cNvPr id="27" name="">
             <a:extLst xmlns:a="http://schemas.openxmlformats.org/drawingml/2006/main">
               <a:ext uri="{FF2B5EF4-FFF2-40B4-BE49-F238E27FC236}">
-                <a16:creationId xmlns:a16="http://schemas.microsoft.com/office/drawing/2014/main" id="{FD05A3A2-344D-4039-AF5D-77BAC8E4D74E}"/>
+                <a16:creationId xmlns:a16="http://schemas.microsoft.com/office/drawing/2014/main" id="{63C953C0-28D1-4065-9AF0-AAECABC3C441}"/>
               </a:ext>
             </a:extLst>
           </p:cNvPr>
@@ -13156,7 +13156,7 @@
           <p:cNvPr id="28" name="">
             <a:extLst xmlns:a="http://schemas.openxmlformats.org/drawingml/2006/main">
               <a:ext uri="{FF2B5EF4-FFF2-40B4-BE49-F238E27FC236}">
-                <a16:creationId xmlns:a16="http://schemas.microsoft.com/office/drawing/2014/main" id="{CF6EAD83-DC90-406D-A580-F606B96893C3}"/>
+                <a16:creationId xmlns:a16="http://schemas.microsoft.com/office/drawing/2014/main" id="{3D594836-4D06-4966-BF0B-0D62EE639CB2}"/>
               </a:ext>
             </a:extLst>
           </p:cNvPr>
@@ -13218,7 +13218,7 @@
     </p:spTree>
     <p:extLst>
       <p:ext uri="{BB962C8B-B14F-4D97-AF65-F5344CB8AC3E}">
-        <p14:creationId xmlns:p14="http://schemas.microsoft.com/office/powerpoint/2010/main" val="1936210622"/>
+        <p14:creationId xmlns:p14="http://schemas.microsoft.com/office/powerpoint/2010/main" val="374539585"/>
       </p:ext>
     </p:extLst>
   </p:cSld>
@@ -13242,7 +13242,7 @@
           <p:cNvPr id="1" name="">
             <a:extLst xmlns:a="http://schemas.openxmlformats.org/drawingml/2006/main">
               <a:ext uri="{FF2B5EF4-FFF2-40B4-BE49-F238E27FC236}">
-                <a16:creationId xmlns:a16="http://schemas.microsoft.com/office/drawing/2014/main" id="{ECF589BC-B85B-42B6-97E0-8E4B2E123112}"/>
+                <a16:creationId xmlns:a16="http://schemas.microsoft.com/office/drawing/2014/main" id="{943B4109-97A6-4D63-A0CD-6471DA93A298}"/>
               </a:ext>
             </a:extLst>
           </p:cNvPr>
@@ -13277,7 +13277,7 @@
           <p:cNvPr id="2" name="">
             <a:extLst xmlns:a="http://schemas.openxmlformats.org/drawingml/2006/main">
               <a:ext uri="{FF2B5EF4-FFF2-40B4-BE49-F238E27FC236}">
-                <a16:creationId xmlns:a16="http://schemas.microsoft.com/office/drawing/2014/main" id="{AE051036-E160-4D0B-9758-DA0351213D9D}"/>
+                <a16:creationId xmlns:a16="http://schemas.microsoft.com/office/drawing/2014/main" id="{41A71F74-DE8D-43D7-B5B2-F56FCDA08810}"/>
               </a:ext>
             </a:extLst>
           </p:cNvPr>
@@ -13341,7 +13341,7 @@
           <p:cNvPr id="3" name="">
             <a:extLst xmlns:a="http://schemas.openxmlformats.org/drawingml/2006/main">
               <a:ext uri="{FF2B5EF4-FFF2-40B4-BE49-F238E27FC236}">
-                <a16:creationId xmlns:a16="http://schemas.microsoft.com/office/drawing/2014/main" id="{6540CAB4-9688-424D-8A94-0BC60B609510}"/>
+                <a16:creationId xmlns:a16="http://schemas.microsoft.com/office/drawing/2014/main" id="{E4FF57AB-C42E-4160-8D1D-256E8BDE3C20}"/>
               </a:ext>
             </a:extLst>
           </p:cNvPr>
@@ -13395,7 +13395,7 @@
                 <a:ea typeface="Malgun Gothic"/>
                 <a:cs typeface="Malgun Gothic"/>
               </a:rPr>
-              <a:t>정규식은 단순 보정이 아니라, 모델의 실패 영역을 맡는 안전망입니다</a:t>
+              <a:t>한국형 Privacy Rule Pack은 모델의 실패 영역을 맡는 안전망입니다</a:t>
             </a:r>
           </a:p>
         </p:txBody>
@@ -13405,7 +13405,7 @@
           <p:cNvPr id="4" name="">
             <a:extLst xmlns:a="http://schemas.openxmlformats.org/drawingml/2006/main">
               <a:ext uri="{FF2B5EF4-FFF2-40B4-BE49-F238E27FC236}">
-                <a16:creationId xmlns:a16="http://schemas.microsoft.com/office/drawing/2014/main" id="{36B8F0D0-77EB-48A7-9ECD-3CDADBBFFEC7}"/>
+                <a16:creationId xmlns:a16="http://schemas.microsoft.com/office/drawing/2014/main" id="{675BE5B6-403D-4FE6-A6C5-513394E6A057}"/>
               </a:ext>
             </a:extLst>
           </p:cNvPr>
@@ -13459,7 +13459,7 @@
                 <a:ea typeface="Malgun Gothic"/>
                 <a:cs typeface="Malgun Gothic"/>
               </a:rPr>
-              <a:t>최종 KPF는 span 탐지, 오탐 억제, 병합 우선순위를 분리해 안정성을 확보했습니다.</a:t>
+              <a:t>공식 개인정보 범주를 기준으로 탐지 범위를 넓히고, hard-negative 문맥은 의도적으로 억제했습니다.</a:t>
             </a:r>
           </a:p>
         </p:txBody>
@@ -13469,7 +13469,7 @@
           <p:cNvPr id="5" name="">
             <a:extLst xmlns:a="http://schemas.openxmlformats.org/drawingml/2006/main">
               <a:ext uri="{FF2B5EF4-FFF2-40B4-BE49-F238E27FC236}">
-                <a16:creationId xmlns:a16="http://schemas.microsoft.com/office/drawing/2014/main" id="{3B6CFB67-A684-4A22-AD9B-E05BC69662A4}"/>
+                <a16:creationId xmlns:a16="http://schemas.microsoft.com/office/drawing/2014/main" id="{5144C60C-A3E6-4C8A-B8C1-B15D0F82D179}"/>
               </a:ext>
             </a:extLst>
           </p:cNvPr>
@@ -13502,7 +13502,7 @@
           <p:cNvPr id="6" name="">
             <a:extLst xmlns:a="http://schemas.openxmlformats.org/drawingml/2006/main">
               <a:ext uri="{FF2B5EF4-FFF2-40B4-BE49-F238E27FC236}">
-                <a16:creationId xmlns:a16="http://schemas.microsoft.com/office/drawing/2014/main" id="{D92A4F5A-0543-4653-833B-1BFE32D36B40}"/>
+                <a16:creationId xmlns:a16="http://schemas.microsoft.com/office/drawing/2014/main" id="{4CE84404-3848-4581-B1BE-5510235E1EF5}"/>
               </a:ext>
             </a:extLst>
           </p:cNvPr>
@@ -13535,7 +13535,7 @@
           <p:cNvPr id="7" name="">
             <a:extLst xmlns:a="http://schemas.openxmlformats.org/drawingml/2006/main">
               <a:ext uri="{FF2B5EF4-FFF2-40B4-BE49-F238E27FC236}">
-                <a16:creationId xmlns:a16="http://schemas.microsoft.com/office/drawing/2014/main" id="{80BE53A3-E601-476A-9233-40461B6EEC97}"/>
+                <a16:creationId xmlns:a16="http://schemas.microsoft.com/office/drawing/2014/main" id="{363CE1CD-6084-4E60-B8E3-2DB575C8CE21}"/>
               </a:ext>
             </a:extLst>
           </p:cNvPr>
@@ -13599,7 +13599,7 @@
           <p:cNvPr id="8" name="">
             <a:extLst xmlns:a="http://schemas.openxmlformats.org/drawingml/2006/main">
               <a:ext uri="{FF2B5EF4-FFF2-40B4-BE49-F238E27FC236}">
-                <a16:creationId xmlns:a16="http://schemas.microsoft.com/office/drawing/2014/main" id="{9509F415-2FDA-4A58-BE90-75D19F4E3DCE}"/>
+                <a16:creationId xmlns:a16="http://schemas.microsoft.com/office/drawing/2014/main" id="{AE864B9E-95FD-4D37-869F-49AF4DADEB4D}"/>
               </a:ext>
             </a:extLst>
           </p:cNvPr>
@@ -13634,7 +13634,7 @@
           <p:cNvPr id="9" name="">
             <a:extLst xmlns:a="http://schemas.openxmlformats.org/drawingml/2006/main">
               <a:ext uri="{FF2B5EF4-FFF2-40B4-BE49-F238E27FC236}">
-                <a16:creationId xmlns:a16="http://schemas.microsoft.com/office/drawing/2014/main" id="{A1351F7C-B0FA-488C-88AE-A1162F42E8D1}"/>
+                <a16:creationId xmlns:a16="http://schemas.microsoft.com/office/drawing/2014/main" id="{07C37583-DBCF-4A19-92BF-E46F9BEA2CC5}"/>
               </a:ext>
             </a:extLst>
           </p:cNvPr>
@@ -13688,7 +13688,7 @@
                 <a:ea typeface="Malgun Gothic"/>
                 <a:cs typeface="Malgun Gothic"/>
               </a:rPr>
-              <a:t>주민/외국인등록번호</a:t>
+              <a:t>고유식별정보</a:t>
             </a:r>
           </a:p>
         </p:txBody>
@@ -13698,7 +13698,7 @@
           <p:cNvPr id="10" name="">
             <a:extLst xmlns:a="http://schemas.openxmlformats.org/drawingml/2006/main">
               <a:ext uri="{FF2B5EF4-FFF2-40B4-BE49-F238E27FC236}">
-                <a16:creationId xmlns:a16="http://schemas.microsoft.com/office/drawing/2014/main" id="{14FBBBFC-48E5-4452-B995-A14164D48796}"/>
+                <a16:creationId xmlns:a16="http://schemas.microsoft.com/office/drawing/2014/main" id="{583DD061-10A1-4093-954A-BE3AD06229A4}"/>
               </a:ext>
             </a:extLst>
           </p:cNvPr>
@@ -13733,7 +13733,7 @@
           <p:cNvPr id="11" name="">
             <a:extLst xmlns:a="http://schemas.openxmlformats.org/drawingml/2006/main">
               <a:ext uri="{FF2B5EF4-FFF2-40B4-BE49-F238E27FC236}">
-                <a16:creationId xmlns:a16="http://schemas.microsoft.com/office/drawing/2014/main" id="{AFA4739B-52FB-4E75-B2AD-F121EC8B3C75}"/>
+                <a16:creationId xmlns:a16="http://schemas.microsoft.com/office/drawing/2014/main" id="{057D6D13-9D56-4406-9F87-D8279D191C40}"/>
               </a:ext>
             </a:extLst>
           </p:cNvPr>
@@ -13787,7 +13787,7 @@
                 <a:ea typeface="Malgun Gothic"/>
                 <a:cs typeface="Malgun Gothic"/>
               </a:rPr>
-              <a:t>사업자/법인번호</a:t>
+              <a:t>주소·전화·이메일</a:t>
             </a:r>
           </a:p>
         </p:txBody>
@@ -13797,7 +13797,7 @@
           <p:cNvPr id="12" name="">
             <a:extLst xmlns:a="http://schemas.openxmlformats.org/drawingml/2006/main">
               <a:ext uri="{FF2B5EF4-FFF2-40B4-BE49-F238E27FC236}">
-                <a16:creationId xmlns:a16="http://schemas.microsoft.com/office/drawing/2014/main" id="{F2345A0C-E4DE-461F-9E84-7BC2BD288802}"/>
+                <a16:creationId xmlns:a16="http://schemas.microsoft.com/office/drawing/2014/main" id="{16FCA562-20CA-4728-B9E2-A4C919ACED81}"/>
               </a:ext>
             </a:extLst>
           </p:cNvPr>
@@ -13832,7 +13832,7 @@
           <p:cNvPr id="13" name="">
             <a:extLst xmlns:a="http://schemas.openxmlformats.org/drawingml/2006/main">
               <a:ext uri="{FF2B5EF4-FFF2-40B4-BE49-F238E27FC236}">
-                <a16:creationId xmlns:a16="http://schemas.microsoft.com/office/drawing/2014/main" id="{22187D6F-1A83-40ED-80F5-443632582184}"/>
+                <a16:creationId xmlns:a16="http://schemas.microsoft.com/office/drawing/2014/main" id="{B26E96DA-A677-4DCC-B783-8B03F3974D7E}"/>
               </a:ext>
             </a:extLst>
           </p:cNvPr>
@@ -13886,7 +13886,7 @@
                 <a:ea typeface="Malgun Gothic"/>
                 <a:cs typeface="Malgun Gothic"/>
               </a:rPr>
-              <a:t>전화번호/계좌/카드</a:t>
+              <a:t>계좌·카드·CVC·OTP</a:t>
             </a:r>
           </a:p>
         </p:txBody>
@@ -13896,7 +13896,7 @@
           <p:cNvPr id="14" name="">
             <a:extLst xmlns:a="http://schemas.openxmlformats.org/drawingml/2006/main">
               <a:ext uri="{FF2B5EF4-FFF2-40B4-BE49-F238E27FC236}">
-                <a16:creationId xmlns:a16="http://schemas.microsoft.com/office/drawing/2014/main" id="{F6A37242-AB7C-4BAE-9842-847AF9BBA1C6}"/>
+                <a16:creationId xmlns:a16="http://schemas.microsoft.com/office/drawing/2014/main" id="{53EED9FC-104E-4AAC-BC61-D6544B645873}"/>
               </a:ext>
             </a:extLst>
           </p:cNvPr>
@@ -13931,7 +13931,7 @@
           <p:cNvPr id="15" name="">
             <a:extLst xmlns:a="http://schemas.openxmlformats.org/drawingml/2006/main">
               <a:ext uri="{FF2B5EF4-FFF2-40B4-BE49-F238E27FC236}">
-                <a16:creationId xmlns:a16="http://schemas.microsoft.com/office/drawing/2014/main" id="{CD0592FB-3F0F-4C7D-B299-8291540F0D7C}"/>
+                <a16:creationId xmlns:a16="http://schemas.microsoft.com/office/drawing/2014/main" id="{0D417760-F535-4445-BACD-5A63CA540191}"/>
               </a:ext>
             </a:extLst>
           </p:cNvPr>
@@ -13985,7 +13985,7 @@
                 <a:ea typeface="Malgun Gothic"/>
                 <a:cs typeface="Malgun Gothic"/>
               </a:rPr>
-              <a:t>도로명·지번 주소</a:t>
+              <a:t>학번·사번·회원번호</a:t>
             </a:r>
           </a:p>
         </p:txBody>
@@ -13995,7 +13995,7 @@
           <p:cNvPr id="16" name="">
             <a:extLst xmlns:a="http://schemas.openxmlformats.org/drawingml/2006/main">
               <a:ext uri="{FF2B5EF4-FFF2-40B4-BE49-F238E27FC236}">
-                <a16:creationId xmlns:a16="http://schemas.microsoft.com/office/drawing/2014/main" id="{A292CBBF-A44D-4C06-B191-5A505F4B275D}"/>
+                <a16:creationId xmlns:a16="http://schemas.microsoft.com/office/drawing/2014/main" id="{1A7FBFFF-95FD-4A72-B3AE-C2794255CD42}"/>
               </a:ext>
             </a:extLst>
           </p:cNvPr>
@@ -14030,7 +14030,7 @@
           <p:cNvPr id="17" name="">
             <a:extLst xmlns:a="http://schemas.openxmlformats.org/drawingml/2006/main">
               <a:ext uri="{FF2B5EF4-FFF2-40B4-BE49-F238E27FC236}">
-                <a16:creationId xmlns:a16="http://schemas.microsoft.com/office/drawing/2014/main" id="{FE23C5E6-0B34-42A8-8722-AC4A7AA85779}"/>
+                <a16:creationId xmlns:a16="http://schemas.microsoft.com/office/drawing/2014/main" id="{4299C1FD-E82B-4000-B200-797DF185B6FA}"/>
               </a:ext>
             </a:extLst>
           </p:cNvPr>
@@ -14084,7 +14084,7 @@
                 <a:ea typeface="Malgun Gothic"/>
                 <a:cs typeface="Malgun Gothic"/>
               </a:rPr>
-              <a:t>API key·Slack token</a:t>
+              <a:t>IP·MAC·GPS·URL</a:t>
             </a:r>
           </a:p>
         </p:txBody>
@@ -14094,7 +14094,7 @@
           <p:cNvPr id="18" name="">
             <a:extLst xmlns:a="http://schemas.openxmlformats.org/drawingml/2006/main">
               <a:ext uri="{FF2B5EF4-FFF2-40B4-BE49-F238E27FC236}">
-                <a16:creationId xmlns:a16="http://schemas.microsoft.com/office/drawing/2014/main" id="{4E1C7ED3-ED1D-4266-9E55-8D8F55EC73A0}"/>
+                <a16:creationId xmlns:a16="http://schemas.microsoft.com/office/drawing/2014/main" id="{D05B519E-BB4F-4494-A634-941A956B7B7E}"/>
               </a:ext>
             </a:extLst>
           </p:cNvPr>
@@ -14127,7 +14127,7 @@
           <p:cNvPr id="19" name="">
             <a:extLst xmlns:a="http://schemas.openxmlformats.org/drawingml/2006/main">
               <a:ext uri="{FF2B5EF4-FFF2-40B4-BE49-F238E27FC236}">
-                <a16:creationId xmlns:a16="http://schemas.microsoft.com/office/drawing/2014/main" id="{D713AD18-96F9-4217-B5F3-EFC654161E95}"/>
+                <a16:creationId xmlns:a16="http://schemas.microsoft.com/office/drawing/2014/main" id="{6BFB0715-0B9F-4904-96D6-CD43C5FFBEF0}"/>
               </a:ext>
             </a:extLst>
           </p:cNvPr>
@@ -14160,7 +14160,7 @@
           <p:cNvPr id="20" name="">
             <a:extLst xmlns:a="http://schemas.openxmlformats.org/drawingml/2006/main">
               <a:ext uri="{FF2B5EF4-FFF2-40B4-BE49-F238E27FC236}">
-                <a16:creationId xmlns:a16="http://schemas.microsoft.com/office/drawing/2014/main" id="{04160AA8-3A96-438A-89A7-FB427484467E}"/>
+                <a16:creationId xmlns:a16="http://schemas.microsoft.com/office/drawing/2014/main" id="{08189134-2D7B-4E88-9128-A2BBDD874BE0}"/>
               </a:ext>
             </a:extLst>
           </p:cNvPr>
@@ -14224,7 +14224,7 @@
           <p:cNvPr id="21" name="">
             <a:extLst xmlns:a="http://schemas.openxmlformats.org/drawingml/2006/main">
               <a:ext uri="{FF2B5EF4-FFF2-40B4-BE49-F238E27FC236}">
-                <a16:creationId xmlns:a16="http://schemas.microsoft.com/office/drawing/2014/main" id="{19B5D518-616D-4B74-ABC7-2BC7C96C976A}"/>
+                <a16:creationId xmlns:a16="http://schemas.microsoft.com/office/drawing/2014/main" id="{011BD7DA-C103-42EF-B42E-8D65E6D8BEFF}"/>
               </a:ext>
             </a:extLst>
           </p:cNvPr>
@@ -14259,7 +14259,7 @@
           <p:cNvPr id="22" name="">
             <a:extLst xmlns:a="http://schemas.openxmlformats.org/drawingml/2006/main">
               <a:ext uri="{FF2B5EF4-FFF2-40B4-BE49-F238E27FC236}">
-                <a16:creationId xmlns:a16="http://schemas.microsoft.com/office/drawing/2014/main" id="{41EBDC4A-7852-4BB8-8E9F-A96DB0607D45}"/>
+                <a16:creationId xmlns:a16="http://schemas.microsoft.com/office/drawing/2014/main" id="{620BD913-A25E-477C-B77F-5809BBE51DCD}"/>
               </a:ext>
             </a:extLst>
           </p:cNvPr>
@@ -14313,7 +14313,7 @@
                 <a:ea typeface="Malgun Gothic"/>
                 <a:cs typeface="Malgun Gothic"/>
               </a:rPr>
-              <a:t>예시, 샘플, 더미</a:t>
+              <a:t>example/not-real</a:t>
             </a:r>
           </a:p>
         </p:txBody>
@@ -14323,7 +14323,7 @@
           <p:cNvPr id="23" name="">
             <a:extLst xmlns:a="http://schemas.openxmlformats.org/drawingml/2006/main">
               <a:ext uri="{FF2B5EF4-FFF2-40B4-BE49-F238E27FC236}">
-                <a16:creationId xmlns:a16="http://schemas.microsoft.com/office/drawing/2014/main" id="{D0455A39-FF28-4A54-B7BA-86BC37358ACC}"/>
+                <a16:creationId xmlns:a16="http://schemas.microsoft.com/office/drawing/2014/main" id="{A31FD77F-4EA1-4F6A-9FD3-ED51D68E6B03}"/>
               </a:ext>
             </a:extLst>
           </p:cNvPr>
@@ -14358,7 +14358,7 @@
           <p:cNvPr id="24" name="">
             <a:extLst xmlns:a="http://schemas.openxmlformats.org/drawingml/2006/main">
               <a:ext uri="{FF2B5EF4-FFF2-40B4-BE49-F238E27FC236}">
-                <a16:creationId xmlns:a16="http://schemas.microsoft.com/office/drawing/2014/main" id="{E1FF6908-3C01-43A9-81C5-650468EF7B2E}"/>
+                <a16:creationId xmlns:a16="http://schemas.microsoft.com/office/drawing/2014/main" id="{62AE96B5-8C71-4B88-B695-6429F1E43F1D}"/>
               </a:ext>
             </a:extLst>
           </p:cNvPr>
@@ -14412,7 +14412,7 @@
                 <a:ea typeface="Malgun Gothic"/>
                 <a:cs typeface="Malgun Gothic"/>
               </a:rPr>
-              <a:t>상품코드, 모델명</a:t>
+              <a:t>상품코드·모델명</a:t>
             </a:r>
           </a:p>
         </p:txBody>
@@ -14422,7 +14422,7 @@
           <p:cNvPr id="25" name="">
             <a:extLst xmlns:a="http://schemas.openxmlformats.org/drawingml/2006/main">
               <a:ext uri="{FF2B5EF4-FFF2-40B4-BE49-F238E27FC236}">
-                <a16:creationId xmlns:a16="http://schemas.microsoft.com/office/drawing/2014/main" id="{C8300942-0A25-4DD9-A65D-93614480C714}"/>
+                <a16:creationId xmlns:a16="http://schemas.microsoft.com/office/drawing/2014/main" id="{71592000-B3BD-40F5-98C8-0829B31C4AEF}"/>
               </a:ext>
             </a:extLst>
           </p:cNvPr>
@@ -14457,7 +14457,7 @@
           <p:cNvPr id="26" name="">
             <a:extLst xmlns:a="http://schemas.openxmlformats.org/drawingml/2006/main">
               <a:ext uri="{FF2B5EF4-FFF2-40B4-BE49-F238E27FC236}">
-                <a16:creationId xmlns:a16="http://schemas.microsoft.com/office/drawing/2014/main" id="{6ED3730B-B697-4220-B8CF-5BE77C6456ED}"/>
+                <a16:creationId xmlns:a16="http://schemas.microsoft.com/office/drawing/2014/main" id="{25911589-9C9F-42ED-980D-99E7F623709D}"/>
               </a:ext>
             </a:extLst>
           </p:cNvPr>
@@ -14511,7 +14511,7 @@
                 <a:ea typeface="Malgun Gothic"/>
                 <a:cs typeface="Malgun Gothic"/>
               </a:rPr>
-              <a:t>주문번호, 버전번호</a:t>
+              <a:t>주문번호·문서 버전</a:t>
             </a:r>
           </a:p>
         </p:txBody>
@@ -14521,7 +14521,7 @@
           <p:cNvPr id="27" name="">
             <a:extLst xmlns:a="http://schemas.openxmlformats.org/drawingml/2006/main">
               <a:ext uri="{FF2B5EF4-FFF2-40B4-BE49-F238E27FC236}">
-                <a16:creationId xmlns:a16="http://schemas.microsoft.com/office/drawing/2014/main" id="{50FE796A-78A9-41C7-B23F-313B6B164E1E}"/>
+                <a16:creationId xmlns:a16="http://schemas.microsoft.com/office/drawing/2014/main" id="{D8B1174E-9324-4E77-954B-07296E64A775}"/>
               </a:ext>
             </a:extLst>
           </p:cNvPr>
@@ -14556,7 +14556,7 @@
           <p:cNvPr id="28" name="">
             <a:extLst xmlns:a="http://schemas.openxmlformats.org/drawingml/2006/main">
               <a:ext uri="{FF2B5EF4-FFF2-40B4-BE49-F238E27FC236}">
-                <a16:creationId xmlns:a16="http://schemas.microsoft.com/office/drawing/2014/main" id="{AA37072A-C4DA-4EAA-BAB0-CCDF48403774}"/>
+                <a16:creationId xmlns:a16="http://schemas.microsoft.com/office/drawing/2014/main" id="{093B5035-C340-4EA6-A817-31BDE4A9F70F}"/>
               </a:ext>
             </a:extLst>
           </p:cNvPr>
@@ -14610,7 +14610,7 @@
                 <a:ea typeface="Malgun Gothic"/>
                 <a:cs typeface="Malgun Gothic"/>
               </a:rPr>
-              <a:t>placeholder</a:t>
+              <a:t>placeholder·mock</a:t>
             </a:r>
           </a:p>
         </p:txBody>
@@ -14620,7 +14620,7 @@
           <p:cNvPr id="29" name="">
             <a:extLst xmlns:a="http://schemas.openxmlformats.org/drawingml/2006/main">
               <a:ext uri="{FF2B5EF4-FFF2-40B4-BE49-F238E27FC236}">
-                <a16:creationId xmlns:a16="http://schemas.microsoft.com/office/drawing/2014/main" id="{0962BEA2-058A-4984-BE88-128E767DA0FC}"/>
+                <a16:creationId xmlns:a16="http://schemas.microsoft.com/office/drawing/2014/main" id="{019606D1-474E-4C5E-8246-B11EDB22C109}"/>
               </a:ext>
             </a:extLst>
           </p:cNvPr>
@@ -14655,7 +14655,7 @@
           <p:cNvPr id="30" name="">
             <a:extLst xmlns:a="http://schemas.openxmlformats.org/drawingml/2006/main">
               <a:ext uri="{FF2B5EF4-FFF2-40B4-BE49-F238E27FC236}">
-                <a16:creationId xmlns:a16="http://schemas.microsoft.com/office/drawing/2014/main" id="{1DED54DB-8CF8-4C6F-B103-F12C740DECA9}"/>
+                <a16:creationId xmlns:a16="http://schemas.microsoft.com/office/drawing/2014/main" id="{DE47FA4B-278D-48D1-8605-841626EC0282}"/>
               </a:ext>
             </a:extLst>
           </p:cNvPr>
@@ -14709,7 +14709,7 @@
                 <a:ea typeface="Malgun Gothic"/>
                 <a:cs typeface="Malgun Gothic"/>
               </a:rPr>
-              <a:t>문서 템플릿</a:t>
+              <a:t>hard-negative 100</a:t>
             </a:r>
           </a:p>
         </p:txBody>
@@ -14719,7 +14719,7 @@
           <p:cNvPr id="31" name="">
             <a:extLst xmlns:a="http://schemas.openxmlformats.org/drawingml/2006/main">
               <a:ext uri="{FF2B5EF4-FFF2-40B4-BE49-F238E27FC236}">
-                <a16:creationId xmlns:a16="http://schemas.microsoft.com/office/drawing/2014/main" id="{BB19D184-6BA0-4D18-A8A3-22048265150C}"/>
+                <a16:creationId xmlns:a16="http://schemas.microsoft.com/office/drawing/2014/main" id="{C62384BC-0366-45FF-A973-5507A76C6B40}"/>
               </a:ext>
             </a:extLst>
           </p:cNvPr>
@@ -14752,7 +14752,7 @@
           <p:cNvPr id="32" name="">
             <a:extLst xmlns:a="http://schemas.openxmlformats.org/drawingml/2006/main">
               <a:ext uri="{FF2B5EF4-FFF2-40B4-BE49-F238E27FC236}">
-                <a16:creationId xmlns:a16="http://schemas.microsoft.com/office/drawing/2014/main" id="{537E5125-E193-4CA8-8C38-1CBCFFC57C08}"/>
+                <a16:creationId xmlns:a16="http://schemas.microsoft.com/office/drawing/2014/main" id="{8E0BAE31-F052-4424-B2F4-88CB762CBC93}"/>
               </a:ext>
             </a:extLst>
           </p:cNvPr>
@@ -14785,7 +14785,7 @@
           <p:cNvPr id="33" name="">
             <a:extLst xmlns:a="http://schemas.openxmlformats.org/drawingml/2006/main">
               <a:ext uri="{FF2B5EF4-FFF2-40B4-BE49-F238E27FC236}">
-                <a16:creationId xmlns:a16="http://schemas.microsoft.com/office/drawing/2014/main" id="{C355437D-1AAA-462D-BEBF-543B77330DC4}"/>
+                <a16:creationId xmlns:a16="http://schemas.microsoft.com/office/drawing/2014/main" id="{70817AA5-C8E0-4ECD-B2D7-37B4C6EB2DA2}"/>
               </a:ext>
             </a:extLst>
           </p:cNvPr>
@@ -14839,7 +14839,7 @@
                 <a:ea typeface="Malgun Gothic"/>
                 <a:cs typeface="Malgun Gothic"/>
               </a:rPr>
-              <a:t>병합 정책</a:t>
+              <a:t>검증 정책</a:t>
             </a:r>
           </a:p>
         </p:txBody>
@@ -14849,7 +14849,7 @@
           <p:cNvPr id="34" name="">
             <a:extLst xmlns:a="http://schemas.openxmlformats.org/drawingml/2006/main">
               <a:ext uri="{FF2B5EF4-FFF2-40B4-BE49-F238E27FC236}">
-                <a16:creationId xmlns:a16="http://schemas.microsoft.com/office/drawing/2014/main" id="{5BAE7925-34A4-49D4-9598-0F679380885D}"/>
+                <a16:creationId xmlns:a16="http://schemas.microsoft.com/office/drawing/2014/main" id="{5147327A-9620-482E-AEAE-FD81447F7EEA}"/>
               </a:ext>
             </a:extLst>
           </p:cNvPr>
@@ -14884,7 +14884,7 @@
           <p:cNvPr id="35" name="">
             <a:extLst xmlns:a="http://schemas.openxmlformats.org/drawingml/2006/main">
               <a:ext uri="{FF2B5EF4-FFF2-40B4-BE49-F238E27FC236}">
-                <a16:creationId xmlns:a16="http://schemas.microsoft.com/office/drawing/2014/main" id="{6E37BF1A-B343-40D6-B7F7-588733F93472}"/>
+                <a16:creationId xmlns:a16="http://schemas.microsoft.com/office/drawing/2014/main" id="{7E1D97D5-16A2-416F-890C-A09F52DF2B54}"/>
               </a:ext>
             </a:extLst>
           </p:cNvPr>
@@ -14948,7 +14948,7 @@
           <p:cNvPr id="36" name="">
             <a:extLst xmlns:a="http://schemas.openxmlformats.org/drawingml/2006/main">
               <a:ext uri="{FF2B5EF4-FFF2-40B4-BE49-F238E27FC236}">
-                <a16:creationId xmlns:a16="http://schemas.microsoft.com/office/drawing/2014/main" id="{2C7587B3-7A51-4D63-A4CE-F2BC3E3E860F}"/>
+                <a16:creationId xmlns:a16="http://schemas.microsoft.com/office/drawing/2014/main" id="{6ACAF063-D5B5-406A-B47A-81880E737D74}"/>
               </a:ext>
             </a:extLst>
           </p:cNvPr>
@@ -14983,7 +14983,7 @@
           <p:cNvPr id="37" name="">
             <a:extLst xmlns:a="http://schemas.openxmlformats.org/drawingml/2006/main">
               <a:ext uri="{FF2B5EF4-FFF2-40B4-BE49-F238E27FC236}">
-                <a16:creationId xmlns:a16="http://schemas.microsoft.com/office/drawing/2014/main" id="{0680A922-49BE-461C-9026-5373E7586929}"/>
+                <a16:creationId xmlns:a16="http://schemas.microsoft.com/office/drawing/2014/main" id="{07DE580A-15E0-4B59-9992-8F16ED9E71BE}"/>
               </a:ext>
             </a:extLst>
           </p:cNvPr>
@@ -15047,7 +15047,7 @@
           <p:cNvPr id="38" name="">
             <a:extLst xmlns:a="http://schemas.openxmlformats.org/drawingml/2006/main">
               <a:ext uri="{FF2B5EF4-FFF2-40B4-BE49-F238E27FC236}">
-                <a16:creationId xmlns:a16="http://schemas.microsoft.com/office/drawing/2014/main" id="{9A96EFA1-3CDD-4E7A-8884-92F1125307A4}"/>
+                <a16:creationId xmlns:a16="http://schemas.microsoft.com/office/drawing/2014/main" id="{0E66C1E5-062A-4E87-8C78-9DF5EDDBD9C3}"/>
               </a:ext>
             </a:extLst>
           </p:cNvPr>
@@ -15082,7 +15082,7 @@
           <p:cNvPr id="39" name="">
             <a:extLst xmlns:a="http://schemas.openxmlformats.org/drawingml/2006/main">
               <a:ext uri="{FF2B5EF4-FFF2-40B4-BE49-F238E27FC236}">
-                <a16:creationId xmlns:a16="http://schemas.microsoft.com/office/drawing/2014/main" id="{AD62205C-A197-411C-B108-30CD278F2395}"/>
+                <a16:creationId xmlns:a16="http://schemas.microsoft.com/office/drawing/2014/main" id="{3C715DEF-3480-43F3-9025-6047F463CCA1}"/>
               </a:ext>
             </a:extLst>
           </p:cNvPr>
@@ -15136,7 +15136,7 @@
                 <a:ea typeface="Malgun Gothic"/>
                 <a:cs typeface="Malgun Gothic"/>
               </a:rPr>
-              <a:t>주소 끝 조사 trim</a:t>
+              <a:t>Eval300 replay</a:t>
             </a:r>
           </a:p>
         </p:txBody>
@@ -15146,7 +15146,7 @@
           <p:cNvPr id="40" name="">
             <a:extLst xmlns:a="http://schemas.openxmlformats.org/drawingml/2006/main">
               <a:ext uri="{FF2B5EF4-FFF2-40B4-BE49-F238E27FC236}">
-                <a16:creationId xmlns:a16="http://schemas.microsoft.com/office/drawing/2014/main" id="{52AD5167-517C-4F02-BF3D-EDA66CD32888}"/>
+                <a16:creationId xmlns:a16="http://schemas.microsoft.com/office/drawing/2014/main" id="{E4D8D64D-D62E-47E1-918A-73E456B22163}"/>
               </a:ext>
             </a:extLst>
           </p:cNvPr>
@@ -15181,7 +15181,7 @@
           <p:cNvPr id="41" name="">
             <a:extLst xmlns:a="http://schemas.openxmlformats.org/drawingml/2006/main">
               <a:ext uri="{FF2B5EF4-FFF2-40B4-BE49-F238E27FC236}">
-                <a16:creationId xmlns:a16="http://schemas.microsoft.com/office/drawing/2014/main" id="{21F6609E-25D0-4EBD-AE90-0FEC417D92FA}"/>
+                <a16:creationId xmlns:a16="http://schemas.microsoft.com/office/drawing/2014/main" id="{957400A4-196D-44F5-AE72-CFD1FA78B9FC}"/>
               </a:ext>
             </a:extLst>
           </p:cNvPr>
@@ -15235,7 +15235,7 @@
                 <a:ea typeface="Malgun Gothic"/>
                 <a:cs typeface="Malgun Gothic"/>
               </a:rPr>
-              <a:t>typed placeholder</a:t>
+              <a:t>hard-negative gate</a:t>
             </a:r>
           </a:p>
         </p:txBody>
@@ -15245,7 +15245,7 @@
           <p:cNvPr id="42" name="">
             <a:extLst xmlns:a="http://schemas.openxmlformats.org/drawingml/2006/main">
               <a:ext uri="{FF2B5EF4-FFF2-40B4-BE49-F238E27FC236}">
-                <a16:creationId xmlns:a16="http://schemas.microsoft.com/office/drawing/2014/main" id="{635D048C-DA57-444A-AF62-DC7D220A0975}"/>
+                <a16:creationId xmlns:a16="http://schemas.microsoft.com/office/drawing/2014/main" id="{44AD9B4F-20E3-41EE-8A2E-408CD899106B}"/>
               </a:ext>
             </a:extLst>
           </p:cNvPr>
@@ -15280,7 +15280,7 @@
           <p:cNvPr id="43" name="">
             <a:extLst xmlns:a="http://schemas.openxmlformats.org/drawingml/2006/main">
               <a:ext uri="{FF2B5EF4-FFF2-40B4-BE49-F238E27FC236}">
-                <a16:creationId xmlns:a16="http://schemas.microsoft.com/office/drawing/2014/main" id="{BC2E954C-0B5E-4B53-ADF8-62B4166B6BE9}"/>
+                <a16:creationId xmlns:a16="http://schemas.microsoft.com/office/drawing/2014/main" id="{C0C38F4A-196E-41EC-B77B-EA0A86C8B9CE}"/>
               </a:ext>
             </a:extLst>
           </p:cNvPr>
@@ -15334,7 +15334,7 @@
                 <a:ea typeface="Malgun Gothic"/>
                 <a:cs typeface="Malgun Gothic"/>
               </a:rPr>
-              <a:t>평가용 span 보존</a:t>
+              <a:t>adversarial replay</a:t>
             </a:r>
           </a:p>
         </p:txBody>
@@ -15344,7 +15344,7 @@
           <p:cNvPr id="44" name="">
             <a:extLst xmlns:a="http://schemas.openxmlformats.org/drawingml/2006/main">
               <a:ext uri="{FF2B5EF4-FFF2-40B4-BE49-F238E27FC236}">
-                <a16:creationId xmlns:a16="http://schemas.microsoft.com/office/drawing/2014/main" id="{BFF3420F-6C10-4410-8FF3-1ACBBACC166A}"/>
+                <a16:creationId xmlns:a16="http://schemas.microsoft.com/office/drawing/2014/main" id="{DA333CF0-8914-47A2-9255-D8D2EC089324}"/>
               </a:ext>
             </a:extLst>
           </p:cNvPr>
@@ -15379,7 +15379,7 @@
           <p:cNvPr id="45" name="">
             <a:extLst xmlns:a="http://schemas.openxmlformats.org/drawingml/2006/main">
               <a:ext uri="{FF2B5EF4-FFF2-40B4-BE49-F238E27FC236}">
-                <a16:creationId xmlns:a16="http://schemas.microsoft.com/office/drawing/2014/main" id="{6F2BC152-D7C9-4C85-A061-3DC196BA6C4E}"/>
+                <a16:creationId xmlns:a16="http://schemas.microsoft.com/office/drawing/2014/main" id="{44728BAF-1BD5-498B-9772-258D8B8304DA}"/>
               </a:ext>
             </a:extLst>
           </p:cNvPr>
@@ -15433,7 +15433,7 @@
                 <a:ea typeface="Malgun Gothic"/>
                 <a:cs typeface="Malgun Gothic"/>
               </a:rPr>
-              <a:t>설계 원칙: 민감한 정보는 놓치지 않되, 예시·코드·모델명처럼 실제 개인정보가 아닌 값은 가능한 한 제거한다.</a:t>
+              <a:t>설계 원칙: 민감한 정보는 넓게 잡되, 문서 버전·모델명·example-not-real처럼 실제 개인정보가 아닌 값은 의도적으로 제외한다.</a:t>
             </a:r>
           </a:p>
         </p:txBody>
@@ -15443,7 +15443,7 @@
           <p:cNvPr id="46" name="">
             <a:extLst xmlns:a="http://schemas.openxmlformats.org/drawingml/2006/main">
               <a:ext uri="{FF2B5EF4-FFF2-40B4-BE49-F238E27FC236}">
-                <a16:creationId xmlns:a16="http://schemas.microsoft.com/office/drawing/2014/main" id="{72565566-D76D-49E8-9750-D37DC3400832}"/>
+                <a16:creationId xmlns:a16="http://schemas.microsoft.com/office/drawing/2014/main" id="{5EA4F15F-85BD-439C-85F2-9B21F06765A5}"/>
               </a:ext>
             </a:extLst>
           </p:cNvPr>
@@ -15507,7 +15507,7 @@
           <p:cNvPr id="47" name="">
             <a:extLst xmlns:a="http://schemas.openxmlformats.org/drawingml/2006/main">
               <a:ext uri="{FF2B5EF4-FFF2-40B4-BE49-F238E27FC236}">
-                <a16:creationId xmlns:a16="http://schemas.microsoft.com/office/drawing/2014/main" id="{94BEBC5E-F99C-4C30-BCEB-54C33C3C2B0A}"/>
+                <a16:creationId xmlns:a16="http://schemas.microsoft.com/office/drawing/2014/main" id="{E0F80781-04AD-4251-A5E1-4B3CD3C5729C}"/>
               </a:ext>
             </a:extLst>
           </p:cNvPr>
@@ -15569,7 +15569,7 @@
     </p:spTree>
     <p:extLst>
       <p:ext uri="{BB962C8B-B14F-4D97-AF65-F5344CB8AC3E}">
-        <p14:creationId xmlns:p14="http://schemas.microsoft.com/office/powerpoint/2010/main" val="1725649219"/>
+        <p14:creationId xmlns:p14="http://schemas.microsoft.com/office/powerpoint/2010/main" val="1922731346"/>
       </p:ext>
     </p:extLst>
   </p:cSld>
@@ -15593,7 +15593,7 @@
           <p:cNvPr id="1" name="">
             <a:extLst xmlns:a="http://schemas.openxmlformats.org/drawingml/2006/main">
               <a:ext uri="{FF2B5EF4-FFF2-40B4-BE49-F238E27FC236}">
-                <a16:creationId xmlns:a16="http://schemas.microsoft.com/office/drawing/2014/main" id="{19A7EF96-1001-4056-A215-2FEFB9C5DB60}"/>
+                <a16:creationId xmlns:a16="http://schemas.microsoft.com/office/drawing/2014/main" id="{878649F8-927C-4A15-BF73-38961ABEDA0A}"/>
               </a:ext>
             </a:extLst>
           </p:cNvPr>
@@ -15628,7 +15628,7 @@
           <p:cNvPr id="2" name="">
             <a:extLst xmlns:a="http://schemas.openxmlformats.org/drawingml/2006/main">
               <a:ext uri="{FF2B5EF4-FFF2-40B4-BE49-F238E27FC236}">
-                <a16:creationId xmlns:a16="http://schemas.microsoft.com/office/drawing/2014/main" id="{C01F4E62-7F1D-4523-B2B8-CCDE31DC1DA5}"/>
+                <a16:creationId xmlns:a16="http://schemas.microsoft.com/office/drawing/2014/main" id="{78C68C68-4A92-4292-8EFD-4D34D0964737}"/>
               </a:ext>
             </a:extLst>
           </p:cNvPr>
@@ -15692,7 +15692,7 @@
           <p:cNvPr id="3" name="">
             <a:extLst xmlns:a="http://schemas.openxmlformats.org/drawingml/2006/main">
               <a:ext uri="{FF2B5EF4-FFF2-40B4-BE49-F238E27FC236}">
-                <a16:creationId xmlns:a16="http://schemas.microsoft.com/office/drawing/2014/main" id="{B61B02D7-03D3-4741-95E5-324603BE9DC2}"/>
+                <a16:creationId xmlns:a16="http://schemas.microsoft.com/office/drawing/2014/main" id="{7D6DC1DC-3BA5-4B6A-847D-2F1B02A6722C}"/>
               </a:ext>
             </a:extLst>
           </p:cNvPr>
@@ -15756,7 +15756,7 @@
           <p:cNvPr id="4" name="">
             <a:extLst xmlns:a="http://schemas.openxmlformats.org/drawingml/2006/main">
               <a:ext uri="{FF2B5EF4-FFF2-40B4-BE49-F238E27FC236}">
-                <a16:creationId xmlns:a16="http://schemas.microsoft.com/office/drawing/2014/main" id="{9F20CDC8-B381-49A2-AFB3-605774C64EBA}"/>
+                <a16:creationId xmlns:a16="http://schemas.microsoft.com/office/drawing/2014/main" id="{809BB6CB-8F6F-46DB-A719-1B806DB5CD6C}"/>
               </a:ext>
             </a:extLst>
           </p:cNvPr>
@@ -15820,7 +15820,7 @@
           <p:cNvPr id="5" name="">
             <a:extLst xmlns:a="http://schemas.openxmlformats.org/drawingml/2006/main">
               <a:ext uri="{FF2B5EF4-FFF2-40B4-BE49-F238E27FC236}">
-                <a16:creationId xmlns:a16="http://schemas.microsoft.com/office/drawing/2014/main" id="{0ABDFE9B-8D5E-4EED-A58E-89281A2AFD9E}"/>
+                <a16:creationId xmlns:a16="http://schemas.microsoft.com/office/drawing/2014/main" id="{5A17D500-E01B-4692-961F-FE7EB34D4AF6}"/>
               </a:ext>
             </a:extLst>
           </p:cNvPr>
@@ -15853,7 +15853,7 @@
           <p:cNvPr id="6" name="">
             <a:extLst xmlns:a="http://schemas.openxmlformats.org/drawingml/2006/main">
               <a:ext uri="{FF2B5EF4-FFF2-40B4-BE49-F238E27FC236}">
-                <a16:creationId xmlns:a16="http://schemas.microsoft.com/office/drawing/2014/main" id="{10680C02-4584-42A1-B84E-C292101059A0}"/>
+                <a16:creationId xmlns:a16="http://schemas.microsoft.com/office/drawing/2014/main" id="{D1BDC941-A4E8-4635-A8B4-22C9081FBA41}"/>
               </a:ext>
             </a:extLst>
           </p:cNvPr>
@@ -15886,7 +15886,7 @@
           <p:cNvPr id="7" name="">
             <a:extLst xmlns:a="http://schemas.openxmlformats.org/drawingml/2006/main">
               <a:ext uri="{FF2B5EF4-FFF2-40B4-BE49-F238E27FC236}">
-                <a16:creationId xmlns:a16="http://schemas.microsoft.com/office/drawing/2014/main" id="{3F8C95F0-9822-4C10-BB70-998196DCE9DC}"/>
+                <a16:creationId xmlns:a16="http://schemas.microsoft.com/office/drawing/2014/main" id="{204F11A6-C737-4A1D-A2E9-D3999674A0ED}"/>
               </a:ext>
             </a:extLst>
           </p:cNvPr>
@@ -15950,7 +15950,7 @@
           <p:cNvPr id="8" name="">
             <a:extLst xmlns:a="http://schemas.openxmlformats.org/drawingml/2006/main">
               <a:ext uri="{FF2B5EF4-FFF2-40B4-BE49-F238E27FC236}">
-                <a16:creationId xmlns:a16="http://schemas.microsoft.com/office/drawing/2014/main" id="{EB827196-6389-4EAD-8198-92DDF1025D35}"/>
+                <a16:creationId xmlns:a16="http://schemas.microsoft.com/office/drawing/2014/main" id="{2EEDA8B6-11FF-4CDB-848F-6884CD41FD7C}"/>
               </a:ext>
             </a:extLst>
           </p:cNvPr>
@@ -16106,7 +16106,7 @@
           <p:cNvPr id="9" name="">
             <a:extLst xmlns:a="http://schemas.openxmlformats.org/drawingml/2006/main">
               <a:ext uri="{FF2B5EF4-FFF2-40B4-BE49-F238E27FC236}">
-                <a16:creationId xmlns:a16="http://schemas.microsoft.com/office/drawing/2014/main" id="{D74DCD68-20C7-41F6-B9E2-C62E321AD461}"/>
+                <a16:creationId xmlns:a16="http://schemas.microsoft.com/office/drawing/2014/main" id="{BA9AAED6-B841-497D-B9B2-9FECD38F4D80}"/>
               </a:ext>
             </a:extLst>
           </p:cNvPr>
@@ -16139,7 +16139,7 @@
           <p:cNvPr id="10" name="">
             <a:extLst xmlns:a="http://schemas.openxmlformats.org/drawingml/2006/main">
               <a:ext uri="{FF2B5EF4-FFF2-40B4-BE49-F238E27FC236}">
-                <a16:creationId xmlns:a16="http://schemas.microsoft.com/office/drawing/2014/main" id="{108AAA5B-A055-42FF-A882-62644F7EBB83}"/>
+                <a16:creationId xmlns:a16="http://schemas.microsoft.com/office/drawing/2014/main" id="{D8A7A852-1D72-44C1-9B0C-E6A3912F67FB}"/>
               </a:ext>
             </a:extLst>
           </p:cNvPr>
@@ -16203,7 +16203,7 @@
           <p:cNvPr id="11" name="">
             <a:extLst xmlns:a="http://schemas.openxmlformats.org/drawingml/2006/main">
               <a:ext uri="{FF2B5EF4-FFF2-40B4-BE49-F238E27FC236}">
-                <a16:creationId xmlns:a16="http://schemas.microsoft.com/office/drawing/2014/main" id="{F4AA5B55-F5B7-4202-B3EC-53CBEB4A1E63}"/>
+                <a16:creationId xmlns:a16="http://schemas.microsoft.com/office/drawing/2014/main" id="{43656876-67B7-4F5E-B169-D76286EA6668}"/>
               </a:ext>
             </a:extLst>
           </p:cNvPr>
@@ -16236,7 +16236,7 @@
           <p:cNvPr id="12" name="">
             <a:extLst xmlns:a="http://schemas.openxmlformats.org/drawingml/2006/main">
               <a:ext uri="{FF2B5EF4-FFF2-40B4-BE49-F238E27FC236}">
-                <a16:creationId xmlns:a16="http://schemas.microsoft.com/office/drawing/2014/main" id="{3F4745AE-0302-4E29-9ECC-0CED33808230}"/>
+                <a16:creationId xmlns:a16="http://schemas.microsoft.com/office/drawing/2014/main" id="{79A0BA41-F230-4EAE-9436-80C9C4D9B92C}"/>
               </a:ext>
             </a:extLst>
           </p:cNvPr>
@@ -16269,7 +16269,7 @@
           <p:cNvPr id="13" name="">
             <a:extLst xmlns:a="http://schemas.openxmlformats.org/drawingml/2006/main">
               <a:ext uri="{FF2B5EF4-FFF2-40B4-BE49-F238E27FC236}">
-                <a16:creationId xmlns:a16="http://schemas.microsoft.com/office/drawing/2014/main" id="{70976524-E99B-4A36-86B1-CE59660B1B67}"/>
+                <a16:creationId xmlns:a16="http://schemas.microsoft.com/office/drawing/2014/main" id="{B9F29B60-F4E5-424E-BF22-0B5842498CA0}"/>
               </a:ext>
             </a:extLst>
           </p:cNvPr>
@@ -16333,7 +16333,7 @@
           <p:cNvPr id="14" name="">
             <a:extLst xmlns:a="http://schemas.openxmlformats.org/drawingml/2006/main">
               <a:ext uri="{FF2B5EF4-FFF2-40B4-BE49-F238E27FC236}">
-                <a16:creationId xmlns:a16="http://schemas.microsoft.com/office/drawing/2014/main" id="{FF9CCE93-2BF7-4FED-8B04-2C086BCA39CF}"/>
+                <a16:creationId xmlns:a16="http://schemas.microsoft.com/office/drawing/2014/main" id="{1A7242C8-51DD-40FE-80DE-02D0600D24BB}"/>
               </a:ext>
             </a:extLst>
           </p:cNvPr>
@@ -16568,7 +16568,7 @@
           <p:cNvPr id="15" name="">
             <a:extLst xmlns:a="http://schemas.openxmlformats.org/drawingml/2006/main">
               <a:ext uri="{FF2B5EF4-FFF2-40B4-BE49-F238E27FC236}">
-                <a16:creationId xmlns:a16="http://schemas.microsoft.com/office/drawing/2014/main" id="{7667423D-7822-4E8A-992E-A34E34116DB6}"/>
+                <a16:creationId xmlns:a16="http://schemas.microsoft.com/office/drawing/2014/main" id="{F76D3C4B-20DF-4575-8AE0-05832EFACD68}"/>
               </a:ext>
             </a:extLst>
           </p:cNvPr>
@@ -16632,7 +16632,7 @@
           <p:cNvPr id="16" name="">
             <a:extLst xmlns:a="http://schemas.openxmlformats.org/drawingml/2006/main">
               <a:ext uri="{FF2B5EF4-FFF2-40B4-BE49-F238E27FC236}">
-                <a16:creationId xmlns:a16="http://schemas.microsoft.com/office/drawing/2014/main" id="{4800CD05-98FA-4803-82C3-69D70AA3CA84}"/>
+                <a16:creationId xmlns:a16="http://schemas.microsoft.com/office/drawing/2014/main" id="{C152F259-2A93-4774-BDF5-E6773DF08C92}"/>
               </a:ext>
             </a:extLst>
           </p:cNvPr>
@@ -16694,7 +16694,7 @@
     </p:spTree>
     <p:extLst>
       <p:ext uri="{BB962C8B-B14F-4D97-AF65-F5344CB8AC3E}">
-        <p14:creationId xmlns:p14="http://schemas.microsoft.com/office/powerpoint/2010/main" val="902545472"/>
+        <p14:creationId xmlns:p14="http://schemas.microsoft.com/office/powerpoint/2010/main" val="909257"/>
       </p:ext>
     </p:extLst>
   </p:cSld>
@@ -16718,7 +16718,7 @@
           <p:cNvPr id="1" name="">
             <a:extLst xmlns:a="http://schemas.openxmlformats.org/drawingml/2006/main">
               <a:ext uri="{FF2B5EF4-FFF2-40B4-BE49-F238E27FC236}">
-                <a16:creationId xmlns:a16="http://schemas.microsoft.com/office/drawing/2014/main" id="{2472A8A5-B3E7-45E9-B319-17D88B01F7BE}"/>
+                <a16:creationId xmlns:a16="http://schemas.microsoft.com/office/drawing/2014/main" id="{F99C0C40-7D82-4118-9776-899BA439B229}"/>
               </a:ext>
             </a:extLst>
           </p:cNvPr>
@@ -16753,7 +16753,7 @@
           <p:cNvPr id="2" name="">
             <a:extLst xmlns:a="http://schemas.openxmlformats.org/drawingml/2006/main">
               <a:ext uri="{FF2B5EF4-FFF2-40B4-BE49-F238E27FC236}">
-                <a16:creationId xmlns:a16="http://schemas.microsoft.com/office/drawing/2014/main" id="{1C1578C7-3E70-487F-A219-5A08BB27A492}"/>
+                <a16:creationId xmlns:a16="http://schemas.microsoft.com/office/drawing/2014/main" id="{3D6249DF-9AE3-48D0-BC51-8212E19BEC74}"/>
               </a:ext>
             </a:extLst>
           </p:cNvPr>
@@ -16817,7 +16817,7 @@
           <p:cNvPr id="3" name="">
             <a:extLst xmlns:a="http://schemas.openxmlformats.org/drawingml/2006/main">
               <a:ext uri="{FF2B5EF4-FFF2-40B4-BE49-F238E27FC236}">
-                <a16:creationId xmlns:a16="http://schemas.microsoft.com/office/drawing/2014/main" id="{6A715451-1E5B-4037-B7D7-D999D46DA76F}"/>
+                <a16:creationId xmlns:a16="http://schemas.microsoft.com/office/drawing/2014/main" id="{EF027788-A4F2-4BDF-B344-80F8499FEEEC}"/>
               </a:ext>
             </a:extLst>
           </p:cNvPr>
@@ -16881,7 +16881,7 @@
           <p:cNvPr id="4" name="">
             <a:extLst xmlns:a="http://schemas.openxmlformats.org/drawingml/2006/main">
               <a:ext uri="{FF2B5EF4-FFF2-40B4-BE49-F238E27FC236}">
-                <a16:creationId xmlns:a16="http://schemas.microsoft.com/office/drawing/2014/main" id="{ECF75055-C80C-42B5-B128-1CC52800E056}"/>
+                <a16:creationId xmlns:a16="http://schemas.microsoft.com/office/drawing/2014/main" id="{27E26CF3-46D6-46C0-A308-54C24094E257}"/>
               </a:ext>
             </a:extLst>
           </p:cNvPr>
@@ -16945,7 +16945,7 @@
           <p:cNvPr id="5" name="">
             <a:extLst xmlns:a="http://schemas.openxmlformats.org/drawingml/2006/main">
               <a:ext uri="{FF2B5EF4-FFF2-40B4-BE49-F238E27FC236}">
-                <a16:creationId xmlns:a16="http://schemas.microsoft.com/office/drawing/2014/main" id="{53B8B62D-CAA3-49AF-ACA4-C6DBD882B4F3}"/>
+                <a16:creationId xmlns:a16="http://schemas.microsoft.com/office/drawing/2014/main" id="{E78B6D9B-52FA-4180-8F21-05BDE66202A5}"/>
               </a:ext>
             </a:extLst>
           </p:cNvPr>
@@ -16978,7 +16978,7 @@
           <p:cNvPr id="6" name="">
             <a:extLst xmlns:a="http://schemas.openxmlformats.org/drawingml/2006/main">
               <a:ext uri="{FF2B5EF4-FFF2-40B4-BE49-F238E27FC236}">
-                <a16:creationId xmlns:a16="http://schemas.microsoft.com/office/drawing/2014/main" id="{4965A4E2-AF96-42D6-99E0-0B8D85C9EFED}"/>
+                <a16:creationId xmlns:a16="http://schemas.microsoft.com/office/drawing/2014/main" id="{BBB7A9C0-83D3-499A-BC7A-1D5A2D783838}"/>
               </a:ext>
             </a:extLst>
           </p:cNvPr>
@@ -17042,7 +17042,7 @@
           <p:cNvPr id="7" name="">
             <a:extLst xmlns:a="http://schemas.openxmlformats.org/drawingml/2006/main">
               <a:ext uri="{FF2B5EF4-FFF2-40B4-BE49-F238E27FC236}">
-                <a16:creationId xmlns:a16="http://schemas.microsoft.com/office/drawing/2014/main" id="{934A8E35-63CA-41F2-88BE-9231477EAADD}"/>
+                <a16:creationId xmlns:a16="http://schemas.microsoft.com/office/drawing/2014/main" id="{3A999F98-B7C7-46F2-8B75-17F8EBC42037}"/>
               </a:ext>
             </a:extLst>
           </p:cNvPr>
@@ -17075,7 +17075,7 @@
           <p:cNvPr id="8" name="">
             <a:extLst xmlns:a="http://schemas.openxmlformats.org/drawingml/2006/main">
               <a:ext uri="{FF2B5EF4-FFF2-40B4-BE49-F238E27FC236}">
-                <a16:creationId xmlns:a16="http://schemas.microsoft.com/office/drawing/2014/main" id="{94BCC6CD-4134-4934-A7B8-6E98B6A7697D}"/>
+                <a16:creationId xmlns:a16="http://schemas.microsoft.com/office/drawing/2014/main" id="{46086F8B-1254-42C9-B529-9E172C017D9A}"/>
               </a:ext>
             </a:extLst>
           </p:cNvPr>
@@ -17139,7 +17139,7 @@
           <p:cNvPr id="9" name="">
             <a:extLst xmlns:a="http://schemas.openxmlformats.org/drawingml/2006/main">
               <a:ext uri="{FF2B5EF4-FFF2-40B4-BE49-F238E27FC236}">
-                <a16:creationId xmlns:a16="http://schemas.microsoft.com/office/drawing/2014/main" id="{2997F122-CEB8-4AA0-BC81-7EEE0CD9808A}"/>
+                <a16:creationId xmlns:a16="http://schemas.microsoft.com/office/drawing/2014/main" id="{C1B5FF9F-818B-45E3-8C6B-A7850D9CE655}"/>
               </a:ext>
             </a:extLst>
           </p:cNvPr>
@@ -17172,7 +17172,7 @@
           <p:cNvPr id="10" name="">
             <a:extLst xmlns:a="http://schemas.openxmlformats.org/drawingml/2006/main">
               <a:ext uri="{FF2B5EF4-FFF2-40B4-BE49-F238E27FC236}">
-                <a16:creationId xmlns:a16="http://schemas.microsoft.com/office/drawing/2014/main" id="{BFF39823-C7D8-4B03-A813-FB54EB40CF86}"/>
+                <a16:creationId xmlns:a16="http://schemas.microsoft.com/office/drawing/2014/main" id="{05703A39-C14F-4F6A-A4E2-9704ECBEA22D}"/>
               </a:ext>
             </a:extLst>
           </p:cNvPr>
@@ -17236,7 +17236,7 @@
           <p:cNvPr id="11" name="">
             <a:extLst xmlns:a="http://schemas.openxmlformats.org/drawingml/2006/main">
               <a:ext uri="{FF2B5EF4-FFF2-40B4-BE49-F238E27FC236}">
-                <a16:creationId xmlns:a16="http://schemas.microsoft.com/office/drawing/2014/main" id="{F8735F43-119E-40F1-999E-963456689A85}"/>
+                <a16:creationId xmlns:a16="http://schemas.microsoft.com/office/drawing/2014/main" id="{4799395A-7E9F-43ED-9310-AF9E34DF5143}"/>
               </a:ext>
             </a:extLst>
           </p:cNvPr>
@@ -17269,7 +17269,7 @@
           <p:cNvPr id="12" name="">
             <a:extLst xmlns:a="http://schemas.openxmlformats.org/drawingml/2006/main">
               <a:ext uri="{FF2B5EF4-FFF2-40B4-BE49-F238E27FC236}">
-                <a16:creationId xmlns:a16="http://schemas.microsoft.com/office/drawing/2014/main" id="{AD69398C-B620-4A8C-BAEA-F22131AC6D88}"/>
+                <a16:creationId xmlns:a16="http://schemas.microsoft.com/office/drawing/2014/main" id="{1AAAFC29-42CC-42AE-BC3D-74D448804A0B}"/>
               </a:ext>
             </a:extLst>
           </p:cNvPr>
@@ -17333,7 +17333,7 @@
           <p:cNvPr id="13" name="">
             <a:extLst xmlns:a="http://schemas.openxmlformats.org/drawingml/2006/main">
               <a:ext uri="{FF2B5EF4-FFF2-40B4-BE49-F238E27FC236}">
-                <a16:creationId xmlns:a16="http://schemas.microsoft.com/office/drawing/2014/main" id="{DF10BF90-C20C-4CE8-9DC1-75D2E17F6F8B}"/>
+                <a16:creationId xmlns:a16="http://schemas.microsoft.com/office/drawing/2014/main" id="{BCE3143F-A6F0-4C6B-834F-3021B6BAD7A8}"/>
               </a:ext>
             </a:extLst>
           </p:cNvPr>
@@ -17366,7 +17366,7 @@
           <p:cNvPr id="14" name="">
             <a:extLst xmlns:a="http://schemas.openxmlformats.org/drawingml/2006/main">
               <a:ext uri="{FF2B5EF4-FFF2-40B4-BE49-F238E27FC236}">
-                <a16:creationId xmlns:a16="http://schemas.microsoft.com/office/drawing/2014/main" id="{350AD08E-4E45-46D4-B12C-4A0CAD79BEDC}"/>
+                <a16:creationId xmlns:a16="http://schemas.microsoft.com/office/drawing/2014/main" id="{316F8693-B83C-41D5-9EA2-E4CDFADA6E67}"/>
               </a:ext>
             </a:extLst>
           </p:cNvPr>
@@ -17430,7 +17430,7 @@
           <p:cNvPr id="15" name="">
             <a:extLst xmlns:a="http://schemas.openxmlformats.org/drawingml/2006/main">
               <a:ext uri="{FF2B5EF4-FFF2-40B4-BE49-F238E27FC236}">
-                <a16:creationId xmlns:a16="http://schemas.microsoft.com/office/drawing/2014/main" id="{C830B4A9-06CA-493E-9EC1-54CBC03F435C}"/>
+                <a16:creationId xmlns:a16="http://schemas.microsoft.com/office/drawing/2014/main" id="{A771EA8A-07DD-40F0-9A67-9A7489D85C44}"/>
               </a:ext>
             </a:extLst>
           </p:cNvPr>
@@ -17463,7 +17463,7 @@
           <p:cNvPr id="16" name="">
             <a:extLst xmlns:a="http://schemas.openxmlformats.org/drawingml/2006/main">
               <a:ext uri="{FF2B5EF4-FFF2-40B4-BE49-F238E27FC236}">
-                <a16:creationId xmlns:a16="http://schemas.microsoft.com/office/drawing/2014/main" id="{B5612EAC-BF37-4736-93D0-022EF3ABA1A4}"/>
+                <a16:creationId xmlns:a16="http://schemas.microsoft.com/office/drawing/2014/main" id="{BF97581F-D868-474F-9ACE-DE0CDC2A4165}"/>
               </a:ext>
             </a:extLst>
           </p:cNvPr>
@@ -17527,7 +17527,7 @@
           <p:cNvPr id="17" name="">
             <a:extLst xmlns:a="http://schemas.openxmlformats.org/drawingml/2006/main">
               <a:ext uri="{FF2B5EF4-FFF2-40B4-BE49-F238E27FC236}">
-                <a16:creationId xmlns:a16="http://schemas.microsoft.com/office/drawing/2014/main" id="{DCC1E800-A865-4056-95A0-A8C5AA1E3B6E}"/>
+                <a16:creationId xmlns:a16="http://schemas.microsoft.com/office/drawing/2014/main" id="{05B0EEAC-29C5-434E-9ECB-F3B5C14A6D4C}"/>
               </a:ext>
             </a:extLst>
           </p:cNvPr>
@@ -17560,7 +17560,7 @@
           <p:cNvPr id="18" name="">
             <a:extLst xmlns:a="http://schemas.openxmlformats.org/drawingml/2006/main">
               <a:ext uri="{FF2B5EF4-FFF2-40B4-BE49-F238E27FC236}">
-                <a16:creationId xmlns:a16="http://schemas.microsoft.com/office/drawing/2014/main" id="{F2B4F501-4542-4103-8448-4557786369FA}"/>
+                <a16:creationId xmlns:a16="http://schemas.microsoft.com/office/drawing/2014/main" id="{E9C96AF0-6A45-4D43-AD09-B3E3AA860E9A}"/>
               </a:ext>
             </a:extLst>
           </p:cNvPr>
@@ -17624,7 +17624,7 @@
           <p:cNvPr id="19" name="">
             <a:extLst xmlns:a="http://schemas.openxmlformats.org/drawingml/2006/main">
               <a:ext uri="{FF2B5EF4-FFF2-40B4-BE49-F238E27FC236}">
-                <a16:creationId xmlns:a16="http://schemas.microsoft.com/office/drawing/2014/main" id="{1B1FD58A-E383-4BD7-89B5-81E520DF007E}"/>
+                <a16:creationId xmlns:a16="http://schemas.microsoft.com/office/drawing/2014/main" id="{40FDD599-B040-4463-96EB-FBD81C03C9A0}"/>
               </a:ext>
             </a:extLst>
           </p:cNvPr>
@@ -17657,7 +17657,7 @@
           <p:cNvPr id="20" name="">
             <a:extLst xmlns:a="http://schemas.openxmlformats.org/drawingml/2006/main">
               <a:ext uri="{FF2B5EF4-FFF2-40B4-BE49-F238E27FC236}">
-                <a16:creationId xmlns:a16="http://schemas.microsoft.com/office/drawing/2014/main" id="{AFBB5A0F-BF57-4996-95FC-CC9909F2EF1B}"/>
+                <a16:creationId xmlns:a16="http://schemas.microsoft.com/office/drawing/2014/main" id="{698FEBF9-710F-45DE-8E7F-403157571793}"/>
               </a:ext>
             </a:extLst>
           </p:cNvPr>
@@ -17721,7 +17721,7 @@
           <p:cNvPr id="21" name="">
             <a:extLst xmlns:a="http://schemas.openxmlformats.org/drawingml/2006/main">
               <a:ext uri="{FF2B5EF4-FFF2-40B4-BE49-F238E27FC236}">
-                <a16:creationId xmlns:a16="http://schemas.microsoft.com/office/drawing/2014/main" id="{1277CB05-C6E1-4A71-86B0-BA448AD3E7E5}"/>
+                <a16:creationId xmlns:a16="http://schemas.microsoft.com/office/drawing/2014/main" id="{8DF4B286-59A6-40D9-B26B-7BC09FFFAA62}"/>
               </a:ext>
             </a:extLst>
           </p:cNvPr>
@@ -17754,7 +17754,7 @@
           <p:cNvPr id="22" name="">
             <a:extLst xmlns:a="http://schemas.openxmlformats.org/drawingml/2006/main">
               <a:ext uri="{FF2B5EF4-FFF2-40B4-BE49-F238E27FC236}">
-                <a16:creationId xmlns:a16="http://schemas.microsoft.com/office/drawing/2014/main" id="{EE3437F5-5C25-4D53-907D-21F470DAF009}"/>
+                <a16:creationId xmlns:a16="http://schemas.microsoft.com/office/drawing/2014/main" id="{180C7EB5-3855-4B20-B354-AB74AF912731}"/>
               </a:ext>
             </a:extLst>
           </p:cNvPr>
@@ -17818,7 +17818,7 @@
           <p:cNvPr id="23" name="">
             <a:extLst xmlns:a="http://schemas.openxmlformats.org/drawingml/2006/main">
               <a:ext uri="{FF2B5EF4-FFF2-40B4-BE49-F238E27FC236}">
-                <a16:creationId xmlns:a16="http://schemas.microsoft.com/office/drawing/2014/main" id="{24264C4E-70AB-4675-A78E-777382E1BE2C}"/>
+                <a16:creationId xmlns:a16="http://schemas.microsoft.com/office/drawing/2014/main" id="{25A1071E-1629-47B3-9B36-C5AC48E235E1}"/>
               </a:ext>
             </a:extLst>
           </p:cNvPr>
@@ -17851,7 +17851,7 @@
           <p:cNvPr id="24" name="">
             <a:extLst xmlns:a="http://schemas.openxmlformats.org/drawingml/2006/main">
               <a:ext uri="{FF2B5EF4-FFF2-40B4-BE49-F238E27FC236}">
-                <a16:creationId xmlns:a16="http://schemas.microsoft.com/office/drawing/2014/main" id="{3FF04E8B-3280-4F0B-9D3D-59B78BDEC334}"/>
+                <a16:creationId xmlns:a16="http://schemas.microsoft.com/office/drawing/2014/main" id="{5D5C076E-7D40-4E34-A4A3-8D8384C806F5}"/>
               </a:ext>
             </a:extLst>
           </p:cNvPr>
@@ -17915,7 +17915,7 @@
           <p:cNvPr id="25" name="">
             <a:extLst xmlns:a="http://schemas.openxmlformats.org/drawingml/2006/main">
               <a:ext uri="{FF2B5EF4-FFF2-40B4-BE49-F238E27FC236}">
-                <a16:creationId xmlns:a16="http://schemas.microsoft.com/office/drawing/2014/main" id="{3EB1D95E-D53D-445A-8457-6DE16BC14056}"/>
+                <a16:creationId xmlns:a16="http://schemas.microsoft.com/office/drawing/2014/main" id="{FCCCD9ED-CED7-4859-999A-1C875D61FCF7}"/>
               </a:ext>
             </a:extLst>
           </p:cNvPr>
@@ -17948,7 +17948,7 @@
           <p:cNvPr id="26" name="">
             <a:extLst xmlns:a="http://schemas.openxmlformats.org/drawingml/2006/main">
               <a:ext uri="{FF2B5EF4-FFF2-40B4-BE49-F238E27FC236}">
-                <a16:creationId xmlns:a16="http://schemas.microsoft.com/office/drawing/2014/main" id="{EC7D0640-6BEE-4A71-A38A-B8A47FBD4BE0}"/>
+                <a16:creationId xmlns:a16="http://schemas.microsoft.com/office/drawing/2014/main" id="{E97E0895-C500-43F2-9E46-153B3642DB19}"/>
               </a:ext>
             </a:extLst>
           </p:cNvPr>
@@ -18012,7 +18012,7 @@
           <p:cNvPr id="27" name="">
             <a:extLst xmlns:a="http://schemas.openxmlformats.org/drawingml/2006/main">
               <a:ext uri="{FF2B5EF4-FFF2-40B4-BE49-F238E27FC236}">
-                <a16:creationId xmlns:a16="http://schemas.microsoft.com/office/drawing/2014/main" id="{C8434C6D-1A5E-4931-B00F-1BAC56E6ED31}"/>
+                <a16:creationId xmlns:a16="http://schemas.microsoft.com/office/drawing/2014/main" id="{1351195D-0B2E-4922-864C-87A9425D63F5}"/>
               </a:ext>
             </a:extLst>
           </p:cNvPr>
@@ -18045,7 +18045,7 @@
           <p:cNvPr id="28" name="">
             <a:extLst xmlns:a="http://schemas.openxmlformats.org/drawingml/2006/main">
               <a:ext uri="{FF2B5EF4-FFF2-40B4-BE49-F238E27FC236}">
-                <a16:creationId xmlns:a16="http://schemas.microsoft.com/office/drawing/2014/main" id="{24043032-0F3C-4B1C-A69A-2B6ADBBE3D85}"/>
+                <a16:creationId xmlns:a16="http://schemas.microsoft.com/office/drawing/2014/main" id="{8C9C6A9E-A564-423C-A7E8-F771245D0039}"/>
               </a:ext>
             </a:extLst>
           </p:cNvPr>
@@ -18109,7 +18109,7 @@
           <p:cNvPr id="29" name="">
             <a:extLst xmlns:a="http://schemas.openxmlformats.org/drawingml/2006/main">
               <a:ext uri="{FF2B5EF4-FFF2-40B4-BE49-F238E27FC236}">
-                <a16:creationId xmlns:a16="http://schemas.microsoft.com/office/drawing/2014/main" id="{9D128A8F-36BD-4715-89C7-93FD851CA2F3}"/>
+                <a16:creationId xmlns:a16="http://schemas.microsoft.com/office/drawing/2014/main" id="{8D2A5FF3-5507-4461-BB20-D2E5F328E7CE}"/>
               </a:ext>
             </a:extLst>
           </p:cNvPr>
@@ -18142,7 +18142,7 @@
           <p:cNvPr id="30" name="">
             <a:extLst xmlns:a="http://schemas.openxmlformats.org/drawingml/2006/main">
               <a:ext uri="{FF2B5EF4-FFF2-40B4-BE49-F238E27FC236}">
-                <a16:creationId xmlns:a16="http://schemas.microsoft.com/office/drawing/2014/main" id="{6A2EF56F-F49D-410E-82C6-4B22B7AEE1B2}"/>
+                <a16:creationId xmlns:a16="http://schemas.microsoft.com/office/drawing/2014/main" id="{7FAFC6F6-ADE1-4A43-8C81-B4AE9B8F98D5}"/>
               </a:ext>
             </a:extLst>
           </p:cNvPr>
@@ -18206,7 +18206,7 @@
           <p:cNvPr id="31" name="">
             <a:extLst xmlns:a="http://schemas.openxmlformats.org/drawingml/2006/main">
               <a:ext uri="{FF2B5EF4-FFF2-40B4-BE49-F238E27FC236}">
-                <a16:creationId xmlns:a16="http://schemas.microsoft.com/office/drawing/2014/main" id="{4E7EAADD-22DF-434C-A841-4F655B058A4F}"/>
+                <a16:creationId xmlns:a16="http://schemas.microsoft.com/office/drawing/2014/main" id="{FCC356F6-E747-4D1D-ABAD-558BA6FEF896}"/>
               </a:ext>
             </a:extLst>
           </p:cNvPr>
@@ -18239,7 +18239,7 @@
           <p:cNvPr id="32" name="">
             <a:extLst xmlns:a="http://schemas.openxmlformats.org/drawingml/2006/main">
               <a:ext uri="{FF2B5EF4-FFF2-40B4-BE49-F238E27FC236}">
-                <a16:creationId xmlns:a16="http://schemas.microsoft.com/office/drawing/2014/main" id="{B002367F-8B6D-4770-A7D3-6DDF387E49A2}"/>
+                <a16:creationId xmlns:a16="http://schemas.microsoft.com/office/drawing/2014/main" id="{5F0282AB-4F17-4B0A-9DEC-3B06FF949B55}"/>
               </a:ext>
             </a:extLst>
           </p:cNvPr>
@@ -18303,7 +18303,7 @@
           <p:cNvPr id="33" name="">
             <a:extLst xmlns:a="http://schemas.openxmlformats.org/drawingml/2006/main">
               <a:ext uri="{FF2B5EF4-FFF2-40B4-BE49-F238E27FC236}">
-                <a16:creationId xmlns:a16="http://schemas.microsoft.com/office/drawing/2014/main" id="{11122816-C77B-4B19-9883-E432F70087A6}"/>
+                <a16:creationId xmlns:a16="http://schemas.microsoft.com/office/drawing/2014/main" id="{6E376558-F94B-414A-BF7B-A1FA363D76E1}"/>
               </a:ext>
             </a:extLst>
           </p:cNvPr>
@@ -18336,7 +18336,7 @@
           <p:cNvPr id="34" name="">
             <a:extLst xmlns:a="http://schemas.openxmlformats.org/drawingml/2006/main">
               <a:ext uri="{FF2B5EF4-FFF2-40B4-BE49-F238E27FC236}">
-                <a16:creationId xmlns:a16="http://schemas.microsoft.com/office/drawing/2014/main" id="{38C463FD-C60D-4C7B-8324-1B39A01BD7F2}"/>
+                <a16:creationId xmlns:a16="http://schemas.microsoft.com/office/drawing/2014/main" id="{C3BB1C59-9AC0-4521-A0EF-BDEEF4F8D7FA}"/>
               </a:ext>
             </a:extLst>
           </p:cNvPr>
@@ -18400,7 +18400,7 @@
           <p:cNvPr id="35" name="">
             <a:extLst xmlns:a="http://schemas.openxmlformats.org/drawingml/2006/main">
               <a:ext uri="{FF2B5EF4-FFF2-40B4-BE49-F238E27FC236}">
-                <a16:creationId xmlns:a16="http://schemas.microsoft.com/office/drawing/2014/main" id="{B717D6A9-02B6-4FD5-84A1-2CC8F5DB6C8E}"/>
+                <a16:creationId xmlns:a16="http://schemas.microsoft.com/office/drawing/2014/main" id="{F1D67709-F2F9-4037-81F9-FA6DE55A5854}"/>
               </a:ext>
             </a:extLst>
           </p:cNvPr>
@@ -18433,7 +18433,7 @@
           <p:cNvPr id="36" name="">
             <a:extLst xmlns:a="http://schemas.openxmlformats.org/drawingml/2006/main">
               <a:ext uri="{FF2B5EF4-FFF2-40B4-BE49-F238E27FC236}">
-                <a16:creationId xmlns:a16="http://schemas.microsoft.com/office/drawing/2014/main" id="{C1AEFDDA-E506-4685-A86C-E3EDE5A3B2BF}"/>
+                <a16:creationId xmlns:a16="http://schemas.microsoft.com/office/drawing/2014/main" id="{484F46FA-5171-4D8E-B2E3-C59BA4E53B76}"/>
               </a:ext>
             </a:extLst>
           </p:cNvPr>
@@ -18497,7 +18497,7 @@
           <p:cNvPr id="37" name="">
             <a:extLst xmlns:a="http://schemas.openxmlformats.org/drawingml/2006/main">
               <a:ext uri="{FF2B5EF4-FFF2-40B4-BE49-F238E27FC236}">
-                <a16:creationId xmlns:a16="http://schemas.microsoft.com/office/drawing/2014/main" id="{64A0B876-36DC-408D-8894-B8BF488F0794}"/>
+                <a16:creationId xmlns:a16="http://schemas.microsoft.com/office/drawing/2014/main" id="{98DED5FB-679B-478A-9123-9E53C970741B}"/>
               </a:ext>
             </a:extLst>
           </p:cNvPr>
@@ -18530,7 +18530,7 @@
           <p:cNvPr id="38" name="">
             <a:extLst xmlns:a="http://schemas.openxmlformats.org/drawingml/2006/main">
               <a:ext uri="{FF2B5EF4-FFF2-40B4-BE49-F238E27FC236}">
-                <a16:creationId xmlns:a16="http://schemas.microsoft.com/office/drawing/2014/main" id="{F06D2C8D-D035-46CD-B431-6D64C23ED902}"/>
+                <a16:creationId xmlns:a16="http://schemas.microsoft.com/office/drawing/2014/main" id="{6F91C3A5-291C-4E83-AA9E-28EEC0A64166}"/>
               </a:ext>
             </a:extLst>
           </p:cNvPr>
@@ -18594,7 +18594,7 @@
           <p:cNvPr id="39" name="">
             <a:extLst xmlns:a="http://schemas.openxmlformats.org/drawingml/2006/main">
               <a:ext uri="{FF2B5EF4-FFF2-40B4-BE49-F238E27FC236}">
-                <a16:creationId xmlns:a16="http://schemas.microsoft.com/office/drawing/2014/main" id="{A1083A22-5DEA-472F-BE41-6BD0895E9182}"/>
+                <a16:creationId xmlns:a16="http://schemas.microsoft.com/office/drawing/2014/main" id="{4CF95E39-4F6C-478C-903B-B7B24B25A298}"/>
               </a:ext>
             </a:extLst>
           </p:cNvPr>
@@ -18627,7 +18627,7 @@
           <p:cNvPr id="40" name="">
             <a:extLst xmlns:a="http://schemas.openxmlformats.org/drawingml/2006/main">
               <a:ext uri="{FF2B5EF4-FFF2-40B4-BE49-F238E27FC236}">
-                <a16:creationId xmlns:a16="http://schemas.microsoft.com/office/drawing/2014/main" id="{D28AB465-0393-4CA6-9C36-A2A49CF62DBE}"/>
+                <a16:creationId xmlns:a16="http://schemas.microsoft.com/office/drawing/2014/main" id="{1D787B14-5A7A-408D-B95F-62F965198B07}"/>
               </a:ext>
             </a:extLst>
           </p:cNvPr>
@@ -18691,7 +18691,7 @@
           <p:cNvPr id="41" name="">
             <a:extLst xmlns:a="http://schemas.openxmlformats.org/drawingml/2006/main">
               <a:ext uri="{FF2B5EF4-FFF2-40B4-BE49-F238E27FC236}">
-                <a16:creationId xmlns:a16="http://schemas.microsoft.com/office/drawing/2014/main" id="{472D3139-894A-48AC-983F-07A04BB2126F}"/>
+                <a16:creationId xmlns:a16="http://schemas.microsoft.com/office/drawing/2014/main" id="{ED20BB80-756B-482E-B49E-624B5B2E8D0A}"/>
               </a:ext>
             </a:extLst>
           </p:cNvPr>
@@ -18724,7 +18724,7 @@
           <p:cNvPr id="42" name="">
             <a:extLst xmlns:a="http://schemas.openxmlformats.org/drawingml/2006/main">
               <a:ext uri="{FF2B5EF4-FFF2-40B4-BE49-F238E27FC236}">
-                <a16:creationId xmlns:a16="http://schemas.microsoft.com/office/drawing/2014/main" id="{00B50664-6C0A-4288-B806-5D49A622EC70}"/>
+                <a16:creationId xmlns:a16="http://schemas.microsoft.com/office/drawing/2014/main" id="{A4C31201-C0F8-43F5-8791-18C94BA58597}"/>
               </a:ext>
             </a:extLst>
           </p:cNvPr>
@@ -18788,7 +18788,7 @@
           <p:cNvPr id="43" name="">
             <a:extLst xmlns:a="http://schemas.openxmlformats.org/drawingml/2006/main">
               <a:ext uri="{FF2B5EF4-FFF2-40B4-BE49-F238E27FC236}">
-                <a16:creationId xmlns:a16="http://schemas.microsoft.com/office/drawing/2014/main" id="{55D2BDB9-24A6-4094-87A7-1C539A53DDA9}"/>
+                <a16:creationId xmlns:a16="http://schemas.microsoft.com/office/drawing/2014/main" id="{8852B8C0-461B-4D8A-B2FD-CD9686FB8811}"/>
               </a:ext>
             </a:extLst>
           </p:cNvPr>
@@ -18821,7 +18821,7 @@
           <p:cNvPr id="44" name="">
             <a:extLst xmlns:a="http://schemas.openxmlformats.org/drawingml/2006/main">
               <a:ext uri="{FF2B5EF4-FFF2-40B4-BE49-F238E27FC236}">
-                <a16:creationId xmlns:a16="http://schemas.microsoft.com/office/drawing/2014/main" id="{6F4C7D99-0919-4623-BBCE-22223E56314E}"/>
+                <a16:creationId xmlns:a16="http://schemas.microsoft.com/office/drawing/2014/main" id="{2DB29ADA-B3B1-419A-B275-B332EFFC2B77}"/>
               </a:ext>
             </a:extLst>
           </p:cNvPr>
@@ -18875,7 +18875,7 @@
                 <a:ea typeface="Aptos"/>
                 <a:cs typeface="Aptos"/>
               </a:rPr>
-              <a:t>0.7703</a:t>
+              <a:t>0.7994</a:t>
             </a:r>
           </a:p>
         </p:txBody>
@@ -18885,7 +18885,7 @@
           <p:cNvPr id="45" name="">
             <a:extLst xmlns:a="http://schemas.openxmlformats.org/drawingml/2006/main">
               <a:ext uri="{FF2B5EF4-FFF2-40B4-BE49-F238E27FC236}">
-                <a16:creationId xmlns:a16="http://schemas.microsoft.com/office/drawing/2014/main" id="{8BB4CB98-239C-4A22-9CD6-3A0A5F24C3E6}"/>
+                <a16:creationId xmlns:a16="http://schemas.microsoft.com/office/drawing/2014/main" id="{6670BD90-F2C2-49F9-B042-72EEF221C5A4}"/>
               </a:ext>
             </a:extLst>
           </p:cNvPr>
@@ -18918,7 +18918,7 @@
           <p:cNvPr id="46" name="">
             <a:extLst xmlns:a="http://schemas.openxmlformats.org/drawingml/2006/main">
               <a:ext uri="{FF2B5EF4-FFF2-40B4-BE49-F238E27FC236}">
-                <a16:creationId xmlns:a16="http://schemas.microsoft.com/office/drawing/2014/main" id="{86194DDD-1611-43A4-A581-C7D081195CBE}"/>
+                <a16:creationId xmlns:a16="http://schemas.microsoft.com/office/drawing/2014/main" id="{079DEC04-5D8A-42C1-92D9-E41745B5607B}"/>
               </a:ext>
             </a:extLst>
           </p:cNvPr>
@@ -18972,7 +18972,7 @@
                 <a:ea typeface="Aptos"/>
                 <a:cs typeface="Aptos"/>
               </a:rPr>
-              <a:t>0.6280</a:t>
+              <a:t>0.6706</a:t>
             </a:r>
           </a:p>
         </p:txBody>
@@ -18982,7 +18982,7 @@
           <p:cNvPr id="47" name="">
             <a:extLst xmlns:a="http://schemas.openxmlformats.org/drawingml/2006/main">
               <a:ext uri="{FF2B5EF4-FFF2-40B4-BE49-F238E27FC236}">
-                <a16:creationId xmlns:a16="http://schemas.microsoft.com/office/drawing/2014/main" id="{9AE1018E-6860-4E84-8A4C-24A92CC02875}"/>
+                <a16:creationId xmlns:a16="http://schemas.microsoft.com/office/drawing/2014/main" id="{A234FD4F-DBE3-470E-91DD-3BBCFFBD4D79}"/>
               </a:ext>
             </a:extLst>
           </p:cNvPr>
@@ -19015,7 +19015,7 @@
           <p:cNvPr id="48" name="">
             <a:extLst xmlns:a="http://schemas.openxmlformats.org/drawingml/2006/main">
               <a:ext uri="{FF2B5EF4-FFF2-40B4-BE49-F238E27FC236}">
-                <a16:creationId xmlns:a16="http://schemas.microsoft.com/office/drawing/2014/main" id="{FB1CBBE2-527F-4DFA-8DF4-CE635D548340}"/>
+                <a16:creationId xmlns:a16="http://schemas.microsoft.com/office/drawing/2014/main" id="{D936CF1D-A2E4-442F-B7E7-C4CC05A8B421}"/>
               </a:ext>
             </a:extLst>
           </p:cNvPr>
@@ -19069,7 +19069,7 @@
                 <a:ea typeface="Aptos"/>
                 <a:cs typeface="Aptos"/>
               </a:rPr>
-              <a:t>0.6919</a:t>
+              <a:t>0.7294</a:t>
             </a:r>
           </a:p>
         </p:txBody>
@@ -19079,7 +19079,7 @@
           <p:cNvPr id="49" name="">
             <a:extLst xmlns:a="http://schemas.openxmlformats.org/drawingml/2006/main">
               <a:ext uri="{FF2B5EF4-FFF2-40B4-BE49-F238E27FC236}">
-                <a16:creationId xmlns:a16="http://schemas.microsoft.com/office/drawing/2014/main" id="{D4975A8A-5E9E-43C7-A59C-15721D3B2EB0}"/>
+                <a16:creationId xmlns:a16="http://schemas.microsoft.com/office/drawing/2014/main" id="{B292CE1E-AE8A-4F1E-A9CF-531C26F39FCC}"/>
               </a:ext>
             </a:extLst>
           </p:cNvPr>
@@ -19112,7 +19112,7 @@
           <p:cNvPr id="50" name="">
             <a:extLst xmlns:a="http://schemas.openxmlformats.org/drawingml/2006/main">
               <a:ext uri="{FF2B5EF4-FFF2-40B4-BE49-F238E27FC236}">
-                <a16:creationId xmlns:a16="http://schemas.microsoft.com/office/drawing/2014/main" id="{FEEF241C-2BAC-4E42-A27E-747FDECB92A6}"/>
+                <a16:creationId xmlns:a16="http://schemas.microsoft.com/office/drawing/2014/main" id="{9A939EDB-8A70-4FC6-A64D-78A15C805C19}"/>
               </a:ext>
             </a:extLst>
           </p:cNvPr>
@@ -19166,7 +19166,7 @@
                 <a:ea typeface="Aptos"/>
                 <a:cs typeface="Aptos"/>
               </a:rPr>
-              <a:t>0.7796</a:t>
+              <a:t>0.8009</a:t>
             </a:r>
           </a:p>
         </p:txBody>
@@ -19176,7 +19176,7 @@
           <p:cNvPr id="51" name="">
             <a:extLst xmlns:a="http://schemas.openxmlformats.org/drawingml/2006/main">
               <a:ext uri="{FF2B5EF4-FFF2-40B4-BE49-F238E27FC236}">
-                <a16:creationId xmlns:a16="http://schemas.microsoft.com/office/drawing/2014/main" id="{2095ADB5-375E-472A-977A-27016E99E784}"/>
+                <a16:creationId xmlns:a16="http://schemas.microsoft.com/office/drawing/2014/main" id="{32453CA0-9242-4359-A36E-DB37FFC1C140}"/>
               </a:ext>
             </a:extLst>
           </p:cNvPr>
@@ -19209,7 +19209,7 @@
           <p:cNvPr id="52" name="">
             <a:extLst xmlns:a="http://schemas.openxmlformats.org/drawingml/2006/main">
               <a:ext uri="{FF2B5EF4-FFF2-40B4-BE49-F238E27FC236}">
-                <a16:creationId xmlns:a16="http://schemas.microsoft.com/office/drawing/2014/main" id="{706146B6-577B-4AE9-B9BD-7CC55022385F}"/>
+                <a16:creationId xmlns:a16="http://schemas.microsoft.com/office/drawing/2014/main" id="{D53DF68B-211C-40CF-BD08-87AD0393150F}"/>
               </a:ext>
             </a:extLst>
           </p:cNvPr>
@@ -19263,7 +19263,7 @@
                 <a:ea typeface="Aptos"/>
                 <a:cs typeface="Aptos"/>
               </a:rPr>
-              <a:t>79 FP</a:t>
+              <a:t>71 FP</a:t>
             </a:r>
           </a:p>
         </p:txBody>
@@ -19273,7 +19273,7 @@
           <p:cNvPr id="53" name="">
             <a:extLst xmlns:a="http://schemas.openxmlformats.org/drawingml/2006/main">
               <a:ext uri="{FF2B5EF4-FFF2-40B4-BE49-F238E27FC236}">
-                <a16:creationId xmlns:a16="http://schemas.microsoft.com/office/drawing/2014/main" id="{A09250C3-DE74-4B04-B8D5-FCD96CBACFDE}"/>
+                <a16:creationId xmlns:a16="http://schemas.microsoft.com/office/drawing/2014/main" id="{3FDF0199-F4CA-4A98-B6F3-4E4B2599AFC8}"/>
               </a:ext>
             </a:extLst>
           </p:cNvPr>
@@ -19306,7 +19306,7 @@
           <p:cNvPr id="54" name="">
             <a:extLst xmlns:a="http://schemas.openxmlformats.org/drawingml/2006/main">
               <a:ext uri="{FF2B5EF4-FFF2-40B4-BE49-F238E27FC236}">
-                <a16:creationId xmlns:a16="http://schemas.microsoft.com/office/drawing/2014/main" id="{33FB370C-9D5D-4C3E-93A7-2F6DF60EE5D6}"/>
+                <a16:creationId xmlns:a16="http://schemas.microsoft.com/office/drawing/2014/main" id="{5EE0EE9F-6E69-4601-9D43-000C5253D547}"/>
               </a:ext>
             </a:extLst>
           </p:cNvPr>
@@ -19360,7 +19360,7 @@
                 <a:ea typeface="Aptos Display"/>
                 <a:cs typeface="Aptos Display"/>
               </a:rPr>
-              <a:t>+0.0974</a:t>
+              <a:t>+0.1349</a:t>
             </a:r>
           </a:p>
         </p:txBody>
@@ -19370,7 +19370,7 @@
           <p:cNvPr id="55" name="">
             <a:extLst xmlns:a="http://schemas.openxmlformats.org/drawingml/2006/main">
               <a:ext uri="{FF2B5EF4-FFF2-40B4-BE49-F238E27FC236}">
-                <a16:creationId xmlns:a16="http://schemas.microsoft.com/office/drawing/2014/main" id="{C11C036F-D2D6-4CF8-AAEA-61C6DDA38660}"/>
+                <a16:creationId xmlns:a16="http://schemas.microsoft.com/office/drawing/2014/main" id="{EBF8D7BE-CB78-4F98-8EF3-54577D7D58FB}"/>
               </a:ext>
             </a:extLst>
           </p:cNvPr>
@@ -19434,7 +19434,7 @@
           <p:cNvPr id="56" name="">
             <a:extLst xmlns:a="http://schemas.openxmlformats.org/drawingml/2006/main">
               <a:ext uri="{FF2B5EF4-FFF2-40B4-BE49-F238E27FC236}">
-                <a16:creationId xmlns:a16="http://schemas.microsoft.com/office/drawing/2014/main" id="{B965F321-E398-4EC4-B2FC-3453ED8F3C61}"/>
+                <a16:creationId xmlns:a16="http://schemas.microsoft.com/office/drawing/2014/main" id="{2BFA8408-5AB3-48B7-BC97-885A79523A7A}"/>
               </a:ext>
             </a:extLst>
           </p:cNvPr>
@@ -19511,7 +19511,7 @@
                 <a:ea typeface="Malgun Gothic"/>
                 <a:cs typeface="Malgun Gothic"/>
               </a:rPr>
-              <a:t>0.5945 -&gt; 0.6919</a:t>
+              <a:t>0.5945 -&gt; 0.7294</a:t>
             </a:r>
           </a:p>
         </p:txBody>
@@ -19521,7 +19521,7 @@
           <p:cNvPr id="57" name="">
             <a:extLst xmlns:a="http://schemas.openxmlformats.org/drawingml/2006/main">
               <a:ext uri="{FF2B5EF4-FFF2-40B4-BE49-F238E27FC236}">
-                <a16:creationId xmlns:a16="http://schemas.microsoft.com/office/drawing/2014/main" id="{C02680DD-3F21-4476-9CF6-852EDB8C39F4}"/>
+                <a16:creationId xmlns:a16="http://schemas.microsoft.com/office/drawing/2014/main" id="{A2E66C32-DAB0-44A5-B092-4163A799312B}"/>
               </a:ext>
             </a:extLst>
           </p:cNvPr>
@@ -19554,7 +19554,7 @@
           <p:cNvPr id="58" name="">
             <a:extLst xmlns:a="http://schemas.openxmlformats.org/drawingml/2006/main">
               <a:ext uri="{FF2B5EF4-FFF2-40B4-BE49-F238E27FC236}">
-                <a16:creationId xmlns:a16="http://schemas.microsoft.com/office/drawing/2014/main" id="{1FE2FBAD-10F5-4F92-B635-081CFB040581}"/>
+                <a16:creationId xmlns:a16="http://schemas.microsoft.com/office/drawing/2014/main" id="{FA6AE02F-60AD-4151-95A6-92C523B2900B}"/>
               </a:ext>
             </a:extLst>
           </p:cNvPr>
@@ -19618,7 +19618,7 @@
           <p:cNvPr id="59" name="">
             <a:extLst xmlns:a="http://schemas.openxmlformats.org/drawingml/2006/main">
               <a:ext uri="{FF2B5EF4-FFF2-40B4-BE49-F238E27FC236}">
-                <a16:creationId xmlns:a16="http://schemas.microsoft.com/office/drawing/2014/main" id="{5D9E593A-EBFF-4F7F-A8E0-629C07E86EF7}"/>
+                <a16:creationId xmlns:a16="http://schemas.microsoft.com/office/drawing/2014/main" id="{AA4E7C90-7B38-43F2-BD08-BB2C41281C2B}"/>
               </a:ext>
             </a:extLst>
           </p:cNvPr>
@@ -19682,7 +19682,7 @@
           <p:cNvPr id="60" name="">
             <a:extLst xmlns:a="http://schemas.openxmlformats.org/drawingml/2006/main">
               <a:ext uri="{FF2B5EF4-FFF2-40B4-BE49-F238E27FC236}">
-                <a16:creationId xmlns:a16="http://schemas.microsoft.com/office/drawing/2014/main" id="{3262571E-859F-4D22-9788-BBD12ECD793B}"/>
+                <a16:creationId xmlns:a16="http://schemas.microsoft.com/office/drawing/2014/main" id="{F2F27C6B-77A5-49A9-8203-86CCFA8D832B}"/>
               </a:ext>
             </a:extLst>
           </p:cNvPr>
@@ -19769,7 +19769,7 @@
           <p:cNvPr id="61" name="">
             <a:extLst xmlns:a="http://schemas.openxmlformats.org/drawingml/2006/main">
               <a:ext uri="{FF2B5EF4-FFF2-40B4-BE49-F238E27FC236}">
-                <a16:creationId xmlns:a16="http://schemas.microsoft.com/office/drawing/2014/main" id="{78DDDD38-EB6B-4893-9382-C451EFAED57A}"/>
+                <a16:creationId xmlns:a16="http://schemas.microsoft.com/office/drawing/2014/main" id="{F61DAFCB-4FAF-468F-84A3-6D923BE4C65F}"/>
               </a:ext>
             </a:extLst>
           </p:cNvPr>
@@ -19802,7 +19802,7 @@
           <p:cNvPr id="62" name="">
             <a:extLst xmlns:a="http://schemas.openxmlformats.org/drawingml/2006/main">
               <a:ext uri="{FF2B5EF4-FFF2-40B4-BE49-F238E27FC236}">
-                <a16:creationId xmlns:a16="http://schemas.microsoft.com/office/drawing/2014/main" id="{0C166433-FF88-4D5E-9D66-080C24D8B880}"/>
+                <a16:creationId xmlns:a16="http://schemas.microsoft.com/office/drawing/2014/main" id="{95AAFFBA-CD6E-4198-B29A-B45BBB6F8781}"/>
               </a:ext>
             </a:extLst>
           </p:cNvPr>
@@ -19866,7 +19866,7 @@
           <p:cNvPr id="63" name="">
             <a:extLst xmlns:a="http://schemas.openxmlformats.org/drawingml/2006/main">
               <a:ext uri="{FF2B5EF4-FFF2-40B4-BE49-F238E27FC236}">
-                <a16:creationId xmlns:a16="http://schemas.microsoft.com/office/drawing/2014/main" id="{583A9D15-B60C-4B55-B334-CA2849707B44}"/>
+                <a16:creationId xmlns:a16="http://schemas.microsoft.com/office/drawing/2014/main" id="{1A1DD2FD-70FF-4471-ABA9-9D443FE00949}"/>
               </a:ext>
             </a:extLst>
           </p:cNvPr>
@@ -19930,7 +19930,7 @@
           <p:cNvPr id="64" name="">
             <a:extLst xmlns:a="http://schemas.openxmlformats.org/drawingml/2006/main">
               <a:ext uri="{FF2B5EF4-FFF2-40B4-BE49-F238E27FC236}">
-                <a16:creationId xmlns:a16="http://schemas.microsoft.com/office/drawing/2014/main" id="{45438D27-4F88-4F1E-9FEC-93A54A0F8EC9}"/>
+                <a16:creationId xmlns:a16="http://schemas.microsoft.com/office/drawing/2014/main" id="{947BAEAC-8392-4AAD-99E5-6DC4263FD77B}"/>
               </a:ext>
             </a:extLst>
           </p:cNvPr>
@@ -19994,7 +19994,7 @@
           <p:cNvPr id="65" name="">
             <a:extLst xmlns:a="http://schemas.openxmlformats.org/drawingml/2006/main">
               <a:ext uri="{FF2B5EF4-FFF2-40B4-BE49-F238E27FC236}">
-                <a16:creationId xmlns:a16="http://schemas.microsoft.com/office/drawing/2014/main" id="{1B52CA4E-9C83-4D24-B548-1F8959D7E9A6}"/>
+                <a16:creationId xmlns:a16="http://schemas.microsoft.com/office/drawing/2014/main" id="{AAABEB44-F788-437D-827E-B8EAA7339894}"/>
               </a:ext>
             </a:extLst>
           </p:cNvPr>
@@ -20027,7 +20027,7 @@
           <p:cNvPr id="66" name="">
             <a:extLst xmlns:a="http://schemas.openxmlformats.org/drawingml/2006/main">
               <a:ext uri="{FF2B5EF4-FFF2-40B4-BE49-F238E27FC236}">
-                <a16:creationId xmlns:a16="http://schemas.microsoft.com/office/drawing/2014/main" id="{F9F58633-E519-4DF0-88CD-D5D61B6B79AF}"/>
+                <a16:creationId xmlns:a16="http://schemas.microsoft.com/office/drawing/2014/main" id="{86ACB88B-4450-4664-A974-A01DFE6104B7}"/>
               </a:ext>
             </a:extLst>
           </p:cNvPr>
@@ -20091,7 +20091,7 @@
           <p:cNvPr id="67" name="">
             <a:extLst xmlns:a="http://schemas.openxmlformats.org/drawingml/2006/main">
               <a:ext uri="{FF2B5EF4-FFF2-40B4-BE49-F238E27FC236}">
-                <a16:creationId xmlns:a16="http://schemas.microsoft.com/office/drawing/2014/main" id="{A6181F87-1178-4034-8CF6-0FBCF70EEDBB}"/>
+                <a16:creationId xmlns:a16="http://schemas.microsoft.com/office/drawing/2014/main" id="{F8E25577-6C3A-413A-B470-F3CCBEE93A18}"/>
               </a:ext>
             </a:extLst>
           </p:cNvPr>
@@ -20145,7 +20145,7 @@
                 <a:ea typeface="Malgun Gothic"/>
                 <a:cs typeface="Malgun Gothic"/>
               </a:rPr>
-              <a:t>Hard-negative FPR 0은 정해진 100개 샘플에서의 결과입니다. 그래서 저는 '완벽하다'가 아니라 '이전 hybrid의 명백한 오탐을 줄였다'고 설명합니다.</a:t>
+              <a:t>Hard-negative FPR 0은 정해진 100개 샘플에서의 결과입니다. 모델명·문서 버전·example-not-real은 개인정보가 아니므로 의도적으로 마스킹하지 않습니다.</a:t>
             </a:r>
           </a:p>
         </p:txBody>
@@ -20155,7 +20155,7 @@
           <p:cNvPr id="68" name="">
             <a:extLst xmlns:a="http://schemas.openxmlformats.org/drawingml/2006/main">
               <a:ext uri="{FF2B5EF4-FFF2-40B4-BE49-F238E27FC236}">
-                <a16:creationId xmlns:a16="http://schemas.microsoft.com/office/drawing/2014/main" id="{F7D2A92F-8AF4-4630-96E7-1A373BD07E87}"/>
+                <a16:creationId xmlns:a16="http://schemas.microsoft.com/office/drawing/2014/main" id="{1CCDD610-049D-400A-A194-91A670E09DB1}"/>
               </a:ext>
             </a:extLst>
           </p:cNvPr>
@@ -20219,7 +20219,7 @@
           <p:cNvPr id="69" name="">
             <a:extLst xmlns:a="http://schemas.openxmlformats.org/drawingml/2006/main">
               <a:ext uri="{FF2B5EF4-FFF2-40B4-BE49-F238E27FC236}">
-                <a16:creationId xmlns:a16="http://schemas.microsoft.com/office/drawing/2014/main" id="{6712A565-7073-472C-841F-FC4B81E1B4C8}"/>
+                <a16:creationId xmlns:a16="http://schemas.microsoft.com/office/drawing/2014/main" id="{186CB0DE-1B5E-4342-8384-6F9D4F249492}"/>
               </a:ext>
             </a:extLst>
           </p:cNvPr>
@@ -20281,7 +20281,7 @@
     </p:spTree>
     <p:extLst>
       <p:ext uri="{BB962C8B-B14F-4D97-AF65-F5344CB8AC3E}">
-        <p14:creationId xmlns:p14="http://schemas.microsoft.com/office/powerpoint/2010/main" val="1557647902"/>
+        <p14:creationId xmlns:p14="http://schemas.microsoft.com/office/powerpoint/2010/main" val="1965783310"/>
       </p:ext>
     </p:extLst>
   </p:cSld>
@@ -20305,7 +20305,7 @@
           <p:cNvPr id="1" name="">
             <a:extLst xmlns:a="http://schemas.openxmlformats.org/drawingml/2006/main">
               <a:ext uri="{FF2B5EF4-FFF2-40B4-BE49-F238E27FC236}">
-                <a16:creationId xmlns:a16="http://schemas.microsoft.com/office/drawing/2014/main" id="{5E732771-E8D7-497F-845B-763E0114DC4B}"/>
+                <a16:creationId xmlns:a16="http://schemas.microsoft.com/office/drawing/2014/main" id="{53FDE02C-4613-4889-9655-BA935F160D36}"/>
               </a:ext>
             </a:extLst>
           </p:cNvPr>
@@ -20340,7 +20340,7 @@
           <p:cNvPr id="2" name="">
             <a:extLst xmlns:a="http://schemas.openxmlformats.org/drawingml/2006/main">
               <a:ext uri="{FF2B5EF4-FFF2-40B4-BE49-F238E27FC236}">
-                <a16:creationId xmlns:a16="http://schemas.microsoft.com/office/drawing/2014/main" id="{DA6D3402-1640-4214-B2E1-2257F1DB7253}"/>
+                <a16:creationId xmlns:a16="http://schemas.microsoft.com/office/drawing/2014/main" id="{CF45E3BE-3E25-4D8A-976F-E6BAC7150AC5}"/>
               </a:ext>
             </a:extLst>
           </p:cNvPr>
@@ -20404,7 +20404,7 @@
           <p:cNvPr id="3" name="">
             <a:extLst xmlns:a="http://schemas.openxmlformats.org/drawingml/2006/main">
               <a:ext uri="{FF2B5EF4-FFF2-40B4-BE49-F238E27FC236}">
-                <a16:creationId xmlns:a16="http://schemas.microsoft.com/office/drawing/2014/main" id="{3D3FCD14-2022-4764-81CB-5534E39EBFC8}"/>
+                <a16:creationId xmlns:a16="http://schemas.microsoft.com/office/drawing/2014/main" id="{C298D48C-F75D-458B-AD84-C397634E5A7A}"/>
               </a:ext>
             </a:extLst>
           </p:cNvPr>
@@ -20468,7 +20468,7 @@
           <p:cNvPr id="4" name="">
             <a:extLst xmlns:a="http://schemas.openxmlformats.org/drawingml/2006/main">
               <a:ext uri="{FF2B5EF4-FFF2-40B4-BE49-F238E27FC236}">
-                <a16:creationId xmlns:a16="http://schemas.microsoft.com/office/drawing/2014/main" id="{AB2ECEC6-4C70-416C-8DC2-BE2A0AF48AE9}"/>
+                <a16:creationId xmlns:a16="http://schemas.microsoft.com/office/drawing/2014/main" id="{A4F875CA-C39A-4223-BE54-F2AF4D11AD4A}"/>
               </a:ext>
             </a:extLst>
           </p:cNvPr>
@@ -20532,7 +20532,7 @@
           <p:cNvPr id="5" name="">
             <a:extLst xmlns:a="http://schemas.openxmlformats.org/drawingml/2006/main">
               <a:ext uri="{FF2B5EF4-FFF2-40B4-BE49-F238E27FC236}">
-                <a16:creationId xmlns:a16="http://schemas.microsoft.com/office/drawing/2014/main" id="{91550071-B1D1-4F69-AAB1-F8C371074020}"/>
+                <a16:creationId xmlns:a16="http://schemas.microsoft.com/office/drawing/2014/main" id="{8D92DC97-12CB-4071-946C-F642180A5E36}"/>
               </a:ext>
             </a:extLst>
           </p:cNvPr>
@@ -20565,7 +20565,7 @@
           <p:cNvPr id="6" name="">
             <a:extLst xmlns:a="http://schemas.openxmlformats.org/drawingml/2006/main">
               <a:ext uri="{FF2B5EF4-FFF2-40B4-BE49-F238E27FC236}">
-                <a16:creationId xmlns:a16="http://schemas.microsoft.com/office/drawing/2014/main" id="{2487E511-B279-4A28-8BE8-80CC7E040D52}"/>
+                <a16:creationId xmlns:a16="http://schemas.microsoft.com/office/drawing/2014/main" id="{582E29E9-B858-4119-B5E2-3F6631DF99CF}"/>
               </a:ext>
             </a:extLst>
           </p:cNvPr>
@@ -20598,7 +20598,7 @@
           <p:cNvPr id="7" name="">
             <a:extLst xmlns:a="http://schemas.openxmlformats.org/drawingml/2006/main">
               <a:ext uri="{FF2B5EF4-FFF2-40B4-BE49-F238E27FC236}">
-                <a16:creationId xmlns:a16="http://schemas.microsoft.com/office/drawing/2014/main" id="{E226E407-FE65-45E1-BC71-F3244E70184A}"/>
+                <a16:creationId xmlns:a16="http://schemas.microsoft.com/office/drawing/2014/main" id="{C3515FC9-F29D-4FE6-96FC-EFE424686A69}"/>
               </a:ext>
             </a:extLst>
           </p:cNvPr>
@@ -20662,7 +20662,7 @@
           <p:cNvPr id="8" name="">
             <a:extLst xmlns:a="http://schemas.openxmlformats.org/drawingml/2006/main">
               <a:ext uri="{FF2B5EF4-FFF2-40B4-BE49-F238E27FC236}">
-                <a16:creationId xmlns:a16="http://schemas.microsoft.com/office/drawing/2014/main" id="{E06519C6-05F3-431F-9709-0F9071E6620B}"/>
+                <a16:creationId xmlns:a16="http://schemas.microsoft.com/office/drawing/2014/main" id="{AFA6008D-7C72-42B3-8125-38B170F08358}"/>
               </a:ext>
             </a:extLst>
           </p:cNvPr>
@@ -20697,7 +20697,7 @@
           <p:cNvPr id="9" name="">
             <a:extLst xmlns:a="http://schemas.openxmlformats.org/drawingml/2006/main">
               <a:ext uri="{FF2B5EF4-FFF2-40B4-BE49-F238E27FC236}">
-                <a16:creationId xmlns:a16="http://schemas.microsoft.com/office/drawing/2014/main" id="{50E2F45F-9230-4E9A-90D2-DADCE4515C6F}"/>
+                <a16:creationId xmlns:a16="http://schemas.microsoft.com/office/drawing/2014/main" id="{37B90D2D-73E3-467E-B2EF-6BFC5F6D7B97}"/>
               </a:ext>
             </a:extLst>
           </p:cNvPr>
@@ -20761,7 +20761,7 @@
           <p:cNvPr id="10" name="">
             <a:extLst xmlns:a="http://schemas.openxmlformats.org/drawingml/2006/main">
               <a:ext uri="{FF2B5EF4-FFF2-40B4-BE49-F238E27FC236}">
-                <a16:creationId xmlns:a16="http://schemas.microsoft.com/office/drawing/2014/main" id="{D75FA4D6-A0F2-4140-AF46-C34603C9D46E}"/>
+                <a16:creationId xmlns:a16="http://schemas.microsoft.com/office/drawing/2014/main" id="{36AF8B6F-F616-4519-A6DF-745B354EAF56}"/>
               </a:ext>
             </a:extLst>
           </p:cNvPr>
@@ -20796,7 +20796,7 @@
           <p:cNvPr id="11" name="">
             <a:extLst xmlns:a="http://schemas.openxmlformats.org/drawingml/2006/main">
               <a:ext uri="{FF2B5EF4-FFF2-40B4-BE49-F238E27FC236}">
-                <a16:creationId xmlns:a16="http://schemas.microsoft.com/office/drawing/2014/main" id="{9BC19178-3AFD-4698-8391-C6255273C886}"/>
+                <a16:creationId xmlns:a16="http://schemas.microsoft.com/office/drawing/2014/main" id="{D0ED652C-1586-4D3D-ADCD-C849D4A73F09}"/>
               </a:ext>
             </a:extLst>
           </p:cNvPr>
@@ -20860,7 +20860,7 @@
           <p:cNvPr id="12" name="">
             <a:extLst xmlns:a="http://schemas.openxmlformats.org/drawingml/2006/main">
               <a:ext uri="{FF2B5EF4-FFF2-40B4-BE49-F238E27FC236}">
-                <a16:creationId xmlns:a16="http://schemas.microsoft.com/office/drawing/2014/main" id="{30525515-E20B-4CED-A1CE-B9C681DA05BC}"/>
+                <a16:creationId xmlns:a16="http://schemas.microsoft.com/office/drawing/2014/main" id="{90662F79-49FE-42E8-AA64-5A97825748D4}"/>
               </a:ext>
             </a:extLst>
           </p:cNvPr>
@@ -20895,7 +20895,7 @@
           <p:cNvPr id="13" name="">
             <a:extLst xmlns:a="http://schemas.openxmlformats.org/drawingml/2006/main">
               <a:ext uri="{FF2B5EF4-FFF2-40B4-BE49-F238E27FC236}">
-                <a16:creationId xmlns:a16="http://schemas.microsoft.com/office/drawing/2014/main" id="{C4256E3C-C519-40ED-9EFA-FDD78C634081}"/>
+                <a16:creationId xmlns:a16="http://schemas.microsoft.com/office/drawing/2014/main" id="{D3B2A048-E7A4-4CED-8E50-C1DF1E71DD2B}"/>
               </a:ext>
             </a:extLst>
           </p:cNvPr>
@@ -20959,7 +20959,7 @@
           <p:cNvPr id="14" name="">
             <a:extLst xmlns:a="http://schemas.openxmlformats.org/drawingml/2006/main">
               <a:ext uri="{FF2B5EF4-FFF2-40B4-BE49-F238E27FC236}">
-                <a16:creationId xmlns:a16="http://schemas.microsoft.com/office/drawing/2014/main" id="{6294373D-DE08-4C88-B8E5-426F20CA70AB}"/>
+                <a16:creationId xmlns:a16="http://schemas.microsoft.com/office/drawing/2014/main" id="{9D876FC6-CDFE-4334-8C45-4E63091EBC9D}"/>
               </a:ext>
             </a:extLst>
           </p:cNvPr>
@@ -20994,7 +20994,7 @@
           <p:cNvPr id="15" name="">
             <a:extLst xmlns:a="http://schemas.openxmlformats.org/drawingml/2006/main">
               <a:ext uri="{FF2B5EF4-FFF2-40B4-BE49-F238E27FC236}">
-                <a16:creationId xmlns:a16="http://schemas.microsoft.com/office/drawing/2014/main" id="{4FF0E119-842F-4EC1-B2F3-314C8F4572C9}"/>
+                <a16:creationId xmlns:a16="http://schemas.microsoft.com/office/drawing/2014/main" id="{4B471955-8A4C-404C-BD72-D757A785579D}"/>
               </a:ext>
             </a:extLst>
           </p:cNvPr>
@@ -21058,7 +21058,7 @@
           <p:cNvPr id="16" name="">
             <a:extLst xmlns:a="http://schemas.openxmlformats.org/drawingml/2006/main">
               <a:ext uri="{FF2B5EF4-FFF2-40B4-BE49-F238E27FC236}">
-                <a16:creationId xmlns:a16="http://schemas.microsoft.com/office/drawing/2014/main" id="{3278D006-067A-4645-B163-257B62B7822D}"/>
+                <a16:creationId xmlns:a16="http://schemas.microsoft.com/office/drawing/2014/main" id="{1770A09F-6BAC-4AA2-9EF5-7E86B30CC4A6}"/>
               </a:ext>
             </a:extLst>
           </p:cNvPr>
@@ -21122,7 +21122,7 @@
           <p:cNvPr id="17" name="">
             <a:extLst xmlns:a="http://schemas.openxmlformats.org/drawingml/2006/main">
               <a:ext uri="{FF2B5EF4-FFF2-40B4-BE49-F238E27FC236}">
-                <a16:creationId xmlns:a16="http://schemas.microsoft.com/office/drawing/2014/main" id="{B48E22E9-4CA6-4EBF-9CF3-B79480253799}"/>
+                <a16:creationId xmlns:a16="http://schemas.microsoft.com/office/drawing/2014/main" id="{80442FEE-A816-4E37-A27C-F7C9ADB92DA5}"/>
               </a:ext>
             </a:extLst>
           </p:cNvPr>
@@ -21155,7 +21155,7 @@
           <p:cNvPr id="18" name="">
             <a:extLst xmlns:a="http://schemas.openxmlformats.org/drawingml/2006/main">
               <a:ext uri="{FF2B5EF4-FFF2-40B4-BE49-F238E27FC236}">
-                <a16:creationId xmlns:a16="http://schemas.microsoft.com/office/drawing/2014/main" id="{DFBFF3BB-4A1C-465E-BCB0-A8168DB8D754}"/>
+                <a16:creationId xmlns:a16="http://schemas.microsoft.com/office/drawing/2014/main" id="{59AA80CD-16EF-4F9F-A76F-6A44DCB492A8}"/>
               </a:ext>
             </a:extLst>
           </p:cNvPr>
@@ -21219,7 +21219,7 @@
           <p:cNvPr id="19" name="">
             <a:extLst xmlns:a="http://schemas.openxmlformats.org/drawingml/2006/main">
               <a:ext uri="{FF2B5EF4-FFF2-40B4-BE49-F238E27FC236}">
-                <a16:creationId xmlns:a16="http://schemas.microsoft.com/office/drawing/2014/main" id="{470A233F-8866-4A94-99A0-D64D884F3E90}"/>
+                <a16:creationId xmlns:a16="http://schemas.microsoft.com/office/drawing/2014/main" id="{B6739F5A-BC51-4128-A9EC-1F710703A4C1}"/>
               </a:ext>
             </a:extLst>
           </p:cNvPr>
@@ -21252,7 +21252,7 @@
           <p:cNvPr id="20" name="">
             <a:extLst xmlns:a="http://schemas.openxmlformats.org/drawingml/2006/main">
               <a:ext uri="{FF2B5EF4-FFF2-40B4-BE49-F238E27FC236}">
-                <a16:creationId xmlns:a16="http://schemas.microsoft.com/office/drawing/2014/main" id="{B901C091-3812-41BF-A2DB-297A3B32262F}"/>
+                <a16:creationId xmlns:a16="http://schemas.microsoft.com/office/drawing/2014/main" id="{9D6906E2-68E8-4261-872F-FB93C62A84A5}"/>
               </a:ext>
             </a:extLst>
           </p:cNvPr>
@@ -21316,7 +21316,7 @@
           <p:cNvPr id="21" name="">
             <a:extLst xmlns:a="http://schemas.openxmlformats.org/drawingml/2006/main">
               <a:ext uri="{FF2B5EF4-FFF2-40B4-BE49-F238E27FC236}">
-                <a16:creationId xmlns:a16="http://schemas.microsoft.com/office/drawing/2014/main" id="{AA6AFF3F-845B-4997-9265-32046E0AE648}"/>
+                <a16:creationId xmlns:a16="http://schemas.microsoft.com/office/drawing/2014/main" id="{AA7F58AB-8A5C-47C5-94D7-A1C5539F7699}"/>
               </a:ext>
             </a:extLst>
           </p:cNvPr>
@@ -21349,7 +21349,7 @@
           <p:cNvPr id="22" name="">
             <a:extLst xmlns:a="http://schemas.openxmlformats.org/drawingml/2006/main">
               <a:ext uri="{FF2B5EF4-FFF2-40B4-BE49-F238E27FC236}">
-                <a16:creationId xmlns:a16="http://schemas.microsoft.com/office/drawing/2014/main" id="{2016DB0F-8181-431E-9A31-BA407F51B727}"/>
+                <a16:creationId xmlns:a16="http://schemas.microsoft.com/office/drawing/2014/main" id="{DFC07A9B-2EBA-4B71-94F1-D1F7577DA4D2}"/>
               </a:ext>
             </a:extLst>
           </p:cNvPr>
@@ -21413,7 +21413,7 @@
           <p:cNvPr id="23" name="">
             <a:extLst xmlns:a="http://schemas.openxmlformats.org/drawingml/2006/main">
               <a:ext uri="{FF2B5EF4-FFF2-40B4-BE49-F238E27FC236}">
-                <a16:creationId xmlns:a16="http://schemas.microsoft.com/office/drawing/2014/main" id="{47B9DD3D-F78D-4D31-AB23-05D8A287EA9B}"/>
+                <a16:creationId xmlns:a16="http://schemas.microsoft.com/office/drawing/2014/main" id="{0AB26246-481A-4579-9CB6-06FB5A1D421C}"/>
               </a:ext>
             </a:extLst>
           </p:cNvPr>
@@ -21446,7 +21446,7 @@
           <p:cNvPr id="24" name="">
             <a:extLst xmlns:a="http://schemas.openxmlformats.org/drawingml/2006/main">
               <a:ext uri="{FF2B5EF4-FFF2-40B4-BE49-F238E27FC236}">
-                <a16:creationId xmlns:a16="http://schemas.microsoft.com/office/drawing/2014/main" id="{DA134146-162C-406B-B5AF-2663F1A320A2}"/>
+                <a16:creationId xmlns:a16="http://schemas.microsoft.com/office/drawing/2014/main" id="{0C83030E-AC63-4C6F-858D-341922502696}"/>
               </a:ext>
             </a:extLst>
           </p:cNvPr>
@@ -21510,7 +21510,7 @@
           <p:cNvPr id="25" name="">
             <a:extLst xmlns:a="http://schemas.openxmlformats.org/drawingml/2006/main">
               <a:ext uri="{FF2B5EF4-FFF2-40B4-BE49-F238E27FC236}">
-                <a16:creationId xmlns:a16="http://schemas.microsoft.com/office/drawing/2014/main" id="{BA8C5174-F30E-41DB-AC1F-468BDE6E3B89}"/>
+                <a16:creationId xmlns:a16="http://schemas.microsoft.com/office/drawing/2014/main" id="{ED8AF533-3030-4C93-B085-6322ECE9A143}"/>
               </a:ext>
             </a:extLst>
           </p:cNvPr>
@@ -21543,7 +21543,7 @@
           <p:cNvPr id="26" name="">
             <a:extLst xmlns:a="http://schemas.openxmlformats.org/drawingml/2006/main">
               <a:ext uri="{FF2B5EF4-FFF2-40B4-BE49-F238E27FC236}">
-                <a16:creationId xmlns:a16="http://schemas.microsoft.com/office/drawing/2014/main" id="{31D5DE74-53BC-45A0-A588-84CAA063DA78}"/>
+                <a16:creationId xmlns:a16="http://schemas.microsoft.com/office/drawing/2014/main" id="{FC8BAAAD-B83C-4E30-B71A-56FFEA0E2C32}"/>
               </a:ext>
             </a:extLst>
           </p:cNvPr>
@@ -21607,7 +21607,7 @@
           <p:cNvPr id="27" name="">
             <a:extLst xmlns:a="http://schemas.openxmlformats.org/drawingml/2006/main">
               <a:ext uri="{FF2B5EF4-FFF2-40B4-BE49-F238E27FC236}">
-                <a16:creationId xmlns:a16="http://schemas.microsoft.com/office/drawing/2014/main" id="{45ECAA22-BA2A-428C-A70C-763E67D70E61}"/>
+                <a16:creationId xmlns:a16="http://schemas.microsoft.com/office/drawing/2014/main" id="{53A8A9E0-646A-4DE7-A331-30B7E30F8CDB}"/>
               </a:ext>
             </a:extLst>
           </p:cNvPr>
@@ -21640,7 +21640,7 @@
           <p:cNvPr id="28" name="">
             <a:extLst xmlns:a="http://schemas.openxmlformats.org/drawingml/2006/main">
               <a:ext uri="{FF2B5EF4-FFF2-40B4-BE49-F238E27FC236}">
-                <a16:creationId xmlns:a16="http://schemas.microsoft.com/office/drawing/2014/main" id="{BB857344-4500-47E6-AB0D-CD6CD553B946}"/>
+                <a16:creationId xmlns:a16="http://schemas.microsoft.com/office/drawing/2014/main" id="{8F418803-7C2A-46EE-8AC9-0DF4A255FAD9}"/>
               </a:ext>
             </a:extLst>
           </p:cNvPr>
@@ -21704,7 +21704,7 @@
           <p:cNvPr id="29" name="">
             <a:extLst xmlns:a="http://schemas.openxmlformats.org/drawingml/2006/main">
               <a:ext uri="{FF2B5EF4-FFF2-40B4-BE49-F238E27FC236}">
-                <a16:creationId xmlns:a16="http://schemas.microsoft.com/office/drawing/2014/main" id="{E5B553F5-C7BF-4C36-A65D-1E2827ED193F}"/>
+                <a16:creationId xmlns:a16="http://schemas.microsoft.com/office/drawing/2014/main" id="{506BCAEB-0FCC-4D17-B379-397E8AEBF7B7}"/>
               </a:ext>
             </a:extLst>
           </p:cNvPr>
@@ -21737,7 +21737,7 @@
           <p:cNvPr id="30" name="">
             <a:extLst xmlns:a="http://schemas.openxmlformats.org/drawingml/2006/main">
               <a:ext uri="{FF2B5EF4-FFF2-40B4-BE49-F238E27FC236}">
-                <a16:creationId xmlns:a16="http://schemas.microsoft.com/office/drawing/2014/main" id="{F2D79CE9-607D-459A-87CB-207EC3C60A6E}"/>
+                <a16:creationId xmlns:a16="http://schemas.microsoft.com/office/drawing/2014/main" id="{F41A73C0-AD7D-4CE8-9697-055EA2CBEDFD}"/>
               </a:ext>
             </a:extLst>
           </p:cNvPr>
@@ -21801,7 +21801,7 @@
           <p:cNvPr id="31" name="">
             <a:extLst xmlns:a="http://schemas.openxmlformats.org/drawingml/2006/main">
               <a:ext uri="{FF2B5EF4-FFF2-40B4-BE49-F238E27FC236}">
-                <a16:creationId xmlns:a16="http://schemas.microsoft.com/office/drawing/2014/main" id="{E5DE1CEB-DB85-416A-9F3E-D1FCE7DEA01E}"/>
+                <a16:creationId xmlns:a16="http://schemas.microsoft.com/office/drawing/2014/main" id="{CAC10F62-D378-484B-AB34-6CB9A2D0D2C8}"/>
               </a:ext>
             </a:extLst>
           </p:cNvPr>
@@ -21834,7 +21834,7 @@
           <p:cNvPr id="32" name="">
             <a:extLst xmlns:a="http://schemas.openxmlformats.org/drawingml/2006/main">
               <a:ext uri="{FF2B5EF4-FFF2-40B4-BE49-F238E27FC236}">
-                <a16:creationId xmlns:a16="http://schemas.microsoft.com/office/drawing/2014/main" id="{C4F6A8A9-FC76-4E5D-9A05-9C2758DA532E}"/>
+                <a16:creationId xmlns:a16="http://schemas.microsoft.com/office/drawing/2014/main" id="{EB0314B5-4B8D-49D2-A47A-2816859CE346}"/>
               </a:ext>
             </a:extLst>
           </p:cNvPr>
@@ -21898,7 +21898,7 @@
           <p:cNvPr id="33" name="">
             <a:extLst xmlns:a="http://schemas.openxmlformats.org/drawingml/2006/main">
               <a:ext uri="{FF2B5EF4-FFF2-40B4-BE49-F238E27FC236}">
-                <a16:creationId xmlns:a16="http://schemas.microsoft.com/office/drawing/2014/main" id="{4C1667EF-2FE7-42BC-BDAE-1987049D06AF}"/>
+                <a16:creationId xmlns:a16="http://schemas.microsoft.com/office/drawing/2014/main" id="{B01E377A-F5B7-4E7C-B917-915914AFEEA7}"/>
               </a:ext>
             </a:extLst>
           </p:cNvPr>
@@ -21931,7 +21931,7 @@
           <p:cNvPr id="34" name="">
             <a:extLst xmlns:a="http://schemas.openxmlformats.org/drawingml/2006/main">
               <a:ext uri="{FF2B5EF4-FFF2-40B4-BE49-F238E27FC236}">
-                <a16:creationId xmlns:a16="http://schemas.microsoft.com/office/drawing/2014/main" id="{E49343B3-856D-4142-AE70-7EBDD85CDEDF}"/>
+                <a16:creationId xmlns:a16="http://schemas.microsoft.com/office/drawing/2014/main" id="{E0580E00-4324-4F9C-8057-00601A42C182}"/>
               </a:ext>
             </a:extLst>
           </p:cNvPr>
@@ -21995,7 +21995,7 @@
           <p:cNvPr id="35" name="">
             <a:extLst xmlns:a="http://schemas.openxmlformats.org/drawingml/2006/main">
               <a:ext uri="{FF2B5EF4-FFF2-40B4-BE49-F238E27FC236}">
-                <a16:creationId xmlns:a16="http://schemas.microsoft.com/office/drawing/2014/main" id="{A35BB2ED-DA7F-4595-B9DE-893FB6859542}"/>
+                <a16:creationId xmlns:a16="http://schemas.microsoft.com/office/drawing/2014/main" id="{8F42186F-A601-4A6B-8743-1EFC3EE2916A}"/>
               </a:ext>
             </a:extLst>
           </p:cNvPr>
@@ -22028,7 +22028,7 @@
           <p:cNvPr id="36" name="">
             <a:extLst xmlns:a="http://schemas.openxmlformats.org/drawingml/2006/main">
               <a:ext uri="{FF2B5EF4-FFF2-40B4-BE49-F238E27FC236}">
-                <a16:creationId xmlns:a16="http://schemas.microsoft.com/office/drawing/2014/main" id="{14B0BDCB-997E-4ED7-8B87-695E01370E91}"/>
+                <a16:creationId xmlns:a16="http://schemas.microsoft.com/office/drawing/2014/main" id="{306C2026-266B-4FD9-B37E-71C2BB198C99}"/>
               </a:ext>
             </a:extLst>
           </p:cNvPr>
@@ -22092,7 +22092,7 @@
           <p:cNvPr id="37" name="">
             <a:extLst xmlns:a="http://schemas.openxmlformats.org/drawingml/2006/main">
               <a:ext uri="{FF2B5EF4-FFF2-40B4-BE49-F238E27FC236}">
-                <a16:creationId xmlns:a16="http://schemas.microsoft.com/office/drawing/2014/main" id="{C5736C58-0C79-41C4-86BD-533C25E08792}"/>
+                <a16:creationId xmlns:a16="http://schemas.microsoft.com/office/drawing/2014/main" id="{F2454011-C6B9-4A42-81B0-708807AFC10B}"/>
               </a:ext>
             </a:extLst>
           </p:cNvPr>
@@ -22125,7 +22125,7 @@
           <p:cNvPr id="38" name="">
             <a:extLst xmlns:a="http://schemas.openxmlformats.org/drawingml/2006/main">
               <a:ext uri="{FF2B5EF4-FFF2-40B4-BE49-F238E27FC236}">
-                <a16:creationId xmlns:a16="http://schemas.microsoft.com/office/drawing/2014/main" id="{0F83EAB6-F26B-4FFE-8E66-F9430318E574}"/>
+                <a16:creationId xmlns:a16="http://schemas.microsoft.com/office/drawing/2014/main" id="{A565B708-88BF-4FE7-8531-226F1EB74E1D}"/>
               </a:ext>
             </a:extLst>
           </p:cNvPr>
@@ -22189,7 +22189,7 @@
           <p:cNvPr id="39" name="">
             <a:extLst xmlns:a="http://schemas.openxmlformats.org/drawingml/2006/main">
               <a:ext uri="{FF2B5EF4-FFF2-40B4-BE49-F238E27FC236}">
-                <a16:creationId xmlns:a16="http://schemas.microsoft.com/office/drawing/2014/main" id="{973375E1-B564-4850-A98A-C399E5CCB4B1}"/>
+                <a16:creationId xmlns:a16="http://schemas.microsoft.com/office/drawing/2014/main" id="{D99B2BB5-1EB7-4589-AE05-FBA1514BA8B6}"/>
               </a:ext>
             </a:extLst>
           </p:cNvPr>
@@ -22222,7 +22222,7 @@
           <p:cNvPr id="40" name="">
             <a:extLst xmlns:a="http://schemas.openxmlformats.org/drawingml/2006/main">
               <a:ext uri="{FF2B5EF4-FFF2-40B4-BE49-F238E27FC236}">
-                <a16:creationId xmlns:a16="http://schemas.microsoft.com/office/drawing/2014/main" id="{0961B8EA-7D50-41A8-BD12-1374B1C4A89C}"/>
+                <a16:creationId xmlns:a16="http://schemas.microsoft.com/office/drawing/2014/main" id="{3A7CB5CF-0F44-4831-8D81-A15C618C6DA5}"/>
               </a:ext>
             </a:extLst>
           </p:cNvPr>
@@ -22286,7 +22286,7 @@
           <p:cNvPr id="41" name="">
             <a:extLst xmlns:a="http://schemas.openxmlformats.org/drawingml/2006/main">
               <a:ext uri="{FF2B5EF4-FFF2-40B4-BE49-F238E27FC236}">
-                <a16:creationId xmlns:a16="http://schemas.microsoft.com/office/drawing/2014/main" id="{71AC2F1E-C36C-485D-AF1B-EEACE4EA2183}"/>
+                <a16:creationId xmlns:a16="http://schemas.microsoft.com/office/drawing/2014/main" id="{DE4F40A6-1D3A-4B21-BC66-6127CE7E179D}"/>
               </a:ext>
             </a:extLst>
           </p:cNvPr>
@@ -22319,7 +22319,7 @@
           <p:cNvPr id="42" name="">
             <a:extLst xmlns:a="http://schemas.openxmlformats.org/drawingml/2006/main">
               <a:ext uri="{FF2B5EF4-FFF2-40B4-BE49-F238E27FC236}">
-                <a16:creationId xmlns:a16="http://schemas.microsoft.com/office/drawing/2014/main" id="{48057DC2-50E5-494E-A4E8-BAC230F7205C}"/>
+                <a16:creationId xmlns:a16="http://schemas.microsoft.com/office/drawing/2014/main" id="{79B1D7A8-925F-4B1E-8DF0-B8584FC0D400}"/>
               </a:ext>
             </a:extLst>
           </p:cNvPr>
@@ -22383,7 +22383,7 @@
           <p:cNvPr id="43" name="">
             <a:extLst xmlns:a="http://schemas.openxmlformats.org/drawingml/2006/main">
               <a:ext uri="{FF2B5EF4-FFF2-40B4-BE49-F238E27FC236}">
-                <a16:creationId xmlns:a16="http://schemas.microsoft.com/office/drawing/2014/main" id="{3F67E638-EF1B-4DE4-88A8-1212D2B2C735}"/>
+                <a16:creationId xmlns:a16="http://schemas.microsoft.com/office/drawing/2014/main" id="{19F74E95-ECCA-43F3-B9F0-3DCF69AC8677}"/>
               </a:ext>
             </a:extLst>
           </p:cNvPr>
@@ -22416,7 +22416,7 @@
           <p:cNvPr id="44" name="">
             <a:extLst xmlns:a="http://schemas.openxmlformats.org/drawingml/2006/main">
               <a:ext uri="{FF2B5EF4-FFF2-40B4-BE49-F238E27FC236}">
-                <a16:creationId xmlns:a16="http://schemas.microsoft.com/office/drawing/2014/main" id="{F9B14DDC-934F-4104-8D6B-89AB7454DEB6}"/>
+                <a16:creationId xmlns:a16="http://schemas.microsoft.com/office/drawing/2014/main" id="{077C2929-D6EB-4DC5-9079-64E296CFBDC6}"/>
               </a:ext>
             </a:extLst>
           </p:cNvPr>
@@ -22480,7 +22480,7 @@
           <p:cNvPr id="45" name="">
             <a:extLst xmlns:a="http://schemas.openxmlformats.org/drawingml/2006/main">
               <a:ext uri="{FF2B5EF4-FFF2-40B4-BE49-F238E27FC236}">
-                <a16:creationId xmlns:a16="http://schemas.microsoft.com/office/drawing/2014/main" id="{C89429B4-3DF1-49E2-8795-B8160CD60AC3}"/>
+                <a16:creationId xmlns:a16="http://schemas.microsoft.com/office/drawing/2014/main" id="{A432DE92-40DE-43CA-8160-475EC6E48F70}"/>
               </a:ext>
             </a:extLst>
           </p:cNvPr>
@@ -22513,7 +22513,7 @@
           <p:cNvPr id="46" name="">
             <a:extLst xmlns:a="http://schemas.openxmlformats.org/drawingml/2006/main">
               <a:ext uri="{FF2B5EF4-FFF2-40B4-BE49-F238E27FC236}">
-                <a16:creationId xmlns:a16="http://schemas.microsoft.com/office/drawing/2014/main" id="{E23D65B5-FADB-40A9-8BD0-1AF2A3009E86}"/>
+                <a16:creationId xmlns:a16="http://schemas.microsoft.com/office/drawing/2014/main" id="{E27054E1-55CC-4C4C-9BE9-5661565A9F76}"/>
               </a:ext>
             </a:extLst>
           </p:cNvPr>
@@ -22577,7 +22577,7 @@
           <p:cNvPr id="47" name="">
             <a:extLst xmlns:a="http://schemas.openxmlformats.org/drawingml/2006/main">
               <a:ext uri="{FF2B5EF4-FFF2-40B4-BE49-F238E27FC236}">
-                <a16:creationId xmlns:a16="http://schemas.microsoft.com/office/drawing/2014/main" id="{E3C8486C-F201-480F-99DE-0CB70AA73E38}"/>
+                <a16:creationId xmlns:a16="http://schemas.microsoft.com/office/drawing/2014/main" id="{27E777DA-AB7E-4026-9395-47E86B69AE35}"/>
               </a:ext>
             </a:extLst>
           </p:cNvPr>
@@ -22610,7 +22610,7 @@
           <p:cNvPr id="48" name="">
             <a:extLst xmlns:a="http://schemas.openxmlformats.org/drawingml/2006/main">
               <a:ext uri="{FF2B5EF4-FFF2-40B4-BE49-F238E27FC236}">
-                <a16:creationId xmlns:a16="http://schemas.microsoft.com/office/drawing/2014/main" id="{38271314-839F-4A3C-8216-4CBCCB8E6DF4}"/>
+                <a16:creationId xmlns:a16="http://schemas.microsoft.com/office/drawing/2014/main" id="{0FA6519B-FBA1-41B1-BCF0-1AB275D5801A}"/>
               </a:ext>
             </a:extLst>
           </p:cNvPr>
@@ -22674,7 +22674,7 @@
           <p:cNvPr id="49" name="">
             <a:extLst xmlns:a="http://schemas.openxmlformats.org/drawingml/2006/main">
               <a:ext uri="{FF2B5EF4-FFF2-40B4-BE49-F238E27FC236}">
-                <a16:creationId xmlns:a16="http://schemas.microsoft.com/office/drawing/2014/main" id="{3317F689-1ACE-455B-94F0-749F81D4EEEA}"/>
+                <a16:creationId xmlns:a16="http://schemas.microsoft.com/office/drawing/2014/main" id="{D03B776B-DE0B-4838-8900-366B0EB17E9F}"/>
               </a:ext>
             </a:extLst>
           </p:cNvPr>
@@ -22707,7 +22707,7 @@
           <p:cNvPr id="50" name="">
             <a:extLst xmlns:a="http://schemas.openxmlformats.org/drawingml/2006/main">
               <a:ext uri="{FF2B5EF4-FFF2-40B4-BE49-F238E27FC236}">
-                <a16:creationId xmlns:a16="http://schemas.microsoft.com/office/drawing/2014/main" id="{35AD4A21-6B0B-4D5A-B395-C425BE60EC42}"/>
+                <a16:creationId xmlns:a16="http://schemas.microsoft.com/office/drawing/2014/main" id="{7BE5B814-C944-46EB-9F0A-8773A8362DB6}"/>
               </a:ext>
             </a:extLst>
           </p:cNvPr>
@@ -22771,7 +22771,7 @@
           <p:cNvPr id="51" name="">
             <a:extLst xmlns:a="http://schemas.openxmlformats.org/drawingml/2006/main">
               <a:ext uri="{FF2B5EF4-FFF2-40B4-BE49-F238E27FC236}">
-                <a16:creationId xmlns:a16="http://schemas.microsoft.com/office/drawing/2014/main" id="{5E89F586-D538-490F-9CFA-CAAE93858CDE}"/>
+                <a16:creationId xmlns:a16="http://schemas.microsoft.com/office/drawing/2014/main" id="{1F60B3A8-E01D-48ED-963F-F9F5B245A5B7}"/>
               </a:ext>
             </a:extLst>
           </p:cNvPr>
@@ -22804,7 +22804,7 @@
           <p:cNvPr id="52" name="">
             <a:extLst xmlns:a="http://schemas.openxmlformats.org/drawingml/2006/main">
               <a:ext uri="{FF2B5EF4-FFF2-40B4-BE49-F238E27FC236}">
-                <a16:creationId xmlns:a16="http://schemas.microsoft.com/office/drawing/2014/main" id="{CC3F20A5-6617-447B-831E-D78BB8D5AB02}"/>
+                <a16:creationId xmlns:a16="http://schemas.microsoft.com/office/drawing/2014/main" id="{000E9812-C781-4845-B2C0-3F0E5847E7D5}"/>
               </a:ext>
             </a:extLst>
           </p:cNvPr>
@@ -22868,7 +22868,7 @@
           <p:cNvPr id="53" name="">
             <a:extLst xmlns:a="http://schemas.openxmlformats.org/drawingml/2006/main">
               <a:ext uri="{FF2B5EF4-FFF2-40B4-BE49-F238E27FC236}">
-                <a16:creationId xmlns:a16="http://schemas.microsoft.com/office/drawing/2014/main" id="{C0AB44AA-78C4-4297-8D74-4EBC3F219864}"/>
+                <a16:creationId xmlns:a16="http://schemas.microsoft.com/office/drawing/2014/main" id="{14CAC3B2-E48D-40E0-B3EE-B24723928657}"/>
               </a:ext>
             </a:extLst>
           </p:cNvPr>
@@ -22901,7 +22901,7 @@
           <p:cNvPr id="54" name="">
             <a:extLst xmlns:a="http://schemas.openxmlformats.org/drawingml/2006/main">
               <a:ext uri="{FF2B5EF4-FFF2-40B4-BE49-F238E27FC236}">
-                <a16:creationId xmlns:a16="http://schemas.microsoft.com/office/drawing/2014/main" id="{9400A316-35E8-4760-BC5C-30C53FC2BF02}"/>
+                <a16:creationId xmlns:a16="http://schemas.microsoft.com/office/drawing/2014/main" id="{444DF448-C91F-4A14-8C93-634833249D6C}"/>
               </a:ext>
             </a:extLst>
           </p:cNvPr>
@@ -22965,7 +22965,7 @@
           <p:cNvPr id="55" name="">
             <a:extLst xmlns:a="http://schemas.openxmlformats.org/drawingml/2006/main">
               <a:ext uri="{FF2B5EF4-FFF2-40B4-BE49-F238E27FC236}">
-                <a16:creationId xmlns:a16="http://schemas.microsoft.com/office/drawing/2014/main" id="{840F90C9-5852-4A32-97B8-6FCA2B4AA788}"/>
+                <a16:creationId xmlns:a16="http://schemas.microsoft.com/office/drawing/2014/main" id="{08B4A916-E857-42AE-8476-88EEFDF44E3B}"/>
               </a:ext>
             </a:extLst>
           </p:cNvPr>
@@ -22998,7 +22998,7 @@
           <p:cNvPr id="56" name="">
             <a:extLst xmlns:a="http://schemas.openxmlformats.org/drawingml/2006/main">
               <a:ext uri="{FF2B5EF4-FFF2-40B4-BE49-F238E27FC236}">
-                <a16:creationId xmlns:a16="http://schemas.microsoft.com/office/drawing/2014/main" id="{99BCDB9B-29AF-4B6E-A23C-4AF6EDED4D7C}"/>
+                <a16:creationId xmlns:a16="http://schemas.microsoft.com/office/drawing/2014/main" id="{BD8033FC-2BEC-4081-8C4E-F46D98D20094}"/>
               </a:ext>
             </a:extLst>
           </p:cNvPr>
@@ -23062,7 +23062,7 @@
           <p:cNvPr id="57" name="">
             <a:extLst xmlns:a="http://schemas.openxmlformats.org/drawingml/2006/main">
               <a:ext uri="{FF2B5EF4-FFF2-40B4-BE49-F238E27FC236}">
-                <a16:creationId xmlns:a16="http://schemas.microsoft.com/office/drawing/2014/main" id="{4D5C1CCD-DFF1-4442-B265-DD1776CEB6E1}"/>
+                <a16:creationId xmlns:a16="http://schemas.microsoft.com/office/drawing/2014/main" id="{DF9670A1-4049-4285-82B5-386E95D9FA62}"/>
               </a:ext>
             </a:extLst>
           </p:cNvPr>
@@ -23095,7 +23095,7 @@
           <p:cNvPr id="58" name="">
             <a:extLst xmlns:a="http://schemas.openxmlformats.org/drawingml/2006/main">
               <a:ext uri="{FF2B5EF4-FFF2-40B4-BE49-F238E27FC236}">
-                <a16:creationId xmlns:a16="http://schemas.microsoft.com/office/drawing/2014/main" id="{3E64ED96-7A6B-4F06-8328-CDD64D8B7D4B}"/>
+                <a16:creationId xmlns:a16="http://schemas.microsoft.com/office/drawing/2014/main" id="{5DE94EF0-4532-4E6E-8FEB-A90217896042}"/>
               </a:ext>
             </a:extLst>
           </p:cNvPr>
@@ -23159,7 +23159,7 @@
           <p:cNvPr id="59" name="">
             <a:extLst xmlns:a="http://schemas.openxmlformats.org/drawingml/2006/main">
               <a:ext uri="{FF2B5EF4-FFF2-40B4-BE49-F238E27FC236}">
-                <a16:creationId xmlns:a16="http://schemas.microsoft.com/office/drawing/2014/main" id="{4B9DA907-976F-4C3B-A801-38EA0E2202B7}"/>
+                <a16:creationId xmlns:a16="http://schemas.microsoft.com/office/drawing/2014/main" id="{D1A4F2FA-5F37-438D-AC33-13F6A34D194D}"/>
               </a:ext>
             </a:extLst>
           </p:cNvPr>
@@ -23223,7 +23223,7 @@
           <p:cNvPr id="60" name="">
             <a:extLst xmlns:a="http://schemas.openxmlformats.org/drawingml/2006/main">
               <a:ext uri="{FF2B5EF4-FFF2-40B4-BE49-F238E27FC236}">
-                <a16:creationId xmlns:a16="http://schemas.microsoft.com/office/drawing/2014/main" id="{72902AFA-D668-4EE3-A268-A124D67EA722}"/>
+                <a16:creationId xmlns:a16="http://schemas.microsoft.com/office/drawing/2014/main" id="{41DD5A3F-E0E8-42FD-AF00-04445500ED32}"/>
               </a:ext>
             </a:extLst>
           </p:cNvPr>
@@ -23287,7 +23287,7 @@
           <p:cNvPr id="61" name="">
             <a:extLst xmlns:a="http://schemas.openxmlformats.org/drawingml/2006/main">
               <a:ext uri="{FF2B5EF4-FFF2-40B4-BE49-F238E27FC236}">
-                <a16:creationId xmlns:a16="http://schemas.microsoft.com/office/drawing/2014/main" id="{2CB80396-045D-411B-A926-6A4C4D0BB26D}"/>
+                <a16:creationId xmlns:a16="http://schemas.microsoft.com/office/drawing/2014/main" id="{A36DDE5C-1BFB-4729-89B2-377FF17E6EE0}"/>
               </a:ext>
             </a:extLst>
           </p:cNvPr>
@@ -23351,7 +23351,7 @@
           <p:cNvPr id="62" name="">
             <a:extLst xmlns:a="http://schemas.openxmlformats.org/drawingml/2006/main">
               <a:ext uri="{FF2B5EF4-FFF2-40B4-BE49-F238E27FC236}">
-                <a16:creationId xmlns:a16="http://schemas.microsoft.com/office/drawing/2014/main" id="{0410EA43-4A45-410B-94D8-A055026756D0}"/>
+                <a16:creationId xmlns:a16="http://schemas.microsoft.com/office/drawing/2014/main" id="{F3C2232A-1F14-4D08-A5F8-B8099C094A93}"/>
               </a:ext>
             </a:extLst>
           </p:cNvPr>
@@ -23415,7 +23415,7 @@
           <p:cNvPr id="63" name="">
             <a:extLst xmlns:a="http://schemas.openxmlformats.org/drawingml/2006/main">
               <a:ext uri="{FF2B5EF4-FFF2-40B4-BE49-F238E27FC236}">
-                <a16:creationId xmlns:a16="http://schemas.microsoft.com/office/drawing/2014/main" id="{B59B88DA-6AD9-421C-B104-1B00856FD058}"/>
+                <a16:creationId xmlns:a16="http://schemas.microsoft.com/office/drawing/2014/main" id="{58C21F7E-AE0F-4FED-8850-45A55A74BDCC}"/>
               </a:ext>
             </a:extLst>
           </p:cNvPr>
@@ -23477,7 +23477,7 @@
     </p:spTree>
     <p:extLst>
       <p:ext uri="{BB962C8B-B14F-4D97-AF65-F5344CB8AC3E}">
-        <p14:creationId xmlns:p14="http://schemas.microsoft.com/office/powerpoint/2010/main" val="308332278"/>
+        <p14:creationId xmlns:p14="http://schemas.microsoft.com/office/powerpoint/2010/main" val="1637086760"/>
       </p:ext>
     </p:extLst>
   </p:cSld>
@@ -23501,7 +23501,7 @@
           <p:cNvPr id="1" name="">
             <a:extLst xmlns:a="http://schemas.openxmlformats.org/drawingml/2006/main">
               <a:ext uri="{FF2B5EF4-FFF2-40B4-BE49-F238E27FC236}">
-                <a16:creationId xmlns:a16="http://schemas.microsoft.com/office/drawing/2014/main" id="{30582013-61F8-4FD9-8B56-FE310143371E}"/>
+                <a16:creationId xmlns:a16="http://schemas.microsoft.com/office/drawing/2014/main" id="{D309081F-90EE-4A61-9E2A-9803133CD15D}"/>
               </a:ext>
             </a:extLst>
           </p:cNvPr>
@@ -23536,7 +23536,7 @@
           <p:cNvPr id="2" name="">
             <a:extLst xmlns:a="http://schemas.openxmlformats.org/drawingml/2006/main">
               <a:ext uri="{FF2B5EF4-FFF2-40B4-BE49-F238E27FC236}">
-                <a16:creationId xmlns:a16="http://schemas.microsoft.com/office/drawing/2014/main" id="{22D39CA7-B572-4CBF-9193-EB44994FE969}"/>
+                <a16:creationId xmlns:a16="http://schemas.microsoft.com/office/drawing/2014/main" id="{878DAF8F-792D-424E-8020-353B622ECE34}"/>
               </a:ext>
             </a:extLst>
           </p:cNvPr>
@@ -23600,7 +23600,7 @@
           <p:cNvPr id="3" name="">
             <a:extLst xmlns:a="http://schemas.openxmlformats.org/drawingml/2006/main">
               <a:ext uri="{FF2B5EF4-FFF2-40B4-BE49-F238E27FC236}">
-                <a16:creationId xmlns:a16="http://schemas.microsoft.com/office/drawing/2014/main" id="{2B668BB9-FF35-482E-8BB9-A91409C3DB7B}"/>
+                <a16:creationId xmlns:a16="http://schemas.microsoft.com/office/drawing/2014/main" id="{B7C1EAF2-D5CC-4D2F-8825-B371C3DAE5F3}"/>
               </a:ext>
             </a:extLst>
           </p:cNvPr>
@@ -23664,7 +23664,7 @@
           <p:cNvPr id="4" name="">
             <a:extLst xmlns:a="http://schemas.openxmlformats.org/drawingml/2006/main">
               <a:ext uri="{FF2B5EF4-FFF2-40B4-BE49-F238E27FC236}">
-                <a16:creationId xmlns:a16="http://schemas.microsoft.com/office/drawing/2014/main" id="{21419C71-F213-490A-A325-563C3371B34F}"/>
+                <a16:creationId xmlns:a16="http://schemas.microsoft.com/office/drawing/2014/main" id="{3B347363-EF1E-4387-88AD-7669C3776488}"/>
               </a:ext>
             </a:extLst>
           </p:cNvPr>
@@ -23728,7 +23728,7 @@
           <p:cNvPr id="5" name="">
             <a:extLst xmlns:a="http://schemas.openxmlformats.org/drawingml/2006/main">
               <a:ext uri="{FF2B5EF4-FFF2-40B4-BE49-F238E27FC236}">
-                <a16:creationId xmlns:a16="http://schemas.microsoft.com/office/drawing/2014/main" id="{B7FC7931-D55E-4175-A967-691E241EA1D0}"/>
+                <a16:creationId xmlns:a16="http://schemas.microsoft.com/office/drawing/2014/main" id="{C6AC8D0A-7A31-472A-8263-24D3D4C7424C}"/>
               </a:ext>
             </a:extLst>
           </p:cNvPr>
@@ -23761,7 +23761,7 @@
           <p:cNvPr id="6" name="">
             <a:extLst xmlns:a="http://schemas.openxmlformats.org/drawingml/2006/main">
               <a:ext uri="{FF2B5EF4-FFF2-40B4-BE49-F238E27FC236}">
-                <a16:creationId xmlns:a16="http://schemas.microsoft.com/office/drawing/2014/main" id="{B86DBAB6-6AAE-4498-986B-5ACC94A4166A}"/>
+                <a16:creationId xmlns:a16="http://schemas.microsoft.com/office/drawing/2014/main" id="{D46162F9-79EF-44C2-92CF-EBB148675381}"/>
               </a:ext>
             </a:extLst>
           </p:cNvPr>
@@ -23794,7 +23794,7 @@
           <p:cNvPr id="7" name="">
             <a:extLst xmlns:a="http://schemas.openxmlformats.org/drawingml/2006/main">
               <a:ext uri="{FF2B5EF4-FFF2-40B4-BE49-F238E27FC236}">
-                <a16:creationId xmlns:a16="http://schemas.microsoft.com/office/drawing/2014/main" id="{1C9613E0-BCA3-484E-B7BB-E6E18435C26C}"/>
+                <a16:creationId xmlns:a16="http://schemas.microsoft.com/office/drawing/2014/main" id="{D8E49AB6-928E-4C4B-9086-F9AF134454F2}"/>
               </a:ext>
             </a:extLst>
           </p:cNvPr>
@@ -23858,7 +23858,7 @@
           <p:cNvPr id="8" name="">
             <a:extLst xmlns:a="http://schemas.openxmlformats.org/drawingml/2006/main">
               <a:ext uri="{FF2B5EF4-FFF2-40B4-BE49-F238E27FC236}">
-                <a16:creationId xmlns:a16="http://schemas.microsoft.com/office/drawing/2014/main" id="{A3099923-1AAA-475D-888C-0629ED05CF62}"/>
+                <a16:creationId xmlns:a16="http://schemas.microsoft.com/office/drawing/2014/main" id="{8AA5654D-2165-4686-8C3F-2F399A0ABF36}"/>
               </a:ext>
             </a:extLst>
           </p:cNvPr>
@@ -23893,7 +23893,7 @@
           <p:cNvPr id="9" name="">
             <a:extLst xmlns:a="http://schemas.openxmlformats.org/drawingml/2006/main">
               <a:ext uri="{FF2B5EF4-FFF2-40B4-BE49-F238E27FC236}">
-                <a16:creationId xmlns:a16="http://schemas.microsoft.com/office/drawing/2014/main" id="{63F3E42F-EA73-417A-BEE3-249EB2B0C11A}"/>
+                <a16:creationId xmlns:a16="http://schemas.microsoft.com/office/drawing/2014/main" id="{5320CFC3-CC2B-4B54-AB0B-BC7AEB17D5B2}"/>
               </a:ext>
             </a:extLst>
           </p:cNvPr>
@@ -23957,7 +23957,7 @@
           <p:cNvPr id="10" name="">
             <a:extLst xmlns:a="http://schemas.openxmlformats.org/drawingml/2006/main">
               <a:ext uri="{FF2B5EF4-FFF2-40B4-BE49-F238E27FC236}">
-                <a16:creationId xmlns:a16="http://schemas.microsoft.com/office/drawing/2014/main" id="{0952A7D5-C074-4237-B5B5-358714CD41E3}"/>
+                <a16:creationId xmlns:a16="http://schemas.microsoft.com/office/drawing/2014/main" id="{3C18F703-A201-4ADD-8F6B-2289F763CD38}"/>
               </a:ext>
             </a:extLst>
           </p:cNvPr>
@@ -23992,7 +23992,7 @@
           <p:cNvPr id="11" name="">
             <a:extLst xmlns:a="http://schemas.openxmlformats.org/drawingml/2006/main">
               <a:ext uri="{FF2B5EF4-FFF2-40B4-BE49-F238E27FC236}">
-                <a16:creationId xmlns:a16="http://schemas.microsoft.com/office/drawing/2014/main" id="{AEECFC51-6391-4A13-906C-5328BD68E121}"/>
+                <a16:creationId xmlns:a16="http://schemas.microsoft.com/office/drawing/2014/main" id="{C820BF3B-94F3-466D-9638-780F545A17AA}"/>
               </a:ext>
             </a:extLst>
           </p:cNvPr>
@@ -24056,7 +24056,7 @@
           <p:cNvPr id="12" name="">
             <a:extLst xmlns:a="http://schemas.openxmlformats.org/drawingml/2006/main">
               <a:ext uri="{FF2B5EF4-FFF2-40B4-BE49-F238E27FC236}">
-                <a16:creationId xmlns:a16="http://schemas.microsoft.com/office/drawing/2014/main" id="{39B1940A-1C01-4AA2-90E9-ABF702B2AB46}"/>
+                <a16:creationId xmlns:a16="http://schemas.microsoft.com/office/drawing/2014/main" id="{023BFB9B-85D8-4352-8A58-2EDD2CF5A2A8}"/>
               </a:ext>
             </a:extLst>
           </p:cNvPr>
@@ -24091,7 +24091,7 @@
           <p:cNvPr id="13" name="">
             <a:extLst xmlns:a="http://schemas.openxmlformats.org/drawingml/2006/main">
               <a:ext uri="{FF2B5EF4-FFF2-40B4-BE49-F238E27FC236}">
-                <a16:creationId xmlns:a16="http://schemas.microsoft.com/office/drawing/2014/main" id="{2E10BEC7-4761-4F2E-8891-C5F8EABD0BDD}"/>
+                <a16:creationId xmlns:a16="http://schemas.microsoft.com/office/drawing/2014/main" id="{E2A5A73A-419F-4960-97CA-5250BC59F916}"/>
               </a:ext>
             </a:extLst>
           </p:cNvPr>
@@ -24155,7 +24155,7 @@
           <p:cNvPr id="14" name="">
             <a:extLst xmlns:a="http://schemas.openxmlformats.org/drawingml/2006/main">
               <a:ext uri="{FF2B5EF4-FFF2-40B4-BE49-F238E27FC236}">
-                <a16:creationId xmlns:a16="http://schemas.microsoft.com/office/drawing/2014/main" id="{6E955477-F369-4952-A751-56447D4752D5}"/>
+                <a16:creationId xmlns:a16="http://schemas.microsoft.com/office/drawing/2014/main" id="{101F03EE-E086-47CE-B216-EA8EB6745166}"/>
               </a:ext>
             </a:extLst>
           </p:cNvPr>
@@ -24190,7 +24190,7 @@
           <p:cNvPr id="15" name="">
             <a:extLst xmlns:a="http://schemas.openxmlformats.org/drawingml/2006/main">
               <a:ext uri="{FF2B5EF4-FFF2-40B4-BE49-F238E27FC236}">
-                <a16:creationId xmlns:a16="http://schemas.microsoft.com/office/drawing/2014/main" id="{8D3C374F-28D9-43CD-AC40-0B8A5372A1D3}"/>
+                <a16:creationId xmlns:a16="http://schemas.microsoft.com/office/drawing/2014/main" id="{5C873B33-554C-4746-A18D-691CF741930E}"/>
               </a:ext>
             </a:extLst>
           </p:cNvPr>
@@ -24254,7 +24254,7 @@
           <p:cNvPr id="16" name="">
             <a:extLst xmlns:a="http://schemas.openxmlformats.org/drawingml/2006/main">
               <a:ext uri="{FF2B5EF4-FFF2-40B4-BE49-F238E27FC236}">
-                <a16:creationId xmlns:a16="http://schemas.microsoft.com/office/drawing/2014/main" id="{DAA50F67-2B92-4066-9107-64B3645960D7}"/>
+                <a16:creationId xmlns:a16="http://schemas.microsoft.com/office/drawing/2014/main" id="{46819540-F919-4CBD-B10D-4BFDA1A00559}"/>
               </a:ext>
             </a:extLst>
           </p:cNvPr>
@@ -24289,7 +24289,7 @@
           <p:cNvPr id="17" name="">
             <a:extLst xmlns:a="http://schemas.openxmlformats.org/drawingml/2006/main">
               <a:ext uri="{FF2B5EF4-FFF2-40B4-BE49-F238E27FC236}">
-                <a16:creationId xmlns:a16="http://schemas.microsoft.com/office/drawing/2014/main" id="{412CEF7E-3FEC-4126-A240-96D1850786EC}"/>
+                <a16:creationId xmlns:a16="http://schemas.microsoft.com/office/drawing/2014/main" id="{CC7EA732-9D80-488B-B16A-32A27A2B843E}"/>
               </a:ext>
             </a:extLst>
           </p:cNvPr>
@@ -24353,7 +24353,7 @@
           <p:cNvPr id="18" name="">
             <a:extLst xmlns:a="http://schemas.openxmlformats.org/drawingml/2006/main">
               <a:ext uri="{FF2B5EF4-FFF2-40B4-BE49-F238E27FC236}">
-                <a16:creationId xmlns:a16="http://schemas.microsoft.com/office/drawing/2014/main" id="{38C6D466-8BB8-4717-BB6A-1B53110AD585}"/>
+                <a16:creationId xmlns:a16="http://schemas.microsoft.com/office/drawing/2014/main" id="{41CD22D4-B5B3-4E80-9160-73FE9EC3B911}"/>
               </a:ext>
             </a:extLst>
           </p:cNvPr>
@@ -24386,7 +24386,7 @@
           <p:cNvPr id="19" name="">
             <a:extLst xmlns:a="http://schemas.openxmlformats.org/drawingml/2006/main">
               <a:ext uri="{FF2B5EF4-FFF2-40B4-BE49-F238E27FC236}">
-                <a16:creationId xmlns:a16="http://schemas.microsoft.com/office/drawing/2014/main" id="{52B89C1B-8F5F-4410-91DC-CB79E259B6B5}"/>
+                <a16:creationId xmlns:a16="http://schemas.microsoft.com/office/drawing/2014/main" id="{3AA9F6BA-9A13-4595-98B0-4171C0085A51}"/>
               </a:ext>
             </a:extLst>
           </p:cNvPr>
@@ -24419,7 +24419,7 @@
           <p:cNvPr id="20" name="">
             <a:extLst xmlns:a="http://schemas.openxmlformats.org/drawingml/2006/main">
               <a:ext uri="{FF2B5EF4-FFF2-40B4-BE49-F238E27FC236}">
-                <a16:creationId xmlns:a16="http://schemas.microsoft.com/office/drawing/2014/main" id="{44C9C809-2F8F-4484-9C7A-E2BE4F08A90F}"/>
+                <a16:creationId xmlns:a16="http://schemas.microsoft.com/office/drawing/2014/main" id="{7222264C-C01B-43DF-81B7-2E4E832BE2B6}"/>
               </a:ext>
             </a:extLst>
           </p:cNvPr>
@@ -24473,7 +24473,7 @@
                 <a:ea typeface="Malgun Gothic"/>
                 <a:cs typeface="Malgun Gothic"/>
               </a:rPr>
-              <a:t>시연 입력 3개</a:t>
+              <a:t>시연 입력 4개</a:t>
             </a:r>
           </a:p>
         </p:txBody>
@@ -24483,19 +24483,19 @@
           <p:cNvPr id="21" name="">
             <a:extLst xmlns:a="http://schemas.openxmlformats.org/drawingml/2006/main">
               <a:ext uri="{FF2B5EF4-FFF2-40B4-BE49-F238E27FC236}">
-                <a16:creationId xmlns:a16="http://schemas.microsoft.com/office/drawing/2014/main" id="{76CA848F-1DCE-440B-BF4D-F22577F81F70}"/>
-              </a:ext>
-            </a:extLst>
-          </p:cNvPr>
-          <p:cNvSpPr>
-            <a:spLocks xmlns:a="http://schemas.openxmlformats.org/drawingml/2006/main" noGrp="1"/>
-          </p:cNvSpPr>
-          <p:nvPr/>
-        </p:nvSpPr>
-        <p:spPr>
-          <a:xfrm xmlns:a="http://schemas.openxmlformats.org/drawingml/2006/main">
-            <a:off x="5048250" y="2819400"/>
-            <a:ext cx="2095500" cy="190500"/>
+                <a16:creationId xmlns:a16="http://schemas.microsoft.com/office/drawing/2014/main" id="{D96CFA6F-2A1C-46F4-93C0-7AEE29C64394}"/>
+              </a:ext>
+            </a:extLst>
+          </p:cNvPr>
+          <p:cNvSpPr>
+            <a:spLocks xmlns:a="http://schemas.openxmlformats.org/drawingml/2006/main" noGrp="1"/>
+          </p:cNvSpPr>
+          <p:nvPr/>
+        </p:nvSpPr>
+        <p:spPr>
+          <a:xfrm xmlns:a="http://schemas.openxmlformats.org/drawingml/2006/main">
+            <a:off x="5048250" y="2781300"/>
+            <a:ext cx="2476500" cy="190500"/>
           </a:xfrm>
           <a:prstGeom xmlns:a="http://schemas.openxmlformats.org/drawingml/2006/main" prst="rect">
             <a:avLst/>
@@ -24537,7 +24537,7 @@
                 <a:ea typeface="Malgun Gothic"/>
                 <a:cs typeface="Malgun Gothic"/>
               </a:rPr>
-              <a:t>1) 주소 + 이름 + API key</a:t>
+              <a:t>1) 계정 + 학번 + 지번 주소</a:t>
             </a:r>
           </a:p>
         </p:txBody>
@@ -24547,19 +24547,19 @@
           <p:cNvPr id="22" name="">
             <a:extLst xmlns:a="http://schemas.openxmlformats.org/drawingml/2006/main">
               <a:ext uri="{FF2B5EF4-FFF2-40B4-BE49-F238E27FC236}">
-                <a16:creationId xmlns:a16="http://schemas.microsoft.com/office/drawing/2014/main" id="{12F703B7-D693-4DE4-8A22-1BE9488EE332}"/>
-              </a:ext>
-            </a:extLst>
-          </p:cNvPr>
-          <p:cNvSpPr>
-            <a:spLocks xmlns:a="http://schemas.openxmlformats.org/drawingml/2006/main" noGrp="1"/>
-          </p:cNvSpPr>
-          <p:nvPr/>
-        </p:nvSpPr>
-        <p:spPr>
-          <a:xfrm xmlns:a="http://schemas.openxmlformats.org/drawingml/2006/main">
-            <a:off x="5257800" y="3048000"/>
-            <a:ext cx="5238750" cy="304800"/>
+                <a16:creationId xmlns:a16="http://schemas.microsoft.com/office/drawing/2014/main" id="{758CC22D-44AF-4427-A9F4-EC487DA1F91D}"/>
+              </a:ext>
+            </a:extLst>
+          </p:cNvPr>
+          <p:cNvSpPr>
+            <a:spLocks xmlns:a="http://schemas.openxmlformats.org/drawingml/2006/main" noGrp="1"/>
+          </p:cNvSpPr>
+          <p:nvPr/>
+        </p:nvSpPr>
+        <p:spPr>
+          <a:xfrm xmlns:a="http://schemas.openxmlformats.org/drawingml/2006/main">
+            <a:off x="5257800" y="3009900"/>
+            <a:ext cx="5429250" cy="323850"/>
           </a:xfrm>
           <a:prstGeom xmlns:a="http://schemas.openxmlformats.org/drawingml/2006/main" prst="rect">
             <a:avLst/>
@@ -24583,7 +24583,7 @@
           <a:lstStyle xmlns:a="http://schemas.openxmlformats.org/drawingml/2006/main"/>
           <a:p xmlns:a="http://schemas.openxmlformats.org/drawingml/2006/main">
             <a:pPr algn="l">
-              <a:defRPr sz="825" b="0">
+              <a:defRPr sz="788" b="0">
                 <a:solidFill>
                   <a:srgbClr val="5A6573"/>
                 </a:solidFill>
@@ -24593,7 +24593,7 @@
               </a:defRPr>
             </a:pPr>
             <a:r>
-              <a:rPr sz="825" b="0">
+              <a:rPr sz="788" b="0">
                 <a:solidFill>
                   <a:srgbClr val="5A6573"/>
                 </a:solidFill>
@@ -24601,7 +24601,7 @@
                 <a:ea typeface="Malgun Gothic"/>
                 <a:cs typeface="Malgun Gothic"/>
               </a:rPr>
-              <a:t>주소는 경기도 화성시 동탄역로 150 102동 3804호야. 그리고 내 이름은 최호준이고, api 키는 sk-...야.</a:t>
+              <a:t>내 아이디는 chjspd이고, 비밀번호는 32215116이고, 내 학번은 32215116이고, 내 집 주소는 경기도 용인시 수지구 1336-2야.</a:t>
             </a:r>
           </a:p>
         </p:txBody>
@@ -24611,7 +24611,7 @@
           <p:cNvPr id="23" name="">
             <a:extLst xmlns:a="http://schemas.openxmlformats.org/drawingml/2006/main">
               <a:ext uri="{FF2B5EF4-FFF2-40B4-BE49-F238E27FC236}">
-                <a16:creationId xmlns:a16="http://schemas.microsoft.com/office/drawing/2014/main" id="{B355EE1A-E24F-44D5-8D6B-35C8474FE4DD}"/>
+                <a16:creationId xmlns:a16="http://schemas.microsoft.com/office/drawing/2014/main" id="{3EDF7D3D-4820-4E78-A02D-F7A6522BFC50}"/>
               </a:ext>
             </a:extLst>
           </p:cNvPr>
@@ -24665,7 +24665,7 @@
                 <a:ea typeface="Malgun Gothic"/>
                 <a:cs typeface="Malgun Gothic"/>
               </a:rPr>
-              <a:t>기대: 주소, 이름, secret이 각각 &lt;PRIVATE_...&gt;로 마스킹</a:t>
+              <a:t>기대: 아이디, 비밀번호, 학번, 지번 주소가 마스킹</a:t>
             </a:r>
           </a:p>
         </p:txBody>
@@ -24675,19 +24675,19 @@
           <p:cNvPr id="24" name="">
             <a:extLst xmlns:a="http://schemas.openxmlformats.org/drawingml/2006/main">
               <a:ext uri="{FF2B5EF4-FFF2-40B4-BE49-F238E27FC236}">
-                <a16:creationId xmlns:a16="http://schemas.microsoft.com/office/drawing/2014/main" id="{98B9C595-96AA-48DC-8302-085B3CD2F4B8}"/>
-              </a:ext>
-            </a:extLst>
-          </p:cNvPr>
-          <p:cNvSpPr>
-            <a:spLocks xmlns:a="http://schemas.openxmlformats.org/drawingml/2006/main" noGrp="1"/>
-          </p:cNvSpPr>
-          <p:nvPr/>
-        </p:nvSpPr>
-        <p:spPr>
-          <a:xfrm xmlns:a="http://schemas.openxmlformats.org/drawingml/2006/main">
-            <a:off x="5048250" y="3810000"/>
-            <a:ext cx="2095500" cy="190500"/>
+                <a16:creationId xmlns:a16="http://schemas.microsoft.com/office/drawing/2014/main" id="{5292626C-6B5D-4509-9EED-211176D51126}"/>
+              </a:ext>
+            </a:extLst>
+          </p:cNvPr>
+          <p:cNvSpPr>
+            <a:spLocks xmlns:a="http://schemas.openxmlformats.org/drawingml/2006/main" noGrp="1"/>
+          </p:cNvSpPr>
+          <p:nvPr/>
+        </p:nvSpPr>
+        <p:spPr>
+          <a:xfrm xmlns:a="http://schemas.openxmlformats.org/drawingml/2006/main">
+            <a:off x="5048250" y="3771900"/>
+            <a:ext cx="2476500" cy="190500"/>
           </a:xfrm>
           <a:prstGeom xmlns:a="http://schemas.openxmlformats.org/drawingml/2006/main" prst="rect">
             <a:avLst/>
@@ -24729,7 +24729,7 @@
                 <a:ea typeface="Malgun Gothic"/>
                 <a:cs typeface="Malgun Gothic"/>
               </a:rPr>
-              <a:t>2) 아이디 + 비밀번호</a:t>
+              <a:t>2) 인증·네트워크 정보</a:t>
             </a:r>
           </a:p>
         </p:txBody>
@@ -24739,83 +24739,19 @@
           <p:cNvPr id="25" name="">
             <a:extLst xmlns:a="http://schemas.openxmlformats.org/drawingml/2006/main">
               <a:ext uri="{FF2B5EF4-FFF2-40B4-BE49-F238E27FC236}">
-                <a16:creationId xmlns:a16="http://schemas.microsoft.com/office/drawing/2014/main" id="{3C4B4A1E-781A-44F6-A6C3-1A54247F91A3}"/>
-              </a:ext>
-            </a:extLst>
-          </p:cNvPr>
-          <p:cNvSpPr>
-            <a:spLocks xmlns:a="http://schemas.openxmlformats.org/drawingml/2006/main" noGrp="1"/>
-          </p:cNvSpPr>
-          <p:nvPr/>
-        </p:nvSpPr>
-        <p:spPr>
-          <a:xfrm xmlns:a="http://schemas.openxmlformats.org/drawingml/2006/main">
-            <a:off x="5257800" y="4038600"/>
-            <a:ext cx="4953000" cy="228600"/>
-          </a:xfrm>
-          <a:prstGeom xmlns:a="http://schemas.openxmlformats.org/drawingml/2006/main" prst="rect">
-            <a:avLst/>
-          </a:prstGeom>
-          <a:solidFill xmlns:a="http://schemas.openxmlformats.org/drawingml/2006/main">
-            <a:srgbClr val="000000">
-              <a:alpha val="0"/>
-            </a:srgbClr>
-          </a:solidFill>
-          <a:ln xmlns:a="http://schemas.openxmlformats.org/drawingml/2006/main" w="0">
-            <a:solidFill>
-              <a:srgbClr val="000000">
-                <a:alpha val="0"/>
-              </a:srgbClr>
-            </a:solidFill>
-            <a:prstDash val="solid"/>
-          </a:ln>
-        </p:spPr>
-        <p:txBody>
-          <a:bodyPr xmlns:a="http://schemas.openxmlformats.org/drawingml/2006/main" lIns="0" tIns="0" rIns="0" bIns="0" anchor="t"/>
-          <a:lstStyle xmlns:a="http://schemas.openxmlformats.org/drawingml/2006/main"/>
-          <a:p xmlns:a="http://schemas.openxmlformats.org/drawingml/2006/main">
-            <a:pPr algn="l">
-              <a:defRPr sz="825" b="0">
-                <a:solidFill>
-                  <a:srgbClr val="5A6573"/>
-                </a:solidFill>
-                <a:latin typeface="Malgun Gothic"/>
-                <a:ea typeface="Malgun Gothic"/>
-                <a:cs typeface="Malgun Gothic"/>
-              </a:defRPr>
-            </a:pPr>
-            <a:r>
-              <a:rPr sz="825" b="0">
-                <a:solidFill>
-                  <a:srgbClr val="5A6573"/>
-                </a:solidFill>
-                <a:latin typeface="Malgun Gothic"/>
-                <a:ea typeface="Malgun Gothic"/>
-                <a:cs typeface="Malgun Gothic"/>
-              </a:rPr>
-              <a:t>아이디는 chjspd고, 비밀번호는 chIghwns1011!@!이야.</a:t>
-            </a:r>
-          </a:p>
-        </p:txBody>
-      </p:sp>
-      <p:sp>
-        <p:nvSpPr>
-          <p:cNvPr id="26" name="">
-            <a:extLst xmlns:a="http://schemas.openxmlformats.org/drawingml/2006/main">
-              <a:ext uri="{FF2B5EF4-FFF2-40B4-BE49-F238E27FC236}">
-                <a16:creationId xmlns:a16="http://schemas.microsoft.com/office/drawing/2014/main" id="{DCF3C761-2896-49C9-8385-B4B41732C2E3}"/>
-              </a:ext>
-            </a:extLst>
-          </p:cNvPr>
-          <p:cNvSpPr>
-            <a:spLocks xmlns:a="http://schemas.openxmlformats.org/drawingml/2006/main" noGrp="1"/>
-          </p:cNvSpPr>
-          <p:nvPr/>
-        </p:nvSpPr>
-        <p:spPr>
-          <a:xfrm xmlns:a="http://schemas.openxmlformats.org/drawingml/2006/main">
-            <a:off x="5257800" y="4324350"/>
-            <a:ext cx="5334000" cy="190500"/>
+                <a16:creationId xmlns:a16="http://schemas.microsoft.com/office/drawing/2014/main" id="{F5C84803-DD0F-4B89-B8FD-BD5922F24B73}"/>
+              </a:ext>
+            </a:extLst>
+          </p:cNvPr>
+          <p:cNvSpPr>
+            <a:spLocks xmlns:a="http://schemas.openxmlformats.org/drawingml/2006/main" noGrp="1"/>
+          </p:cNvSpPr>
+          <p:nvPr/>
+        </p:nvSpPr>
+        <p:spPr>
+          <a:xfrm xmlns:a="http://schemas.openxmlformats.org/drawingml/2006/main">
+            <a:off x="5257800" y="4000500"/>
+            <a:ext cx="5334000" cy="228600"/>
           </a:xfrm>
           <a:prstGeom xmlns:a="http://schemas.openxmlformats.org/drawingml/2006/main" prst="rect">
             <a:avLst/>
@@ -24841,6 +24777,70 @@
             <a:pPr algn="l">
               <a:defRPr sz="788" b="0">
                 <a:solidFill>
+                  <a:srgbClr val="5A6573"/>
+                </a:solidFill>
+                <a:latin typeface="Malgun Gothic"/>
+                <a:ea typeface="Malgun Gothic"/>
+                <a:cs typeface="Malgun Gothic"/>
+              </a:defRPr>
+            </a:pPr>
+            <a:r>
+              <a:rPr sz="788" b="0">
+                <a:solidFill>
+                  <a:srgbClr val="5A6573"/>
+                </a:solidFill>
+                <a:latin typeface="Malgun Gothic"/>
+                <a:ea typeface="Malgun Gothic"/>
+                <a:cs typeface="Malgun Gothic"/>
+              </a:rPr>
+              <a:t>OTP는 123456이고, 접속 IP는 192.168.0.15, MAC주소는 AA:BB:CC:DD:EE:FF입니다.</a:t>
+            </a:r>
+          </a:p>
+        </p:txBody>
+      </p:sp>
+      <p:sp>
+        <p:nvSpPr>
+          <p:cNvPr id="26" name="">
+            <a:extLst xmlns:a="http://schemas.openxmlformats.org/drawingml/2006/main">
+              <a:ext uri="{FF2B5EF4-FFF2-40B4-BE49-F238E27FC236}">
+                <a16:creationId xmlns:a16="http://schemas.microsoft.com/office/drawing/2014/main" id="{22BC00F0-2998-4B1E-8D1B-70D194D2AB7E}"/>
+              </a:ext>
+            </a:extLst>
+          </p:cNvPr>
+          <p:cNvSpPr>
+            <a:spLocks xmlns:a="http://schemas.openxmlformats.org/drawingml/2006/main" noGrp="1"/>
+          </p:cNvSpPr>
+          <p:nvPr/>
+        </p:nvSpPr>
+        <p:spPr>
+          <a:xfrm xmlns:a="http://schemas.openxmlformats.org/drawingml/2006/main">
+            <a:off x="5257800" y="4286250"/>
+            <a:ext cx="5334000" cy="190500"/>
+          </a:xfrm>
+          <a:prstGeom xmlns:a="http://schemas.openxmlformats.org/drawingml/2006/main" prst="rect">
+            <a:avLst/>
+          </a:prstGeom>
+          <a:solidFill xmlns:a="http://schemas.openxmlformats.org/drawingml/2006/main">
+            <a:srgbClr val="000000">
+              <a:alpha val="0"/>
+            </a:srgbClr>
+          </a:solidFill>
+          <a:ln xmlns:a="http://schemas.openxmlformats.org/drawingml/2006/main" w="0">
+            <a:solidFill>
+              <a:srgbClr val="000000">
+                <a:alpha val="0"/>
+              </a:srgbClr>
+            </a:solidFill>
+            <a:prstDash val="solid"/>
+          </a:ln>
+        </p:spPr>
+        <p:txBody>
+          <a:bodyPr xmlns:a="http://schemas.openxmlformats.org/drawingml/2006/main" lIns="0" tIns="0" rIns="0" bIns="0" anchor="t"/>
+          <a:lstStyle xmlns:a="http://schemas.openxmlformats.org/drawingml/2006/main"/>
+          <a:p xmlns:a="http://schemas.openxmlformats.org/drawingml/2006/main">
+            <a:pPr algn="l">
+              <a:defRPr sz="788" b="0">
+                <a:solidFill>
                   <a:srgbClr val="2F7D4E"/>
                 </a:solidFill>
                 <a:latin typeface="Malgun Gothic"/>
@@ -24857,7 +24857,7 @@
                 <a:ea typeface="Malgun Gothic"/>
                 <a:cs typeface="Malgun Gothic"/>
               </a:rPr>
-              <a:t>기대: 비밀번호는 secret으로 마스킹, 아이디는 정책에 따라 계정 식별자로 처리</a:t>
+              <a:t>기대: OTP, IP, MAC이 각각 마스킹</a:t>
             </a:r>
           </a:p>
         </p:txBody>
@@ -24867,18 +24867,18 @@
           <p:cNvPr id="27" name="">
             <a:extLst xmlns:a="http://schemas.openxmlformats.org/drawingml/2006/main">
               <a:ext uri="{FF2B5EF4-FFF2-40B4-BE49-F238E27FC236}">
-                <a16:creationId xmlns:a16="http://schemas.microsoft.com/office/drawing/2014/main" id="{59C1D65D-7879-4227-A4CF-7FD09BD9B2EC}"/>
-              </a:ext>
-            </a:extLst>
-          </p:cNvPr>
-          <p:cNvSpPr>
-            <a:spLocks xmlns:a="http://schemas.openxmlformats.org/drawingml/2006/main" noGrp="1"/>
-          </p:cNvSpPr>
-          <p:nvPr/>
-        </p:nvSpPr>
-        <p:spPr>
-          <a:xfrm xmlns:a="http://schemas.openxmlformats.org/drawingml/2006/main">
-            <a:off x="5048250" y="4743450"/>
+                <a16:creationId xmlns:a16="http://schemas.microsoft.com/office/drawing/2014/main" id="{1D7F83C3-0ECC-4F0D-B6AE-631642179476}"/>
+              </a:ext>
+            </a:extLst>
+          </p:cNvPr>
+          <p:cNvSpPr>
+            <a:spLocks xmlns:a="http://schemas.openxmlformats.org/drawingml/2006/main" noGrp="1"/>
+          </p:cNvSpPr>
+          <p:nvPr/>
+        </p:nvSpPr>
+        <p:spPr>
+          <a:xfrm xmlns:a="http://schemas.openxmlformats.org/drawingml/2006/main">
+            <a:off x="5048250" y="4686300"/>
             <a:ext cx="2095500" cy="190500"/>
           </a:xfrm>
           <a:prstGeom xmlns:a="http://schemas.openxmlformats.org/drawingml/2006/main" prst="rect">
@@ -24931,83 +24931,19 @@
           <p:cNvPr id="28" name="">
             <a:extLst xmlns:a="http://schemas.openxmlformats.org/drawingml/2006/main">
               <a:ext uri="{FF2B5EF4-FFF2-40B4-BE49-F238E27FC236}">
-                <a16:creationId xmlns:a16="http://schemas.microsoft.com/office/drawing/2014/main" id="{DB00E961-4F5C-4508-A665-9A463D02D3C0}"/>
-              </a:ext>
-            </a:extLst>
-          </p:cNvPr>
-          <p:cNvSpPr>
-            <a:spLocks xmlns:a="http://schemas.openxmlformats.org/drawingml/2006/main" noGrp="1"/>
-          </p:cNvSpPr>
-          <p:nvPr/>
-        </p:nvSpPr>
-        <p:spPr>
-          <a:xfrm xmlns:a="http://schemas.openxmlformats.org/drawingml/2006/main">
-            <a:off x="5257800" y="4972050"/>
-            <a:ext cx="4953000" cy="209550"/>
-          </a:xfrm>
-          <a:prstGeom xmlns:a="http://schemas.openxmlformats.org/drawingml/2006/main" prst="rect">
-            <a:avLst/>
-          </a:prstGeom>
-          <a:solidFill xmlns:a="http://schemas.openxmlformats.org/drawingml/2006/main">
-            <a:srgbClr val="000000">
-              <a:alpha val="0"/>
-            </a:srgbClr>
-          </a:solidFill>
-          <a:ln xmlns:a="http://schemas.openxmlformats.org/drawingml/2006/main" w="0">
-            <a:solidFill>
-              <a:srgbClr val="000000">
-                <a:alpha val="0"/>
-              </a:srgbClr>
-            </a:solidFill>
-            <a:prstDash val="solid"/>
-          </a:ln>
-        </p:spPr>
-        <p:txBody>
-          <a:bodyPr xmlns:a="http://schemas.openxmlformats.org/drawingml/2006/main" lIns="0" tIns="0" rIns="0" bIns="0" anchor="t"/>
-          <a:lstStyle xmlns:a="http://schemas.openxmlformats.org/drawingml/2006/main"/>
-          <a:p xmlns:a="http://schemas.openxmlformats.org/drawingml/2006/main">
-            <a:pPr algn="l">
-              <a:defRPr sz="825" b="0">
-                <a:solidFill>
-                  <a:srgbClr val="5A6573"/>
-                </a:solidFill>
-                <a:latin typeface="Malgun Gothic"/>
-                <a:ea typeface="Malgun Gothic"/>
-                <a:cs typeface="Malgun Gothic"/>
-              </a:defRPr>
-            </a:pPr>
-            <a:r>
-              <a:rPr sz="825" b="0">
-                <a:solidFill>
-                  <a:srgbClr val="5A6573"/>
-                </a:solidFill>
-                <a:latin typeface="Malgun Gothic"/>
-                <a:ea typeface="Malgun Gothic"/>
-                <a:cs typeface="Malgun Gothic"/>
-              </a:rPr>
-              <a:t>모델명은 900101-1234567-A입니다.</a:t>
-            </a:r>
-          </a:p>
-        </p:txBody>
-      </p:sp>
-      <p:sp>
-        <p:nvSpPr>
-          <p:cNvPr id="29" name="">
-            <a:extLst xmlns:a="http://schemas.openxmlformats.org/drawingml/2006/main">
-              <a:ext uri="{FF2B5EF4-FFF2-40B4-BE49-F238E27FC236}">
-                <a16:creationId xmlns:a16="http://schemas.microsoft.com/office/drawing/2014/main" id="{C843276E-C78D-4C5E-AA4C-6A00000B3C1A}"/>
-              </a:ext>
-            </a:extLst>
-          </p:cNvPr>
-          <p:cNvSpPr>
-            <a:spLocks xmlns:a="http://schemas.openxmlformats.org/drawingml/2006/main" noGrp="1"/>
-          </p:cNvSpPr>
-          <p:nvPr/>
-        </p:nvSpPr>
-        <p:spPr>
-          <a:xfrm xmlns:a="http://schemas.openxmlformats.org/drawingml/2006/main">
-            <a:off x="5257800" y="5238750"/>
-            <a:ext cx="5143500" cy="190500"/>
+                <a16:creationId xmlns:a16="http://schemas.microsoft.com/office/drawing/2014/main" id="{B1537F37-AAFE-4272-AFD0-1BC8BEF21CE6}"/>
+              </a:ext>
+            </a:extLst>
+          </p:cNvPr>
+          <p:cNvSpPr>
+            <a:spLocks xmlns:a="http://schemas.openxmlformats.org/drawingml/2006/main" noGrp="1"/>
+          </p:cNvSpPr>
+          <p:nvPr/>
+        </p:nvSpPr>
+        <p:spPr>
+          <a:xfrm xmlns:a="http://schemas.openxmlformats.org/drawingml/2006/main">
+            <a:off x="5257800" y="4914900"/>
+            <a:ext cx="5334000" cy="247650"/>
           </a:xfrm>
           <a:prstGeom xmlns:a="http://schemas.openxmlformats.org/drawingml/2006/main" prst="rect">
             <a:avLst/>
@@ -25033,6 +24969,70 @@
             <a:pPr algn="l">
               <a:defRPr sz="788" b="0">
                 <a:solidFill>
+                  <a:srgbClr val="5A6573"/>
+                </a:solidFill>
+                <a:latin typeface="Malgun Gothic"/>
+                <a:ea typeface="Malgun Gothic"/>
+                <a:cs typeface="Malgun Gothic"/>
+              </a:defRPr>
+            </a:pPr>
+            <a:r>
+              <a:rPr sz="788" b="0">
+                <a:solidFill>
+                  <a:srgbClr val="5A6573"/>
+                </a:solidFill>
+                <a:latin typeface="Malgun Gothic"/>
+                <a:ea typeface="Malgun Gothic"/>
+                <a:cs typeface="Malgun Gothic"/>
+              </a:rPr>
+              <a:t>모델명은 900101-1234567-A입니다. 문서 버전은 sk-proj-example-not-real로 표시했습니다.</a:t>
+            </a:r>
+          </a:p>
+        </p:txBody>
+      </p:sp>
+      <p:sp>
+        <p:nvSpPr>
+          <p:cNvPr id="29" name="">
+            <a:extLst xmlns:a="http://schemas.openxmlformats.org/drawingml/2006/main">
+              <a:ext uri="{FF2B5EF4-FFF2-40B4-BE49-F238E27FC236}">
+                <a16:creationId xmlns:a16="http://schemas.microsoft.com/office/drawing/2014/main" id="{D658BDE9-69FB-41CE-B280-3D36E88C9A26}"/>
+              </a:ext>
+            </a:extLst>
+          </p:cNvPr>
+          <p:cNvSpPr>
+            <a:spLocks xmlns:a="http://schemas.openxmlformats.org/drawingml/2006/main" noGrp="1"/>
+          </p:cNvSpPr>
+          <p:nvPr/>
+        </p:nvSpPr>
+        <p:spPr>
+          <a:xfrm xmlns:a="http://schemas.openxmlformats.org/drawingml/2006/main">
+            <a:off x="5257800" y="5219700"/>
+            <a:ext cx="5143500" cy="190500"/>
+          </a:xfrm>
+          <a:prstGeom xmlns:a="http://schemas.openxmlformats.org/drawingml/2006/main" prst="rect">
+            <a:avLst/>
+          </a:prstGeom>
+          <a:solidFill xmlns:a="http://schemas.openxmlformats.org/drawingml/2006/main">
+            <a:srgbClr val="000000">
+              <a:alpha val="0"/>
+            </a:srgbClr>
+          </a:solidFill>
+          <a:ln xmlns:a="http://schemas.openxmlformats.org/drawingml/2006/main" w="0">
+            <a:solidFill>
+              <a:srgbClr val="000000">
+                <a:alpha val="0"/>
+              </a:srgbClr>
+            </a:solidFill>
+            <a:prstDash val="solid"/>
+          </a:ln>
+        </p:spPr>
+        <p:txBody>
+          <a:bodyPr xmlns:a="http://schemas.openxmlformats.org/drawingml/2006/main" lIns="0" tIns="0" rIns="0" bIns="0" anchor="t"/>
+          <a:lstStyle xmlns:a="http://schemas.openxmlformats.org/drawingml/2006/main"/>
+          <a:p xmlns:a="http://schemas.openxmlformats.org/drawingml/2006/main">
+            <a:pPr algn="l">
+              <a:defRPr sz="788" b="0">
+                <a:solidFill>
                   <a:srgbClr val="2F7D4E"/>
                 </a:solidFill>
                 <a:latin typeface="Malgun Gothic"/>
@@ -25049,7 +25049,7 @@
                 <a:ea typeface="Malgun Gothic"/>
                 <a:cs typeface="Malgun Gothic"/>
               </a:rPr>
-              <a:t>기대: 실제 주민번호가 아닌 코드형 문맥이면 마스킹하지 않음</a:t>
+              <a:t>기대: 실제 개인정보가 아닌 반례는 의도적으로 마스킹하지 않음</a:t>
             </a:r>
           </a:p>
         </p:txBody>
@@ -25059,7 +25059,7 @@
           <p:cNvPr id="30" name="">
             <a:extLst xmlns:a="http://schemas.openxmlformats.org/drawingml/2006/main">
               <a:ext uri="{FF2B5EF4-FFF2-40B4-BE49-F238E27FC236}">
-                <a16:creationId xmlns:a16="http://schemas.microsoft.com/office/drawing/2014/main" id="{A3DCD13F-A0B1-4207-A1FC-11DFDEA36AF2}"/>
+                <a16:creationId xmlns:a16="http://schemas.microsoft.com/office/drawing/2014/main" id="{05016E72-CE95-4F4E-945A-67F955410508}"/>
               </a:ext>
             </a:extLst>
           </p:cNvPr>
@@ -25094,7 +25094,7 @@
           <p:cNvPr id="31" name="">
             <a:extLst xmlns:a="http://schemas.openxmlformats.org/drawingml/2006/main">
               <a:ext uri="{FF2B5EF4-FFF2-40B4-BE49-F238E27FC236}">
-                <a16:creationId xmlns:a16="http://schemas.microsoft.com/office/drawing/2014/main" id="{840F9C71-EDF2-4572-A808-D56F3BBEFE92}"/>
+                <a16:creationId xmlns:a16="http://schemas.microsoft.com/office/drawing/2014/main" id="{1C565D73-DA3F-41DE-A318-7F3C76AA5431}"/>
               </a:ext>
             </a:extLst>
           </p:cNvPr>
@@ -25158,7 +25158,7 @@
           <p:cNvPr id="32" name="">
             <a:extLst xmlns:a="http://schemas.openxmlformats.org/drawingml/2006/main">
               <a:ext uri="{FF2B5EF4-FFF2-40B4-BE49-F238E27FC236}">
-                <a16:creationId xmlns:a16="http://schemas.microsoft.com/office/drawing/2014/main" id="{D8824530-1951-4CC3-A71A-CDEFC18ED5A3}"/>
+                <a16:creationId xmlns:a16="http://schemas.microsoft.com/office/drawing/2014/main" id="{E8E28277-FAA2-4A40-B268-ED0B45FF9546}"/>
               </a:ext>
             </a:extLst>
           </p:cNvPr>
@@ -25222,7 +25222,7 @@
           <p:cNvPr id="33" name="">
             <a:extLst xmlns:a="http://schemas.openxmlformats.org/drawingml/2006/main">
               <a:ext uri="{FF2B5EF4-FFF2-40B4-BE49-F238E27FC236}">
-                <a16:creationId xmlns:a16="http://schemas.microsoft.com/office/drawing/2014/main" id="{9B6ED157-7C7A-42C6-9372-74BBEE31B101}"/>
+                <a16:creationId xmlns:a16="http://schemas.microsoft.com/office/drawing/2014/main" id="{97EE0F03-6270-452C-99B4-340D43133CDB}"/>
               </a:ext>
             </a:extLst>
           </p:cNvPr>
@@ -25284,7 +25284,7 @@
     </p:spTree>
     <p:extLst>
       <p:ext uri="{BB962C8B-B14F-4D97-AF65-F5344CB8AC3E}">
-        <p14:creationId xmlns:p14="http://schemas.microsoft.com/office/powerpoint/2010/main" val="1662143578"/>
+        <p14:creationId xmlns:p14="http://schemas.microsoft.com/office/powerpoint/2010/main" val="1577442196"/>
       </p:ext>
     </p:extLst>
   </p:cSld>
